--- a/Project/Project Progress.pptx
+++ b/Project/Project Progress.pptx
@@ -6,7 +6,19 @@
   </p:sldMasterIdLst>
   <p:sldIdLst>
     <p:sldId id="256" r:id="rId2"/>
-    <p:sldId id="257" r:id="rId3"/>
+    <p:sldId id="258" r:id="rId3"/>
+    <p:sldId id="259" r:id="rId4"/>
+    <p:sldId id="260" r:id="rId5"/>
+    <p:sldId id="261" r:id="rId6"/>
+    <p:sldId id="262" r:id="rId7"/>
+    <p:sldId id="257" r:id="rId8"/>
+    <p:sldId id="263" r:id="rId9"/>
+    <p:sldId id="264" r:id="rId10"/>
+    <p:sldId id="265" r:id="rId11"/>
+    <p:sldId id="267" r:id="rId12"/>
+    <p:sldId id="268" r:id="rId13"/>
+    <p:sldId id="269" r:id="rId14"/>
+    <p:sldId id="266" r:id="rId15"/>
   </p:sldIdLst>
   <p:sldSz cx="12192000" cy="6858000"/>
   <p:notesSz cx="6858000" cy="9144000"/>
@@ -105,6 +117,11 @@
       </a:defRPr>
     </a:lvl9pPr>
   </p:defaultTextStyle>
+  <p:extLst>
+    <p:ext uri="{EFAFB233-063F-42B5-8137-9DF3F51BA10A}">
+      <p15:sldGuideLst xmlns:p15="http://schemas.microsoft.com/office/powerpoint/2012/main"/>
+    </p:ext>
+  </p:extLst>
 </p:presentation>
 </file>
 
@@ -257,7 +274,7 @@
           <a:p>
             <a:fld id="{14B2C91B-C10F-455D-BCC4-2D03018C3ADE}" type="datetimeFigureOut">
               <a:rPr lang="en-GB" smtClean="0"/>
-              <a:t>21/07/2026</a:t>
+              <a:t>23/07/2026</a:t>
             </a:fld>
             <a:endParaRPr lang="en-GB"/>
           </a:p>
@@ -457,7 +474,7 @@
           <a:p>
             <a:fld id="{14B2C91B-C10F-455D-BCC4-2D03018C3ADE}" type="datetimeFigureOut">
               <a:rPr lang="en-GB" smtClean="0"/>
-              <a:t>21/07/2026</a:t>
+              <a:t>23/07/2026</a:t>
             </a:fld>
             <a:endParaRPr lang="en-GB"/>
           </a:p>
@@ -667,7 +684,7 @@
           <a:p>
             <a:fld id="{14B2C91B-C10F-455D-BCC4-2D03018C3ADE}" type="datetimeFigureOut">
               <a:rPr lang="en-GB" smtClean="0"/>
-              <a:t>21/07/2026</a:t>
+              <a:t>23/07/2026</a:t>
             </a:fld>
             <a:endParaRPr lang="en-GB"/>
           </a:p>
@@ -867,7 +884,7 @@
           <a:p>
             <a:fld id="{14B2C91B-C10F-455D-BCC4-2D03018C3ADE}" type="datetimeFigureOut">
               <a:rPr lang="en-GB" smtClean="0"/>
-              <a:t>21/07/2026</a:t>
+              <a:t>23/07/2026</a:t>
             </a:fld>
             <a:endParaRPr lang="en-GB"/>
           </a:p>
@@ -1143,7 +1160,7 @@
           <a:p>
             <a:fld id="{14B2C91B-C10F-455D-BCC4-2D03018C3ADE}" type="datetimeFigureOut">
               <a:rPr lang="en-GB" smtClean="0"/>
-              <a:t>21/07/2026</a:t>
+              <a:t>23/07/2026</a:t>
             </a:fld>
             <a:endParaRPr lang="en-GB"/>
           </a:p>
@@ -1411,7 +1428,7 @@
           <a:p>
             <a:fld id="{14B2C91B-C10F-455D-BCC4-2D03018C3ADE}" type="datetimeFigureOut">
               <a:rPr lang="en-GB" smtClean="0"/>
-              <a:t>21/07/2026</a:t>
+              <a:t>23/07/2026</a:t>
             </a:fld>
             <a:endParaRPr lang="en-GB"/>
           </a:p>
@@ -1826,7 +1843,7 @@
           <a:p>
             <a:fld id="{14B2C91B-C10F-455D-BCC4-2D03018C3ADE}" type="datetimeFigureOut">
               <a:rPr lang="en-GB" smtClean="0"/>
-              <a:t>21/07/2026</a:t>
+              <a:t>23/07/2026</a:t>
             </a:fld>
             <a:endParaRPr lang="en-GB"/>
           </a:p>
@@ -1968,7 +1985,7 @@
           <a:p>
             <a:fld id="{14B2C91B-C10F-455D-BCC4-2D03018C3ADE}" type="datetimeFigureOut">
               <a:rPr lang="en-GB" smtClean="0"/>
-              <a:t>21/07/2026</a:t>
+              <a:t>23/07/2026</a:t>
             </a:fld>
             <a:endParaRPr lang="en-GB"/>
           </a:p>
@@ -2081,7 +2098,7 @@
           <a:p>
             <a:fld id="{14B2C91B-C10F-455D-BCC4-2D03018C3ADE}" type="datetimeFigureOut">
               <a:rPr lang="en-GB" smtClean="0"/>
-              <a:t>21/07/2026</a:t>
+              <a:t>23/07/2026</a:t>
             </a:fld>
             <a:endParaRPr lang="en-GB"/>
           </a:p>
@@ -2394,7 +2411,7 @@
           <a:p>
             <a:fld id="{14B2C91B-C10F-455D-BCC4-2D03018C3ADE}" type="datetimeFigureOut">
               <a:rPr lang="en-GB" smtClean="0"/>
-              <a:t>21/07/2026</a:t>
+              <a:t>23/07/2026</a:t>
             </a:fld>
             <a:endParaRPr lang="en-GB"/>
           </a:p>
@@ -2683,7 +2700,7 @@
           <a:p>
             <a:fld id="{14B2C91B-C10F-455D-BCC4-2D03018C3ADE}" type="datetimeFigureOut">
               <a:rPr lang="en-GB" smtClean="0"/>
-              <a:t>21/07/2026</a:t>
+              <a:t>23/07/2026</a:t>
             </a:fld>
             <a:endParaRPr lang="en-GB"/>
           </a:p>
@@ -2926,7 +2943,7 @@
           <a:p>
             <a:fld id="{14B2C91B-C10F-455D-BCC4-2D03018C3ADE}" type="datetimeFigureOut">
               <a:rPr lang="en-GB" smtClean="0"/>
-              <a:t>21/07/2026</a:t>
+              <a:t>23/07/2026</a:t>
             </a:fld>
             <a:endParaRPr lang="en-GB"/>
           </a:p>
@@ -3365,10 +3382,9 @@
           <a:lstStyle/>
           <a:p>
             <a:r>
-              <a:rPr lang="en-GB"/>
-              <a:t>Project Progress</a:t>
+              <a:rPr lang="en-GB" dirty="0"/>
+              <a:t>Project Update</a:t>
             </a:r>
-            <a:endParaRPr lang="en-GB" dirty="0"/>
           </a:p>
         </p:txBody>
       </p:sp>
@@ -3390,10 +3406,61 @@
         </p:nvSpPr>
         <p:spPr/>
         <p:txBody>
-          <a:bodyPr/>
+          <a:bodyPr>
+            <a:normAutofit fontScale="92500"/>
+          </a:bodyPr>
           <a:lstStyle/>
           <a:p>
-            <a:endParaRPr lang="en-GB"/>
+            <a:r>
+              <a:rPr lang="en-GB" dirty="0"/>
+              <a:t>Hilary Wu</a:t>
+            </a:r>
+          </a:p>
+          <a:p>
+            <a:endParaRPr lang="en-GB" dirty="0"/>
+          </a:p>
+          <a:p>
+            <a:r>
+              <a:rPr lang="en-GB" dirty="0"/>
+              <a:t>Y.-C. Zhou </a:t>
+            </a:r>
+            <a:r>
+              <a:rPr lang="en-GB" i="1" dirty="0"/>
+              <a:t>et al.</a:t>
+            </a:r>
+            <a:r>
+              <a:rPr lang="en-GB" dirty="0"/>
+              <a:t>, “Solving Hamiltonian Constraint Equation with Physics-Informed Neural Networks,” </a:t>
+            </a:r>
+            <a:r>
+              <a:rPr lang="en-GB" i="1" dirty="0"/>
+              <a:t>Phys. Rev. D</a:t>
+            </a:r>
+            <a:r>
+              <a:rPr lang="en-GB" dirty="0"/>
+              <a:t>, Jun. 2026, </a:t>
+            </a:r>
+            <a:r>
+              <a:rPr lang="en-GB" dirty="0" err="1"/>
+              <a:t>doi</a:t>
+            </a:r>
+            <a:r>
+              <a:rPr lang="en-GB" dirty="0"/>
+              <a:t>: </a:t>
+            </a:r>
+            <a:r>
+              <a:rPr lang="en-GB" dirty="0">
+                <a:hlinkClick r:id="rId2"/>
+              </a:rPr>
+              <a:t>10.1103/619s-p6md</a:t>
+            </a:r>
+            <a:r>
+              <a:rPr lang="en-GB" dirty="0"/>
+              <a:t>.</a:t>
+            </a:r>
+          </a:p>
+          <a:p>
+            <a:endParaRPr lang="en-GB" dirty="0"/>
           </a:p>
         </p:txBody>
       </p:sp>
@@ -3410,7 +3477,6008 @@
 </p:sld>
 </file>
 
+<file path=ppt/slides/slide10.xml><?xml version="1.0" encoding="utf-8"?>
+<p:sld xmlns:a="http://schemas.openxmlformats.org/drawingml/2006/main" xmlns:r="http://schemas.openxmlformats.org/officeDocument/2006/relationships" xmlns:p="http://schemas.openxmlformats.org/presentationml/2006/main">
+  <p:cSld>
+    <p:spTree>
+      <p:nvGrpSpPr>
+        <p:cNvPr id="1" name=""/>
+        <p:cNvGrpSpPr/>
+        <p:nvPr/>
+      </p:nvGrpSpPr>
+      <p:grpSpPr>
+        <a:xfrm>
+          <a:off x="0" y="0"/>
+          <a:ext cx="0" cy="0"/>
+          <a:chOff x="0" y="0"/>
+          <a:chExt cx="0" cy="0"/>
+        </a:xfrm>
+      </p:grpSpPr>
+      <p:sp>
+        <p:nvSpPr>
+          <p:cNvPr id="2" name="Title 1">
+            <a:extLst>
+              <a:ext uri="{FF2B5EF4-FFF2-40B4-BE49-F238E27FC236}">
+                <a16:creationId xmlns:a16="http://schemas.microsoft.com/office/drawing/2014/main" id="{7579FF6E-7A2D-8ABB-5C49-7CE76CC90297}"/>
+              </a:ext>
+            </a:extLst>
+          </p:cNvPr>
+          <p:cNvSpPr>
+            <a:spLocks noGrp="1"/>
+          </p:cNvSpPr>
+          <p:nvPr>
+            <p:ph type="title"/>
+          </p:nvPr>
+        </p:nvSpPr>
+        <p:spPr/>
+        <p:txBody>
+          <a:bodyPr/>
+          <a:lstStyle/>
+          <a:p>
+            <a:r>
+              <a:rPr lang="en-GB" dirty="0"/>
+              <a:t>In XY-plane</a:t>
+            </a:r>
+          </a:p>
+        </p:txBody>
+      </p:sp>
+      <p:pic>
+        <p:nvPicPr>
+          <p:cNvPr id="8" name="Content Placeholder 7">
+            <a:extLst>
+              <a:ext uri="{FF2B5EF4-FFF2-40B4-BE49-F238E27FC236}">
+                <a16:creationId xmlns:a16="http://schemas.microsoft.com/office/drawing/2014/main" id="{4227DE76-61D3-4CE4-F098-99F61556AC57}"/>
+              </a:ext>
+            </a:extLst>
+          </p:cNvPr>
+          <p:cNvPicPr>
+            <a:picLocks noGrp="1" noChangeAspect="1"/>
+          </p:cNvPicPr>
+          <p:nvPr>
+            <p:ph sz="half" idx="1"/>
+          </p:nvPr>
+        </p:nvPicPr>
+        <p:blipFill>
+          <a:blip r:embed="rId2"/>
+          <a:stretch>
+            <a:fillRect/>
+          </a:stretch>
+        </p:blipFill>
+        <p:spPr>
+          <a:xfrm>
+            <a:off x="838200" y="1840768"/>
+            <a:ext cx="5181600" cy="4321051"/>
+          </a:xfrm>
+          <a:prstGeom prst="rect">
+            <a:avLst/>
+          </a:prstGeom>
+        </p:spPr>
+      </p:pic>
+      <p:pic>
+        <p:nvPicPr>
+          <p:cNvPr id="6" name="Content Placeholder 5">
+            <a:extLst>
+              <a:ext uri="{FF2B5EF4-FFF2-40B4-BE49-F238E27FC236}">
+                <a16:creationId xmlns:a16="http://schemas.microsoft.com/office/drawing/2014/main" id="{487EBA6C-1087-087E-6A35-6A3AE5C60CC9}"/>
+              </a:ext>
+            </a:extLst>
+          </p:cNvPr>
+          <p:cNvPicPr>
+            <a:picLocks noGrp="1" noChangeAspect="1"/>
+          </p:cNvPicPr>
+          <p:nvPr>
+            <p:ph sz="half" idx="2"/>
+          </p:nvPr>
+        </p:nvPicPr>
+        <p:blipFill>
+          <a:blip r:embed="rId3"/>
+          <a:stretch>
+            <a:fillRect/>
+          </a:stretch>
+        </p:blipFill>
+        <p:spPr>
+          <a:xfrm>
+            <a:off x="6326896" y="1825625"/>
+            <a:ext cx="4872207" cy="4351338"/>
+          </a:xfrm>
+          <a:prstGeom prst="rect">
+            <a:avLst/>
+          </a:prstGeom>
+        </p:spPr>
+      </p:pic>
+    </p:spTree>
+    <p:extLst>
+      <p:ext uri="{BB962C8B-B14F-4D97-AF65-F5344CB8AC3E}">
+        <p14:creationId xmlns:p14="http://schemas.microsoft.com/office/powerpoint/2010/main" val="1699009322"/>
+      </p:ext>
+    </p:extLst>
+  </p:cSld>
+  <p:clrMapOvr>
+    <a:masterClrMapping/>
+  </p:clrMapOvr>
+  <p:timing>
+    <p:tnLst>
+      <p:par>
+        <p:cTn id="1" dur="indefinite" restart="never" nodeType="tmRoot">
+          <p:childTnLst>
+            <p:seq concurrent="1" nextAc="seek">
+              <p:cTn id="2" dur="indefinite" nodeType="mainSeq">
+                <p:childTnLst>
+                  <p:par>
+                    <p:cTn id="3" fill="hold">
+                      <p:stCondLst>
+                        <p:cond delay="indefinite"/>
+                      </p:stCondLst>
+                      <p:childTnLst>
+                        <p:par>
+                          <p:cTn id="4" fill="hold">
+                            <p:stCondLst>
+                              <p:cond delay="0"/>
+                            </p:stCondLst>
+                            <p:childTnLst>
+                              <p:par>
+                                <p:cTn id="5" presetID="1" presetClass="entr" presetSubtype="0" fill="hold" nodeType="clickEffect">
+                                  <p:stCondLst>
+                                    <p:cond delay="0"/>
+                                  </p:stCondLst>
+                                  <p:childTnLst>
+                                    <p:set>
+                                      <p:cBhvr>
+                                        <p:cTn id="6" dur="1" fill="hold">
+                                          <p:stCondLst>
+                                            <p:cond delay="0"/>
+                                          </p:stCondLst>
+                                        </p:cTn>
+                                        <p:tgtEl>
+                                          <p:spTgt spid="8"/>
+                                        </p:tgtEl>
+                                        <p:attrNameLst>
+                                          <p:attrName>style.visibility</p:attrName>
+                                        </p:attrNameLst>
+                                      </p:cBhvr>
+                                      <p:to>
+                                        <p:strVal val="visible"/>
+                                      </p:to>
+                                    </p:set>
+                                  </p:childTnLst>
+                                </p:cTn>
+                              </p:par>
+                            </p:childTnLst>
+                          </p:cTn>
+                        </p:par>
+                      </p:childTnLst>
+                    </p:cTn>
+                  </p:par>
+                  <p:par>
+                    <p:cTn id="7" fill="hold">
+                      <p:stCondLst>
+                        <p:cond delay="indefinite"/>
+                      </p:stCondLst>
+                      <p:childTnLst>
+                        <p:par>
+                          <p:cTn id="8" fill="hold">
+                            <p:stCondLst>
+                              <p:cond delay="0"/>
+                            </p:stCondLst>
+                            <p:childTnLst>
+                              <p:par>
+                                <p:cTn id="9" presetID="1" presetClass="entr" presetSubtype="0" fill="hold" nodeType="clickEffect">
+                                  <p:stCondLst>
+                                    <p:cond delay="0"/>
+                                  </p:stCondLst>
+                                  <p:childTnLst>
+                                    <p:set>
+                                      <p:cBhvr>
+                                        <p:cTn id="10" dur="1" fill="hold">
+                                          <p:stCondLst>
+                                            <p:cond delay="0"/>
+                                          </p:stCondLst>
+                                        </p:cTn>
+                                        <p:tgtEl>
+                                          <p:spTgt spid="6"/>
+                                        </p:tgtEl>
+                                        <p:attrNameLst>
+                                          <p:attrName>style.visibility</p:attrName>
+                                        </p:attrNameLst>
+                                      </p:cBhvr>
+                                      <p:to>
+                                        <p:strVal val="visible"/>
+                                      </p:to>
+                                    </p:set>
+                                  </p:childTnLst>
+                                </p:cTn>
+                              </p:par>
+                            </p:childTnLst>
+                          </p:cTn>
+                        </p:par>
+                      </p:childTnLst>
+                    </p:cTn>
+                  </p:par>
+                </p:childTnLst>
+              </p:cTn>
+              <p:prevCondLst>
+                <p:cond evt="onPrev" delay="0">
+                  <p:tgtEl>
+                    <p:sldTgt/>
+                  </p:tgtEl>
+                </p:cond>
+              </p:prevCondLst>
+              <p:nextCondLst>
+                <p:cond evt="onNext" delay="0">
+                  <p:tgtEl>
+                    <p:sldTgt/>
+                  </p:tgtEl>
+                </p:cond>
+              </p:nextCondLst>
+            </p:seq>
+          </p:childTnLst>
+        </p:cTn>
+      </p:par>
+    </p:tnLst>
+  </p:timing>
+</p:sld>
+</file>
+
+<file path=ppt/slides/slide11.xml><?xml version="1.0" encoding="utf-8"?>
+<p:sld xmlns:a="http://schemas.openxmlformats.org/drawingml/2006/main" xmlns:r="http://schemas.openxmlformats.org/officeDocument/2006/relationships" xmlns:p="http://schemas.openxmlformats.org/presentationml/2006/main">
+  <p:cSld>
+    <p:spTree>
+      <p:nvGrpSpPr>
+        <p:cNvPr id="1" name=""/>
+        <p:cNvGrpSpPr/>
+        <p:nvPr/>
+      </p:nvGrpSpPr>
+      <p:grpSpPr>
+        <a:xfrm>
+          <a:off x="0" y="0"/>
+          <a:ext cx="0" cy="0"/>
+          <a:chOff x="0" y="0"/>
+          <a:chExt cx="0" cy="0"/>
+        </a:xfrm>
+      </p:grpSpPr>
+      <p:sp>
+        <p:nvSpPr>
+          <p:cNvPr id="2" name="Title 1">
+            <a:extLst>
+              <a:ext uri="{FF2B5EF4-FFF2-40B4-BE49-F238E27FC236}">
+                <a16:creationId xmlns:a16="http://schemas.microsoft.com/office/drawing/2014/main" id="{A3EC20CF-449A-D447-8A58-32D815C9CD1C}"/>
+              </a:ext>
+            </a:extLst>
+          </p:cNvPr>
+          <p:cNvSpPr>
+            <a:spLocks noGrp="1"/>
+          </p:cNvSpPr>
+          <p:nvPr>
+            <p:ph type="title"/>
+          </p:nvPr>
+        </p:nvSpPr>
+        <p:spPr/>
+        <p:txBody>
+          <a:bodyPr/>
+          <a:lstStyle/>
+          <a:p>
+            <a:r>
+              <a:rPr lang="en-GB" dirty="0"/>
+              <a:t>Next steps</a:t>
+            </a:r>
+          </a:p>
+        </p:txBody>
+      </p:sp>
+      <mc:AlternateContent xmlns:mc="http://schemas.openxmlformats.org/markup-compatibility/2006">
+        <mc:Choice xmlns:a14="http://schemas.microsoft.com/office/drawing/2010/main" Requires="a14">
+          <p:sp>
+            <p:nvSpPr>
+              <p:cNvPr id="3" name="Content Placeholder 2">
+                <a:extLst>
+                  <a:ext uri="{FF2B5EF4-FFF2-40B4-BE49-F238E27FC236}">
+                    <a16:creationId xmlns:a16="http://schemas.microsoft.com/office/drawing/2014/main" id="{C13110B0-EA5E-382C-F231-40DA1ADB0D85}"/>
+                  </a:ext>
+                </a:extLst>
+              </p:cNvPr>
+              <p:cNvSpPr>
+                <a:spLocks noGrp="1"/>
+              </p:cNvSpPr>
+              <p:nvPr>
+                <p:ph idx="1"/>
+              </p:nvPr>
+            </p:nvSpPr>
+            <p:spPr/>
+            <p:txBody>
+              <a:bodyPr/>
+              <a:lstStyle/>
+              <a:p>
+                <a:pPr marL="0" indent="0">
+                  <a:buNone/>
+                </a:pPr>
+                <a:r>
+                  <a:rPr lang="en-GB" dirty="0"/>
+                  <a:t>Train PINO to generate initial data for BBH systems</a:t>
+                </a:r>
+              </a:p>
+              <a:p>
+                <a:pPr lvl="1"/>
+                <a:r>
+                  <a:rPr lang="en-GB" dirty="0"/>
+                  <a:t>~ 22 million datapoints from </a:t>
+                </a:r>
+                <a:r>
+                  <a:rPr lang="en-GB" dirty="0" err="1"/>
+                  <a:t>TwoPunctures</a:t>
+                </a:r>
+                <a:endParaRPr lang="en-GB" dirty="0"/>
+              </a:p>
+              <a:p>
+                <a:pPr lvl="1"/>
+                <a:r>
+                  <a:rPr lang="en-GB" dirty="0"/>
+                  <a:t>100000 inner points restricted to </a:t>
+                </a:r>
+                <a14:m>
+                  <m:oMath xmlns:m="http://schemas.openxmlformats.org/officeDocument/2006/math">
+                    <m:r>
+                      <a:rPr lang="en-US" b="0" i="1" smtClean="0">
+                        <a:latin typeface="Cambria Math" panose="02040503050406030204" pitchFamily="18" charset="0"/>
+                      </a:rPr>
+                      <m:t>𝑅</m:t>
+                    </m:r>
+                    <m:r>
+                      <a:rPr lang="en-US" b="0" i="1" smtClean="0">
+                        <a:latin typeface="Cambria Math" panose="02040503050406030204" pitchFamily="18" charset="0"/>
+                      </a:rPr>
+                      <m:t>&lt;10</m:t>
+                    </m:r>
+                  </m:oMath>
+                </a14:m>
+                <a:endParaRPr lang="en-US" b="0" dirty="0"/>
+              </a:p>
+              <a:p>
+                <a:pPr lvl="1"/>
+                <a:r>
+                  <a:rPr lang="en-GB" dirty="0"/>
+                  <a:t>40000 boundary points</a:t>
+                </a:r>
+              </a:p>
+              <a:p>
+                <a:pPr lvl="1"/>
+                <a:r>
+                  <a:rPr lang="en-US" dirty="0"/>
+                  <a:t>Datapoints and collocation points sampled uniform across 5 </a:t>
+                </a:r>
+                <a14:m>
+                  <m:oMath xmlns:m="http://schemas.openxmlformats.org/officeDocument/2006/math">
+                    <m:sSub>
+                      <m:sSubPr>
+                        <m:ctrlPr>
+                          <a:rPr lang="en-US" b="0" i="1" smtClean="0">
+                            <a:latin typeface="Cambria Math" panose="02040503050406030204" pitchFamily="18" charset="0"/>
+                          </a:rPr>
+                        </m:ctrlPr>
+                      </m:sSubPr>
+                      <m:e>
+                        <m:r>
+                          <a:rPr lang="en-US" b="0" i="1" smtClean="0">
+                            <a:latin typeface="Cambria Math" panose="02040503050406030204" pitchFamily="18" charset="0"/>
+                          </a:rPr>
+                          <m:t>𝑚</m:t>
+                        </m:r>
+                      </m:e>
+                      <m:sub>
+                        <m:r>
+                          <a:rPr lang="en-US" b="0" i="1" smtClean="0">
+                            <a:latin typeface="Cambria Math" panose="02040503050406030204" pitchFamily="18" charset="0"/>
+                          </a:rPr>
+                          <m:t>1</m:t>
+                        </m:r>
+                      </m:sub>
+                    </m:sSub>
+                  </m:oMath>
+                </a14:m>
+                <a:r>
+                  <a:rPr lang="en-US" b="0" dirty="0"/>
+                  <a:t> values</a:t>
+                </a:r>
+              </a:p>
+              <a:p>
+                <a:pPr marL="457200" lvl="1" indent="0">
+                  <a:buNone/>
+                </a:pPr>
+                <a:endParaRPr lang="en-GB" dirty="0"/>
+              </a:p>
+              <a:p>
+                <a:pPr marL="0" indent="0">
+                  <a:buNone/>
+                </a:pPr>
+                <a:r>
+                  <a:rPr lang="en-GB" dirty="0"/>
+                  <a:t>PINO to predict </a:t>
+                </a:r>
+                <a14:m>
+                  <m:oMath xmlns:m="http://schemas.openxmlformats.org/officeDocument/2006/math">
+                    <m:sSub>
+                      <m:sSubPr>
+                        <m:ctrlPr>
+                          <a:rPr lang="en-US" b="0" i="1" smtClean="0">
+                            <a:latin typeface="Cambria Math" panose="02040503050406030204" pitchFamily="18" charset="0"/>
+                          </a:rPr>
+                        </m:ctrlPr>
+                      </m:sSubPr>
+                      <m:e>
+                        <m:r>
+                          <a:rPr lang="en-US" b="0" i="1" smtClean="0">
+                            <a:latin typeface="Cambria Math" panose="02040503050406030204" pitchFamily="18" charset="0"/>
+                          </a:rPr>
+                          <m:t>h</m:t>
+                        </m:r>
+                      </m:e>
+                      <m:sub>
+                        <m:r>
+                          <a:rPr lang="en-US" b="0" i="1" smtClean="0">
+                            <a:latin typeface="Cambria Math" panose="02040503050406030204" pitchFamily="18" charset="0"/>
+                          </a:rPr>
+                          <m:t>𝜃</m:t>
+                        </m:r>
+                      </m:sub>
+                    </m:sSub>
+                  </m:oMath>
+                </a14:m>
+                <a:endParaRPr lang="en-US" b="0" dirty="0"/>
+              </a:p>
+              <a:p>
+                <a:pPr marL="0" indent="0">
+                  <a:buNone/>
+                </a:pPr>
+                <a:r>
+                  <a:rPr lang="en-US" dirty="0"/>
+                  <a:t>Ansatz to predict </a:t>
+                </a:r>
+                <a14:m>
+                  <m:oMath xmlns:m="http://schemas.openxmlformats.org/officeDocument/2006/math">
+                    <m:sSub>
+                      <m:sSubPr>
+                        <m:ctrlPr>
+                          <a:rPr lang="en-US" b="0" i="1" smtClean="0">
+                            <a:latin typeface="Cambria Math" panose="02040503050406030204" pitchFamily="18" charset="0"/>
+                          </a:rPr>
+                        </m:ctrlPr>
+                      </m:sSubPr>
+                      <m:e>
+                        <m:r>
+                          <a:rPr lang="en-US" b="0" i="1" smtClean="0">
+                            <a:latin typeface="Cambria Math" panose="02040503050406030204" pitchFamily="18" charset="0"/>
+                          </a:rPr>
+                          <m:t>𝑢</m:t>
+                        </m:r>
+                      </m:e>
+                      <m:sub>
+                        <m:r>
+                          <a:rPr lang="en-US" b="0" i="1" smtClean="0">
+                            <a:latin typeface="Cambria Math" panose="02040503050406030204" pitchFamily="18" charset="0"/>
+                          </a:rPr>
+                          <m:t>𝜃</m:t>
+                        </m:r>
+                      </m:sub>
+                    </m:sSub>
+                  </m:oMath>
+                </a14:m>
+                <a:endParaRPr lang="en-US" b="0" dirty="0"/>
+              </a:p>
+              <a:p>
+                <a:pPr marL="0" indent="0">
+                  <a:buNone/>
+                </a:pPr>
+                <a:endParaRPr lang="en-US" b="0" dirty="0"/>
+              </a:p>
+              <a:p>
+                <a:pPr marL="0" indent="0">
+                  <a:buNone/>
+                </a:pPr>
+                <a:endParaRPr lang="en-GB" dirty="0"/>
+              </a:p>
+              <a:p>
+                <a:pPr marL="0" indent="0">
+                  <a:buNone/>
+                </a:pPr>
+                <a:endParaRPr lang="en-GB" dirty="0"/>
+              </a:p>
+            </p:txBody>
+          </p:sp>
+        </mc:Choice>
+        <mc:Fallback>
+          <p:sp>
+            <p:nvSpPr>
+              <p:cNvPr id="3" name="Content Placeholder 2">
+                <a:extLst>
+                  <a:ext uri="{FF2B5EF4-FFF2-40B4-BE49-F238E27FC236}">
+                    <a16:creationId xmlns:a16="http://schemas.microsoft.com/office/drawing/2014/main" id="{C13110B0-EA5E-382C-F231-40DA1ADB0D85}"/>
+                  </a:ext>
+                </a:extLst>
+              </p:cNvPr>
+              <p:cNvSpPr>
+                <a:spLocks noGrp="1" noRot="1" noChangeAspect="1" noMove="1" noResize="1" noEditPoints="1" noAdjustHandles="1" noChangeArrowheads="1" noChangeShapeType="1" noTextEdit="1"/>
+              </p:cNvSpPr>
+              <p:nvPr>
+                <p:ph idx="1"/>
+              </p:nvPr>
+            </p:nvSpPr>
+            <p:spPr>
+              <a:blipFill>
+                <a:blip r:embed="rId2"/>
+                <a:stretch>
+                  <a:fillRect l="-1217" t="-2381"/>
+                </a:stretch>
+              </a:blipFill>
+            </p:spPr>
+            <p:txBody>
+              <a:bodyPr/>
+              <a:lstStyle/>
+              <a:p>
+                <a:r>
+                  <a:rPr lang="en-GB">
+                    <a:noFill/>
+                  </a:rPr>
+                  <a:t> </a:t>
+                </a:r>
+              </a:p>
+            </p:txBody>
+          </p:sp>
+        </mc:Fallback>
+      </mc:AlternateContent>
+    </p:spTree>
+    <p:extLst>
+      <p:ext uri="{BB962C8B-B14F-4D97-AF65-F5344CB8AC3E}">
+        <p14:creationId xmlns:p14="http://schemas.microsoft.com/office/powerpoint/2010/main" val="2757883408"/>
+      </p:ext>
+    </p:extLst>
+  </p:cSld>
+  <p:clrMapOvr>
+    <a:masterClrMapping/>
+  </p:clrMapOvr>
+  <p:timing>
+    <p:tnLst>
+      <p:par>
+        <p:cTn id="1" dur="indefinite" restart="never" nodeType="tmRoot">
+          <p:childTnLst>
+            <p:seq concurrent="1" nextAc="seek">
+              <p:cTn id="2" dur="indefinite" nodeType="mainSeq">
+                <p:childTnLst>
+                  <p:par>
+                    <p:cTn id="3" fill="hold">
+                      <p:stCondLst>
+                        <p:cond delay="indefinite"/>
+                      </p:stCondLst>
+                      <p:childTnLst>
+                        <p:par>
+                          <p:cTn id="4" fill="hold">
+                            <p:stCondLst>
+                              <p:cond delay="0"/>
+                            </p:stCondLst>
+                            <p:childTnLst>
+                              <p:par>
+                                <p:cTn id="5" presetID="1" presetClass="entr" presetSubtype="0" fill="hold" grpId="0" nodeType="clickEffect">
+                                  <p:stCondLst>
+                                    <p:cond delay="0"/>
+                                  </p:stCondLst>
+                                  <p:childTnLst>
+                                    <p:set>
+                                      <p:cBhvr>
+                                        <p:cTn id="6" dur="1" fill="hold">
+                                          <p:stCondLst>
+                                            <p:cond delay="0"/>
+                                          </p:stCondLst>
+                                        </p:cTn>
+                                        <p:tgtEl>
+                                          <p:spTgt spid="3">
+                                            <p:txEl>
+                                              <p:pRg st="0" end="0"/>
+                                            </p:txEl>
+                                          </p:spTgt>
+                                        </p:tgtEl>
+                                        <p:attrNameLst>
+                                          <p:attrName>style.visibility</p:attrName>
+                                        </p:attrNameLst>
+                                      </p:cBhvr>
+                                      <p:to>
+                                        <p:strVal val="visible"/>
+                                      </p:to>
+                                    </p:set>
+                                  </p:childTnLst>
+                                </p:cTn>
+                              </p:par>
+                            </p:childTnLst>
+                          </p:cTn>
+                        </p:par>
+                      </p:childTnLst>
+                    </p:cTn>
+                  </p:par>
+                  <p:par>
+                    <p:cTn id="7" fill="hold">
+                      <p:stCondLst>
+                        <p:cond delay="indefinite"/>
+                      </p:stCondLst>
+                      <p:childTnLst>
+                        <p:par>
+                          <p:cTn id="8" fill="hold">
+                            <p:stCondLst>
+                              <p:cond delay="0"/>
+                            </p:stCondLst>
+                            <p:childTnLst>
+                              <p:par>
+                                <p:cTn id="9" presetID="1" presetClass="entr" presetSubtype="0" fill="hold" grpId="0" nodeType="clickEffect">
+                                  <p:stCondLst>
+                                    <p:cond delay="0"/>
+                                  </p:stCondLst>
+                                  <p:childTnLst>
+                                    <p:set>
+                                      <p:cBhvr>
+                                        <p:cTn id="10" dur="1" fill="hold">
+                                          <p:stCondLst>
+                                            <p:cond delay="0"/>
+                                          </p:stCondLst>
+                                        </p:cTn>
+                                        <p:tgtEl>
+                                          <p:spTgt spid="3">
+                                            <p:txEl>
+                                              <p:pRg st="1" end="1"/>
+                                            </p:txEl>
+                                          </p:spTgt>
+                                        </p:tgtEl>
+                                        <p:attrNameLst>
+                                          <p:attrName>style.visibility</p:attrName>
+                                        </p:attrNameLst>
+                                      </p:cBhvr>
+                                      <p:to>
+                                        <p:strVal val="visible"/>
+                                      </p:to>
+                                    </p:set>
+                                  </p:childTnLst>
+                                </p:cTn>
+                              </p:par>
+                            </p:childTnLst>
+                          </p:cTn>
+                        </p:par>
+                      </p:childTnLst>
+                    </p:cTn>
+                  </p:par>
+                  <p:par>
+                    <p:cTn id="11" fill="hold">
+                      <p:stCondLst>
+                        <p:cond delay="indefinite"/>
+                      </p:stCondLst>
+                      <p:childTnLst>
+                        <p:par>
+                          <p:cTn id="12" fill="hold">
+                            <p:stCondLst>
+                              <p:cond delay="0"/>
+                            </p:stCondLst>
+                            <p:childTnLst>
+                              <p:par>
+                                <p:cTn id="13" presetID="1" presetClass="entr" presetSubtype="0" fill="hold" grpId="0" nodeType="clickEffect">
+                                  <p:stCondLst>
+                                    <p:cond delay="0"/>
+                                  </p:stCondLst>
+                                  <p:childTnLst>
+                                    <p:set>
+                                      <p:cBhvr>
+                                        <p:cTn id="14" dur="1" fill="hold">
+                                          <p:stCondLst>
+                                            <p:cond delay="0"/>
+                                          </p:stCondLst>
+                                        </p:cTn>
+                                        <p:tgtEl>
+                                          <p:spTgt spid="3">
+                                            <p:txEl>
+                                              <p:pRg st="2" end="2"/>
+                                            </p:txEl>
+                                          </p:spTgt>
+                                        </p:tgtEl>
+                                        <p:attrNameLst>
+                                          <p:attrName>style.visibility</p:attrName>
+                                        </p:attrNameLst>
+                                      </p:cBhvr>
+                                      <p:to>
+                                        <p:strVal val="visible"/>
+                                      </p:to>
+                                    </p:set>
+                                  </p:childTnLst>
+                                </p:cTn>
+                              </p:par>
+                            </p:childTnLst>
+                          </p:cTn>
+                        </p:par>
+                      </p:childTnLst>
+                    </p:cTn>
+                  </p:par>
+                  <p:par>
+                    <p:cTn id="15" fill="hold">
+                      <p:stCondLst>
+                        <p:cond delay="indefinite"/>
+                      </p:stCondLst>
+                      <p:childTnLst>
+                        <p:par>
+                          <p:cTn id="16" fill="hold">
+                            <p:stCondLst>
+                              <p:cond delay="0"/>
+                            </p:stCondLst>
+                            <p:childTnLst>
+                              <p:par>
+                                <p:cTn id="17" presetID="1" presetClass="entr" presetSubtype="0" fill="hold" grpId="0" nodeType="clickEffect">
+                                  <p:stCondLst>
+                                    <p:cond delay="0"/>
+                                  </p:stCondLst>
+                                  <p:childTnLst>
+                                    <p:set>
+                                      <p:cBhvr>
+                                        <p:cTn id="18" dur="1" fill="hold">
+                                          <p:stCondLst>
+                                            <p:cond delay="0"/>
+                                          </p:stCondLst>
+                                        </p:cTn>
+                                        <p:tgtEl>
+                                          <p:spTgt spid="3">
+                                            <p:txEl>
+                                              <p:pRg st="3" end="3"/>
+                                            </p:txEl>
+                                          </p:spTgt>
+                                        </p:tgtEl>
+                                        <p:attrNameLst>
+                                          <p:attrName>style.visibility</p:attrName>
+                                        </p:attrNameLst>
+                                      </p:cBhvr>
+                                      <p:to>
+                                        <p:strVal val="visible"/>
+                                      </p:to>
+                                    </p:set>
+                                  </p:childTnLst>
+                                </p:cTn>
+                              </p:par>
+                            </p:childTnLst>
+                          </p:cTn>
+                        </p:par>
+                      </p:childTnLst>
+                    </p:cTn>
+                  </p:par>
+                  <p:par>
+                    <p:cTn id="19" fill="hold">
+                      <p:stCondLst>
+                        <p:cond delay="indefinite"/>
+                      </p:stCondLst>
+                      <p:childTnLst>
+                        <p:par>
+                          <p:cTn id="20" fill="hold">
+                            <p:stCondLst>
+                              <p:cond delay="0"/>
+                            </p:stCondLst>
+                            <p:childTnLst>
+                              <p:par>
+                                <p:cTn id="21" presetID="1" presetClass="entr" presetSubtype="0" fill="hold" grpId="0" nodeType="clickEffect">
+                                  <p:stCondLst>
+                                    <p:cond delay="0"/>
+                                  </p:stCondLst>
+                                  <p:childTnLst>
+                                    <p:set>
+                                      <p:cBhvr>
+                                        <p:cTn id="22" dur="1" fill="hold">
+                                          <p:stCondLst>
+                                            <p:cond delay="0"/>
+                                          </p:stCondLst>
+                                        </p:cTn>
+                                        <p:tgtEl>
+                                          <p:spTgt spid="3">
+                                            <p:txEl>
+                                              <p:pRg st="4" end="4"/>
+                                            </p:txEl>
+                                          </p:spTgt>
+                                        </p:tgtEl>
+                                        <p:attrNameLst>
+                                          <p:attrName>style.visibility</p:attrName>
+                                        </p:attrNameLst>
+                                      </p:cBhvr>
+                                      <p:to>
+                                        <p:strVal val="visible"/>
+                                      </p:to>
+                                    </p:set>
+                                  </p:childTnLst>
+                                </p:cTn>
+                              </p:par>
+                            </p:childTnLst>
+                          </p:cTn>
+                        </p:par>
+                      </p:childTnLst>
+                    </p:cTn>
+                  </p:par>
+                  <p:par>
+                    <p:cTn id="23" fill="hold">
+                      <p:stCondLst>
+                        <p:cond delay="indefinite"/>
+                      </p:stCondLst>
+                      <p:childTnLst>
+                        <p:par>
+                          <p:cTn id="24" fill="hold">
+                            <p:stCondLst>
+                              <p:cond delay="0"/>
+                            </p:stCondLst>
+                            <p:childTnLst>
+                              <p:par>
+                                <p:cTn id="25" presetID="1" presetClass="entr" presetSubtype="0" fill="hold" grpId="0" nodeType="clickEffect">
+                                  <p:stCondLst>
+                                    <p:cond delay="0"/>
+                                  </p:stCondLst>
+                                  <p:childTnLst>
+                                    <p:set>
+                                      <p:cBhvr>
+                                        <p:cTn id="26" dur="1" fill="hold">
+                                          <p:stCondLst>
+                                            <p:cond delay="0"/>
+                                          </p:stCondLst>
+                                        </p:cTn>
+                                        <p:tgtEl>
+                                          <p:spTgt spid="3">
+                                            <p:txEl>
+                                              <p:pRg st="6" end="6"/>
+                                            </p:txEl>
+                                          </p:spTgt>
+                                        </p:tgtEl>
+                                        <p:attrNameLst>
+                                          <p:attrName>style.visibility</p:attrName>
+                                        </p:attrNameLst>
+                                      </p:cBhvr>
+                                      <p:to>
+                                        <p:strVal val="visible"/>
+                                      </p:to>
+                                    </p:set>
+                                  </p:childTnLst>
+                                </p:cTn>
+                              </p:par>
+                            </p:childTnLst>
+                          </p:cTn>
+                        </p:par>
+                      </p:childTnLst>
+                    </p:cTn>
+                  </p:par>
+                  <p:par>
+                    <p:cTn id="27" fill="hold">
+                      <p:stCondLst>
+                        <p:cond delay="indefinite"/>
+                      </p:stCondLst>
+                      <p:childTnLst>
+                        <p:par>
+                          <p:cTn id="28" fill="hold">
+                            <p:stCondLst>
+                              <p:cond delay="0"/>
+                            </p:stCondLst>
+                            <p:childTnLst>
+                              <p:par>
+                                <p:cTn id="29" presetID="1" presetClass="entr" presetSubtype="0" fill="hold" grpId="0" nodeType="clickEffect">
+                                  <p:stCondLst>
+                                    <p:cond delay="0"/>
+                                  </p:stCondLst>
+                                  <p:childTnLst>
+                                    <p:set>
+                                      <p:cBhvr>
+                                        <p:cTn id="30" dur="1" fill="hold">
+                                          <p:stCondLst>
+                                            <p:cond delay="0"/>
+                                          </p:stCondLst>
+                                        </p:cTn>
+                                        <p:tgtEl>
+                                          <p:spTgt spid="3">
+                                            <p:txEl>
+                                              <p:pRg st="7" end="7"/>
+                                            </p:txEl>
+                                          </p:spTgt>
+                                        </p:tgtEl>
+                                        <p:attrNameLst>
+                                          <p:attrName>style.visibility</p:attrName>
+                                        </p:attrNameLst>
+                                      </p:cBhvr>
+                                      <p:to>
+                                        <p:strVal val="visible"/>
+                                      </p:to>
+                                    </p:set>
+                                  </p:childTnLst>
+                                </p:cTn>
+                              </p:par>
+                            </p:childTnLst>
+                          </p:cTn>
+                        </p:par>
+                      </p:childTnLst>
+                    </p:cTn>
+                  </p:par>
+                </p:childTnLst>
+              </p:cTn>
+              <p:prevCondLst>
+                <p:cond evt="onPrev" delay="0">
+                  <p:tgtEl>
+                    <p:sldTgt/>
+                  </p:tgtEl>
+                </p:cond>
+              </p:prevCondLst>
+              <p:nextCondLst>
+                <p:cond evt="onNext" delay="0">
+                  <p:tgtEl>
+                    <p:sldTgt/>
+                  </p:tgtEl>
+                </p:cond>
+              </p:nextCondLst>
+            </p:seq>
+          </p:childTnLst>
+        </p:cTn>
+      </p:par>
+    </p:tnLst>
+    <p:bldLst>
+      <p:bldP spid="3" grpId="0" uiExpand="1" build="p"/>
+    </p:bldLst>
+  </p:timing>
+</p:sld>
+</file>
+
+<file path=ppt/slides/slide12.xml><?xml version="1.0" encoding="utf-8"?>
+<p:sld xmlns:a="http://schemas.openxmlformats.org/drawingml/2006/main" xmlns:r="http://schemas.openxmlformats.org/officeDocument/2006/relationships" xmlns:p="http://schemas.openxmlformats.org/presentationml/2006/main">
+  <p:cSld>
+    <p:spTree>
+      <p:nvGrpSpPr>
+        <p:cNvPr id="1" name=""/>
+        <p:cNvGrpSpPr/>
+        <p:nvPr/>
+      </p:nvGrpSpPr>
+      <p:grpSpPr>
+        <a:xfrm>
+          <a:off x="0" y="0"/>
+          <a:ext cx="0" cy="0"/>
+          <a:chOff x="0" y="0"/>
+          <a:chExt cx="0" cy="0"/>
+        </a:xfrm>
+      </p:grpSpPr>
+      <p:sp>
+        <p:nvSpPr>
+          <p:cNvPr id="2" name="Title 1">
+            <a:extLst>
+              <a:ext uri="{FF2B5EF4-FFF2-40B4-BE49-F238E27FC236}">
+                <a16:creationId xmlns:a16="http://schemas.microsoft.com/office/drawing/2014/main" id="{7F92206E-6D4F-4F15-AE8E-A233352C94E9}"/>
+              </a:ext>
+            </a:extLst>
+          </p:cNvPr>
+          <p:cNvSpPr>
+            <a:spLocks noGrp="1"/>
+          </p:cNvSpPr>
+          <p:nvPr>
+            <p:ph type="title"/>
+          </p:nvPr>
+        </p:nvSpPr>
+        <p:spPr/>
+        <p:txBody>
+          <a:bodyPr/>
+          <a:lstStyle/>
+          <a:p>
+            <a:r>
+              <a:rPr lang="en-GB" dirty="0"/>
+              <a:t>Operator training architecture</a:t>
+            </a:r>
+          </a:p>
+        </p:txBody>
+      </p:sp>
+      <p:sp>
+        <p:nvSpPr>
+          <p:cNvPr id="3" name="Content Placeholder 2">
+            <a:extLst>
+              <a:ext uri="{FF2B5EF4-FFF2-40B4-BE49-F238E27FC236}">
+                <a16:creationId xmlns:a16="http://schemas.microsoft.com/office/drawing/2014/main" id="{EF331DB8-7F11-457D-1153-470F93F918EB}"/>
+              </a:ext>
+            </a:extLst>
+          </p:cNvPr>
+          <p:cNvSpPr>
+            <a:spLocks noGrp="1"/>
+          </p:cNvSpPr>
+          <p:nvPr>
+            <p:ph idx="1"/>
+          </p:nvPr>
+        </p:nvSpPr>
+        <p:spPr/>
+        <p:txBody>
+          <a:bodyPr/>
+          <a:lstStyle/>
+          <a:p>
+            <a:pPr marL="0" indent="0">
+              <a:buNone/>
+            </a:pPr>
+            <a:r>
+              <a:rPr lang="en-GB" dirty="0"/>
+              <a:t>FNO architecture:</a:t>
+            </a:r>
+          </a:p>
+          <a:p>
+            <a:pPr lvl="1"/>
+            <a:r>
+              <a:rPr lang="en-GB" dirty="0"/>
+              <a:t>width = 64</a:t>
+            </a:r>
+          </a:p>
+          <a:p>
+            <a:pPr lvl="1"/>
+            <a:r>
+              <a:rPr lang="en-GB" dirty="0"/>
+              <a:t>24 modes</a:t>
+            </a:r>
+          </a:p>
+          <a:p>
+            <a:pPr lvl="1"/>
+            <a:r>
+              <a:rPr lang="en-GB" dirty="0"/>
+              <a:t>8 layers</a:t>
+            </a:r>
+          </a:p>
+          <a:p>
+            <a:pPr lvl="1"/>
+            <a:endParaRPr lang="en-GB" dirty="0"/>
+          </a:p>
+          <a:p>
+            <a:pPr marL="0" indent="0">
+              <a:buNone/>
+            </a:pPr>
+            <a:r>
+              <a:rPr lang="en-GB" dirty="0"/>
+              <a:t>Adam optimizer, </a:t>
+            </a:r>
+            <a:r>
+              <a:rPr lang="en-GB" dirty="0" err="1"/>
+              <a:t>lr</a:t>
+            </a:r>
+            <a:r>
+              <a:rPr lang="en-GB" dirty="0"/>
+              <a:t> = 1e-4</a:t>
+            </a:r>
+          </a:p>
+          <a:p>
+            <a:pPr marL="0" indent="0">
+              <a:buNone/>
+            </a:pPr>
+            <a:endParaRPr lang="en-GB" dirty="0"/>
+          </a:p>
+          <a:p>
+            <a:pPr marL="0" indent="0">
+              <a:buNone/>
+            </a:pPr>
+            <a:r>
+              <a:rPr lang="en-GB" dirty="0"/>
+              <a:t>Train for 5000 epochs</a:t>
+            </a:r>
+          </a:p>
+          <a:p>
+            <a:pPr marL="0" indent="0">
+              <a:buNone/>
+            </a:pPr>
+            <a:endParaRPr lang="en-GB" dirty="0"/>
+          </a:p>
+        </p:txBody>
+      </p:sp>
+    </p:spTree>
+    <p:extLst>
+      <p:ext uri="{BB962C8B-B14F-4D97-AF65-F5344CB8AC3E}">
+        <p14:creationId xmlns:p14="http://schemas.microsoft.com/office/powerpoint/2010/main" val="3262484601"/>
+      </p:ext>
+    </p:extLst>
+  </p:cSld>
+  <p:clrMapOvr>
+    <a:masterClrMapping/>
+  </p:clrMapOvr>
+  <p:timing>
+    <p:tnLst>
+      <p:par>
+        <p:cTn id="1" dur="indefinite" restart="never" nodeType="tmRoot">
+          <p:childTnLst>
+            <p:seq concurrent="1" nextAc="seek">
+              <p:cTn id="2" dur="indefinite" nodeType="mainSeq">
+                <p:childTnLst>
+                  <p:par>
+                    <p:cTn id="3" fill="hold">
+                      <p:stCondLst>
+                        <p:cond delay="indefinite"/>
+                      </p:stCondLst>
+                      <p:childTnLst>
+                        <p:par>
+                          <p:cTn id="4" fill="hold">
+                            <p:stCondLst>
+                              <p:cond delay="0"/>
+                            </p:stCondLst>
+                            <p:childTnLst>
+                              <p:par>
+                                <p:cTn id="5" presetID="1" presetClass="entr" presetSubtype="0" fill="hold" grpId="0" nodeType="clickEffect">
+                                  <p:stCondLst>
+                                    <p:cond delay="0"/>
+                                  </p:stCondLst>
+                                  <p:childTnLst>
+                                    <p:set>
+                                      <p:cBhvr>
+                                        <p:cTn id="6" dur="1" fill="hold">
+                                          <p:stCondLst>
+                                            <p:cond delay="0"/>
+                                          </p:stCondLst>
+                                        </p:cTn>
+                                        <p:tgtEl>
+                                          <p:spTgt spid="3">
+                                            <p:txEl>
+                                              <p:pRg st="0" end="0"/>
+                                            </p:txEl>
+                                          </p:spTgt>
+                                        </p:tgtEl>
+                                        <p:attrNameLst>
+                                          <p:attrName>style.visibility</p:attrName>
+                                        </p:attrNameLst>
+                                      </p:cBhvr>
+                                      <p:to>
+                                        <p:strVal val="visible"/>
+                                      </p:to>
+                                    </p:set>
+                                  </p:childTnLst>
+                                </p:cTn>
+                              </p:par>
+                              <p:par>
+                                <p:cTn id="7" presetID="1" presetClass="entr" presetSubtype="0" fill="hold" grpId="0" nodeType="withEffect">
+                                  <p:stCondLst>
+                                    <p:cond delay="0"/>
+                                  </p:stCondLst>
+                                  <p:childTnLst>
+                                    <p:set>
+                                      <p:cBhvr>
+                                        <p:cTn id="8" dur="1" fill="hold">
+                                          <p:stCondLst>
+                                            <p:cond delay="0"/>
+                                          </p:stCondLst>
+                                        </p:cTn>
+                                        <p:tgtEl>
+                                          <p:spTgt spid="3">
+                                            <p:txEl>
+                                              <p:pRg st="1" end="1"/>
+                                            </p:txEl>
+                                          </p:spTgt>
+                                        </p:tgtEl>
+                                        <p:attrNameLst>
+                                          <p:attrName>style.visibility</p:attrName>
+                                        </p:attrNameLst>
+                                      </p:cBhvr>
+                                      <p:to>
+                                        <p:strVal val="visible"/>
+                                      </p:to>
+                                    </p:set>
+                                  </p:childTnLst>
+                                </p:cTn>
+                              </p:par>
+                              <p:par>
+                                <p:cTn id="9" presetID="1" presetClass="entr" presetSubtype="0" fill="hold" grpId="0" nodeType="withEffect">
+                                  <p:stCondLst>
+                                    <p:cond delay="0"/>
+                                  </p:stCondLst>
+                                  <p:childTnLst>
+                                    <p:set>
+                                      <p:cBhvr>
+                                        <p:cTn id="10" dur="1" fill="hold">
+                                          <p:stCondLst>
+                                            <p:cond delay="0"/>
+                                          </p:stCondLst>
+                                        </p:cTn>
+                                        <p:tgtEl>
+                                          <p:spTgt spid="3">
+                                            <p:txEl>
+                                              <p:pRg st="2" end="2"/>
+                                            </p:txEl>
+                                          </p:spTgt>
+                                        </p:tgtEl>
+                                        <p:attrNameLst>
+                                          <p:attrName>style.visibility</p:attrName>
+                                        </p:attrNameLst>
+                                      </p:cBhvr>
+                                      <p:to>
+                                        <p:strVal val="visible"/>
+                                      </p:to>
+                                    </p:set>
+                                  </p:childTnLst>
+                                </p:cTn>
+                              </p:par>
+                              <p:par>
+                                <p:cTn id="11" presetID="1" presetClass="entr" presetSubtype="0" fill="hold" grpId="0" nodeType="withEffect">
+                                  <p:stCondLst>
+                                    <p:cond delay="0"/>
+                                  </p:stCondLst>
+                                  <p:childTnLst>
+                                    <p:set>
+                                      <p:cBhvr>
+                                        <p:cTn id="12" dur="1" fill="hold">
+                                          <p:stCondLst>
+                                            <p:cond delay="0"/>
+                                          </p:stCondLst>
+                                        </p:cTn>
+                                        <p:tgtEl>
+                                          <p:spTgt spid="3">
+                                            <p:txEl>
+                                              <p:pRg st="3" end="3"/>
+                                            </p:txEl>
+                                          </p:spTgt>
+                                        </p:tgtEl>
+                                        <p:attrNameLst>
+                                          <p:attrName>style.visibility</p:attrName>
+                                        </p:attrNameLst>
+                                      </p:cBhvr>
+                                      <p:to>
+                                        <p:strVal val="visible"/>
+                                      </p:to>
+                                    </p:set>
+                                  </p:childTnLst>
+                                </p:cTn>
+                              </p:par>
+                            </p:childTnLst>
+                          </p:cTn>
+                        </p:par>
+                      </p:childTnLst>
+                    </p:cTn>
+                  </p:par>
+                  <p:par>
+                    <p:cTn id="13" fill="hold">
+                      <p:stCondLst>
+                        <p:cond delay="indefinite"/>
+                      </p:stCondLst>
+                      <p:childTnLst>
+                        <p:par>
+                          <p:cTn id="14" fill="hold">
+                            <p:stCondLst>
+                              <p:cond delay="0"/>
+                            </p:stCondLst>
+                            <p:childTnLst>
+                              <p:par>
+                                <p:cTn id="15" presetID="1" presetClass="entr" presetSubtype="0" fill="hold" grpId="0" nodeType="clickEffect">
+                                  <p:stCondLst>
+                                    <p:cond delay="0"/>
+                                  </p:stCondLst>
+                                  <p:childTnLst>
+                                    <p:set>
+                                      <p:cBhvr>
+                                        <p:cTn id="16" dur="1" fill="hold">
+                                          <p:stCondLst>
+                                            <p:cond delay="0"/>
+                                          </p:stCondLst>
+                                        </p:cTn>
+                                        <p:tgtEl>
+                                          <p:spTgt spid="3">
+                                            <p:txEl>
+                                              <p:pRg st="5" end="5"/>
+                                            </p:txEl>
+                                          </p:spTgt>
+                                        </p:tgtEl>
+                                        <p:attrNameLst>
+                                          <p:attrName>style.visibility</p:attrName>
+                                        </p:attrNameLst>
+                                      </p:cBhvr>
+                                      <p:to>
+                                        <p:strVal val="visible"/>
+                                      </p:to>
+                                    </p:set>
+                                  </p:childTnLst>
+                                </p:cTn>
+                              </p:par>
+                            </p:childTnLst>
+                          </p:cTn>
+                        </p:par>
+                      </p:childTnLst>
+                    </p:cTn>
+                  </p:par>
+                  <p:par>
+                    <p:cTn id="17" fill="hold">
+                      <p:stCondLst>
+                        <p:cond delay="indefinite"/>
+                      </p:stCondLst>
+                      <p:childTnLst>
+                        <p:par>
+                          <p:cTn id="18" fill="hold">
+                            <p:stCondLst>
+                              <p:cond delay="0"/>
+                            </p:stCondLst>
+                            <p:childTnLst>
+                              <p:par>
+                                <p:cTn id="19" presetID="1" presetClass="entr" presetSubtype="0" fill="hold" grpId="0" nodeType="clickEffect">
+                                  <p:stCondLst>
+                                    <p:cond delay="0"/>
+                                  </p:stCondLst>
+                                  <p:childTnLst>
+                                    <p:set>
+                                      <p:cBhvr>
+                                        <p:cTn id="20" dur="1" fill="hold">
+                                          <p:stCondLst>
+                                            <p:cond delay="0"/>
+                                          </p:stCondLst>
+                                        </p:cTn>
+                                        <p:tgtEl>
+                                          <p:spTgt spid="3">
+                                            <p:txEl>
+                                              <p:pRg st="7" end="7"/>
+                                            </p:txEl>
+                                          </p:spTgt>
+                                        </p:tgtEl>
+                                        <p:attrNameLst>
+                                          <p:attrName>style.visibility</p:attrName>
+                                        </p:attrNameLst>
+                                      </p:cBhvr>
+                                      <p:to>
+                                        <p:strVal val="visible"/>
+                                      </p:to>
+                                    </p:set>
+                                  </p:childTnLst>
+                                </p:cTn>
+                              </p:par>
+                            </p:childTnLst>
+                          </p:cTn>
+                        </p:par>
+                      </p:childTnLst>
+                    </p:cTn>
+                  </p:par>
+                </p:childTnLst>
+              </p:cTn>
+              <p:prevCondLst>
+                <p:cond evt="onPrev" delay="0">
+                  <p:tgtEl>
+                    <p:sldTgt/>
+                  </p:tgtEl>
+                </p:cond>
+              </p:prevCondLst>
+              <p:nextCondLst>
+                <p:cond evt="onNext" delay="0">
+                  <p:tgtEl>
+                    <p:sldTgt/>
+                  </p:tgtEl>
+                </p:cond>
+              </p:nextCondLst>
+            </p:seq>
+          </p:childTnLst>
+        </p:cTn>
+      </p:par>
+    </p:tnLst>
+    <p:bldLst>
+      <p:bldP spid="3" grpId="0" build="p"/>
+    </p:bldLst>
+  </p:timing>
+</p:sld>
+</file>
+
+<file path=ppt/slides/slide13.xml><?xml version="1.0" encoding="utf-8"?>
+<p:sld xmlns:a="http://schemas.openxmlformats.org/drawingml/2006/main" xmlns:r="http://schemas.openxmlformats.org/officeDocument/2006/relationships" xmlns:p="http://schemas.openxmlformats.org/presentationml/2006/main">
+  <p:cSld>
+    <p:spTree>
+      <p:nvGrpSpPr>
+        <p:cNvPr id="1" name=""/>
+        <p:cNvGrpSpPr/>
+        <p:nvPr/>
+      </p:nvGrpSpPr>
+      <p:grpSpPr>
+        <a:xfrm>
+          <a:off x="0" y="0"/>
+          <a:ext cx="0" cy="0"/>
+          <a:chOff x="0" y="0"/>
+          <a:chExt cx="0" cy="0"/>
+        </a:xfrm>
+      </p:grpSpPr>
+      <p:sp>
+        <p:nvSpPr>
+          <p:cNvPr id="2" name="Title 1">
+            <a:extLst>
+              <a:ext uri="{FF2B5EF4-FFF2-40B4-BE49-F238E27FC236}">
+                <a16:creationId xmlns:a16="http://schemas.microsoft.com/office/drawing/2014/main" id="{9993DAD6-0BAE-3134-9E4A-E80F256184BF}"/>
+              </a:ext>
+            </a:extLst>
+          </p:cNvPr>
+          <p:cNvSpPr>
+            <a:spLocks noGrp="1"/>
+          </p:cNvSpPr>
+          <p:nvPr>
+            <p:ph type="title"/>
+          </p:nvPr>
+        </p:nvSpPr>
+        <p:spPr/>
+        <p:txBody>
+          <a:bodyPr/>
+          <a:lstStyle/>
+          <a:p>
+            <a:r>
+              <a:rPr lang="en-GB" dirty="0"/>
+              <a:t>Loss function </a:t>
+            </a:r>
+          </a:p>
+        </p:txBody>
+      </p:sp>
+      <mc:AlternateContent xmlns:mc="http://schemas.openxmlformats.org/markup-compatibility/2006">
+        <mc:Choice xmlns:a14="http://schemas.microsoft.com/office/drawing/2010/main" Requires="a14">
+          <p:sp>
+            <p:nvSpPr>
+              <p:cNvPr id="3" name="Content Placeholder 2">
+                <a:extLst>
+                  <a:ext uri="{FF2B5EF4-FFF2-40B4-BE49-F238E27FC236}">
+                    <a16:creationId xmlns:a16="http://schemas.microsoft.com/office/drawing/2014/main" id="{B4BC0F79-2915-7D91-89A3-643D2FC7B643}"/>
+                  </a:ext>
+                </a:extLst>
+              </p:cNvPr>
+              <p:cNvSpPr>
+                <a:spLocks noGrp="1"/>
+              </p:cNvSpPr>
+              <p:nvPr>
+                <p:ph idx="1"/>
+              </p:nvPr>
+            </p:nvSpPr>
+            <p:spPr/>
+            <p:txBody>
+              <a:bodyPr>
+                <a:normAutofit fontScale="92500" lnSpcReduction="10000"/>
+              </a:bodyPr>
+              <a:lstStyle/>
+              <a:p>
+                <a:pPr marL="514350" indent="-514350">
+                  <a:buFont typeface="+mj-lt"/>
+                  <a:buAutoNum type="arabicPeriod"/>
+                </a:pPr>
+                <a:r>
+                  <a:rPr lang="en-GB" dirty="0"/>
+                  <a:t>L2 error on datapoints</a:t>
+                </a:r>
+              </a:p>
+              <a:p>
+                <a:pPr marL="514350" indent="-514350">
+                  <a:buFont typeface="+mj-lt"/>
+                  <a:buAutoNum type="arabicPeriod"/>
+                </a:pPr>
+                <a:r>
+                  <a:rPr lang="en-GB" dirty="0"/>
+                  <a:t>L2 error on interior points</a:t>
+                </a:r>
+              </a:p>
+              <a:p>
+                <a:pPr marL="514350" indent="-514350">
+                  <a:buFont typeface="+mj-lt"/>
+                  <a:buAutoNum type="arabicPeriod"/>
+                </a:pPr>
+                <a:r>
+                  <a:rPr lang="en-GB" dirty="0"/>
+                  <a:t>soft-</a:t>
+                </a:r>
+                <a14:m>
+                  <m:oMath xmlns:m="http://schemas.openxmlformats.org/officeDocument/2006/math">
+                    <m:sSub>
+                      <m:sSubPr>
+                        <m:ctrlPr>
+                          <a:rPr lang="en-US" b="0" i="1" smtClean="0">
+                            <a:latin typeface="Cambria Math" panose="02040503050406030204" pitchFamily="18" charset="0"/>
+                          </a:rPr>
+                        </m:ctrlPr>
+                      </m:sSubPr>
+                      <m:e>
+                        <m:r>
+                          <a:rPr lang="en-US" b="0" i="1" smtClean="0">
+                            <a:latin typeface="Cambria Math" panose="02040503050406030204" pitchFamily="18" charset="0"/>
+                          </a:rPr>
+                          <m:t>𝐿</m:t>
+                        </m:r>
+                      </m:e>
+                      <m:sub>
+                        <m:r>
+                          <a:rPr lang="en-US" b="0" i="1" smtClean="0">
+                            <a:latin typeface="Cambria Math" panose="02040503050406030204" pitchFamily="18" charset="0"/>
+                          </a:rPr>
+                          <m:t>∞</m:t>
+                        </m:r>
+                      </m:sub>
+                    </m:sSub>
+                  </m:oMath>
+                </a14:m>
+                <a:r>
+                  <a:rPr lang="en-US" b="0" dirty="0"/>
+                  <a:t> error on interior points</a:t>
+                </a:r>
+              </a:p>
+              <a:p>
+                <a:pPr marL="514350" indent="-514350">
+                  <a:buFont typeface="+mj-lt"/>
+                  <a:buAutoNum type="arabicPeriod"/>
+                </a:pPr>
+                <a:r>
+                  <a:rPr lang="en-US" dirty="0"/>
+                  <a:t>L2 error on boundary points</a:t>
+                </a:r>
+              </a:p>
+              <a:p>
+                <a:pPr marL="457200" lvl="1" indent="0">
+                  <a:buNone/>
+                </a:pPr>
+                <a:endParaRPr lang="en-US" dirty="0"/>
+              </a:p>
+              <a:p>
+                <a:pPr marL="0" indent="0">
+                  <a:buNone/>
+                </a:pPr>
+                <a14:m>
+                  <m:oMathPara xmlns:m="http://schemas.openxmlformats.org/officeDocument/2006/math">
+                    <m:oMathParaPr>
+                      <m:jc m:val="centerGroup"/>
+                    </m:oMathParaPr>
+                    <m:oMath xmlns:m="http://schemas.openxmlformats.org/officeDocument/2006/math">
+                      <m:r>
+                        <a:rPr lang="en-US" b="0" i="1" smtClean="0">
+                          <a:latin typeface="Cambria Math" panose="02040503050406030204" pitchFamily="18" charset="0"/>
+                        </a:rPr>
+                        <m:t>ℒ</m:t>
+                      </m:r>
+                      <m:r>
+                        <a:rPr lang="en-US" b="0" i="1" smtClean="0">
+                          <a:latin typeface="Cambria Math" panose="02040503050406030204" pitchFamily="18" charset="0"/>
+                        </a:rPr>
+                        <m:t>=</m:t>
+                      </m:r>
+                      <m:sSub>
+                        <m:sSubPr>
+                          <m:ctrlPr>
+                            <a:rPr lang="en-US" b="0" i="1" smtClean="0">
+                              <a:latin typeface="Cambria Math" panose="02040503050406030204" pitchFamily="18" charset="0"/>
+                            </a:rPr>
+                          </m:ctrlPr>
+                        </m:sSubPr>
+                        <m:e>
+                          <m:r>
+                            <a:rPr lang="en-US" b="0" i="1" smtClean="0">
+                              <a:latin typeface="Cambria Math" panose="02040503050406030204" pitchFamily="18" charset="0"/>
+                            </a:rPr>
+                            <m:t>𝐿</m:t>
+                          </m:r>
+                        </m:e>
+                        <m:sub>
+                          <m:r>
+                            <a:rPr lang="en-US" b="0" i="1" smtClean="0">
+                              <a:latin typeface="Cambria Math" panose="02040503050406030204" pitchFamily="18" charset="0"/>
+                            </a:rPr>
+                            <m:t>𝑑𝑎𝑡𝑎</m:t>
+                          </m:r>
+                        </m:sub>
+                      </m:sSub>
+                      <m:r>
+                        <a:rPr lang="en-US" b="0" i="1" smtClean="0">
+                          <a:latin typeface="Cambria Math" panose="02040503050406030204" pitchFamily="18" charset="0"/>
+                        </a:rPr>
+                        <m:t>+</m:t>
+                      </m:r>
+                      <m:sSub>
+                        <m:sSubPr>
+                          <m:ctrlPr>
+                            <a:rPr lang="en-US" b="0" i="1" smtClean="0">
+                              <a:latin typeface="Cambria Math" panose="02040503050406030204" pitchFamily="18" charset="0"/>
+                            </a:rPr>
+                          </m:ctrlPr>
+                        </m:sSubPr>
+                        <m:e>
+                          <m:r>
+                            <a:rPr lang="en-US" b="0" i="1" smtClean="0">
+                              <a:latin typeface="Cambria Math" panose="02040503050406030204" pitchFamily="18" charset="0"/>
+                            </a:rPr>
+                            <m:t>𝐿</m:t>
+                          </m:r>
+                        </m:e>
+                        <m:sub>
+                          <m:r>
+                            <a:rPr lang="en-US" b="0" i="1" smtClean="0">
+                              <a:latin typeface="Cambria Math" panose="02040503050406030204" pitchFamily="18" charset="0"/>
+                            </a:rPr>
+                            <m:t>𝑖𝑛𝑡</m:t>
+                          </m:r>
+                        </m:sub>
+                      </m:sSub>
+                      <m:r>
+                        <a:rPr lang="en-US" b="0" i="1" smtClean="0">
+                          <a:latin typeface="Cambria Math" panose="02040503050406030204" pitchFamily="18" charset="0"/>
+                        </a:rPr>
+                        <m:t>+0.5×</m:t>
+                      </m:r>
+                      <m:sSub>
+                        <m:sSubPr>
+                          <m:ctrlPr>
+                            <a:rPr lang="en-US" b="0" i="1" smtClean="0">
+                              <a:latin typeface="Cambria Math" panose="02040503050406030204" pitchFamily="18" charset="0"/>
+                            </a:rPr>
+                          </m:ctrlPr>
+                        </m:sSubPr>
+                        <m:e>
+                          <m:r>
+                            <a:rPr lang="en-US" b="0" i="1" smtClean="0">
+                              <a:latin typeface="Cambria Math" panose="02040503050406030204" pitchFamily="18" charset="0"/>
+                            </a:rPr>
+                            <m:t>𝐿</m:t>
+                          </m:r>
+                        </m:e>
+                        <m:sub>
+                          <m:r>
+                            <a:rPr lang="en-US" b="0" i="1" smtClean="0">
+                              <a:latin typeface="Cambria Math" panose="02040503050406030204" pitchFamily="18" charset="0"/>
+                            </a:rPr>
+                            <m:t>∞</m:t>
+                          </m:r>
+                        </m:sub>
+                      </m:sSub>
+                      <m:r>
+                        <a:rPr lang="en-US" b="0" i="1" smtClean="0">
+                          <a:latin typeface="Cambria Math" panose="02040503050406030204" pitchFamily="18" charset="0"/>
+                        </a:rPr>
+                        <m:t>+</m:t>
+                      </m:r>
+                      <m:sSub>
+                        <m:sSubPr>
+                          <m:ctrlPr>
+                            <a:rPr lang="en-US" b="0" i="1" smtClean="0">
+                              <a:latin typeface="Cambria Math" panose="02040503050406030204" pitchFamily="18" charset="0"/>
+                            </a:rPr>
+                          </m:ctrlPr>
+                        </m:sSubPr>
+                        <m:e>
+                          <m:r>
+                            <a:rPr lang="en-US" b="0" i="1" smtClean="0">
+                              <a:latin typeface="Cambria Math" panose="02040503050406030204" pitchFamily="18" charset="0"/>
+                            </a:rPr>
+                            <m:t>𝐿</m:t>
+                          </m:r>
+                        </m:e>
+                        <m:sub>
+                          <m:r>
+                            <a:rPr lang="en-US" b="0" i="1" smtClean="0">
+                              <a:latin typeface="Cambria Math" panose="02040503050406030204" pitchFamily="18" charset="0"/>
+                            </a:rPr>
+                            <m:t>𝑅𝐵</m:t>
+                          </m:r>
+                        </m:sub>
+                      </m:sSub>
+                    </m:oMath>
+                  </m:oMathPara>
+                </a14:m>
+                <a:endParaRPr lang="en-US" b="0" dirty="0"/>
+              </a:p>
+              <a:p>
+                <a:pPr marL="0" indent="0">
+                  <a:buNone/>
+                </a:pPr>
+                <a:endParaRPr lang="en-GB" b="0" dirty="0"/>
+              </a:p>
+              <a:p>
+                <a:pPr marL="0" indent="0">
+                  <a:buNone/>
+                </a:pPr>
+                <a:r>
+                  <a:rPr lang="en-GB" dirty="0"/>
+                  <a:t>Losses rescaled using EMA method</a:t>
+                </a:r>
+              </a:p>
+              <a:p>
+                <a:pPr marL="0" indent="0">
+                  <a:buNone/>
+                </a:pPr>
+                <a:endParaRPr lang="en-GB" b="0" dirty="0"/>
+              </a:p>
+              <a:p>
+                <a:pPr marL="0" indent="0">
+                  <a:buNone/>
+                </a:pPr>
+                <a:r>
+                  <a:rPr lang="en-GB" dirty="0"/>
+                  <a:t>Halt training if no improvement on validation data L2RE</a:t>
+                </a:r>
+                <a:endParaRPr lang="en-US" b="0" dirty="0"/>
+              </a:p>
+            </p:txBody>
+          </p:sp>
+        </mc:Choice>
+        <mc:Fallback>
+          <p:sp>
+            <p:nvSpPr>
+              <p:cNvPr id="3" name="Content Placeholder 2">
+                <a:extLst>
+                  <a:ext uri="{FF2B5EF4-FFF2-40B4-BE49-F238E27FC236}">
+                    <a16:creationId xmlns:a16="http://schemas.microsoft.com/office/drawing/2014/main" id="{B4BC0F79-2915-7D91-89A3-643D2FC7B643}"/>
+                  </a:ext>
+                </a:extLst>
+              </p:cNvPr>
+              <p:cNvSpPr>
+                <a:spLocks noGrp="1" noRot="1" noChangeAspect="1" noMove="1" noResize="1" noEditPoints="1" noAdjustHandles="1" noChangeArrowheads="1" noChangeShapeType="1" noTextEdit="1"/>
+              </p:cNvSpPr>
+              <p:nvPr>
+                <p:ph idx="1"/>
+              </p:nvPr>
+            </p:nvSpPr>
+            <p:spPr>
+              <a:blipFill>
+                <a:blip r:embed="rId2"/>
+                <a:stretch>
+                  <a:fillRect l="-1043" t="-3081" b="-280"/>
+                </a:stretch>
+              </a:blipFill>
+            </p:spPr>
+            <p:txBody>
+              <a:bodyPr/>
+              <a:lstStyle/>
+              <a:p>
+                <a:r>
+                  <a:rPr lang="en-GB">
+                    <a:noFill/>
+                  </a:rPr>
+                  <a:t> </a:t>
+                </a:r>
+              </a:p>
+            </p:txBody>
+          </p:sp>
+        </mc:Fallback>
+      </mc:AlternateContent>
+    </p:spTree>
+    <p:extLst>
+      <p:ext uri="{BB962C8B-B14F-4D97-AF65-F5344CB8AC3E}">
+        <p14:creationId xmlns:p14="http://schemas.microsoft.com/office/powerpoint/2010/main" val="2785466076"/>
+      </p:ext>
+    </p:extLst>
+  </p:cSld>
+  <p:clrMapOvr>
+    <a:masterClrMapping/>
+  </p:clrMapOvr>
+  <p:timing>
+    <p:tnLst>
+      <p:par>
+        <p:cTn id="1" dur="indefinite" restart="never" nodeType="tmRoot">
+          <p:childTnLst>
+            <p:seq concurrent="1" nextAc="seek">
+              <p:cTn id="2" dur="indefinite" nodeType="mainSeq">
+                <p:childTnLst>
+                  <p:par>
+                    <p:cTn id="3" fill="hold">
+                      <p:stCondLst>
+                        <p:cond delay="indefinite"/>
+                      </p:stCondLst>
+                      <p:childTnLst>
+                        <p:par>
+                          <p:cTn id="4" fill="hold">
+                            <p:stCondLst>
+                              <p:cond delay="0"/>
+                            </p:stCondLst>
+                            <p:childTnLst>
+                              <p:par>
+                                <p:cTn id="5" presetID="1" presetClass="entr" presetSubtype="0" fill="hold" grpId="0" nodeType="clickEffect">
+                                  <p:stCondLst>
+                                    <p:cond delay="0"/>
+                                  </p:stCondLst>
+                                  <p:childTnLst>
+                                    <p:set>
+                                      <p:cBhvr>
+                                        <p:cTn id="6" dur="1" fill="hold">
+                                          <p:stCondLst>
+                                            <p:cond delay="0"/>
+                                          </p:stCondLst>
+                                        </p:cTn>
+                                        <p:tgtEl>
+                                          <p:spTgt spid="3">
+                                            <p:txEl>
+                                              <p:pRg st="0" end="0"/>
+                                            </p:txEl>
+                                          </p:spTgt>
+                                        </p:tgtEl>
+                                        <p:attrNameLst>
+                                          <p:attrName>style.visibility</p:attrName>
+                                        </p:attrNameLst>
+                                      </p:cBhvr>
+                                      <p:to>
+                                        <p:strVal val="visible"/>
+                                      </p:to>
+                                    </p:set>
+                                  </p:childTnLst>
+                                </p:cTn>
+                              </p:par>
+                            </p:childTnLst>
+                          </p:cTn>
+                        </p:par>
+                      </p:childTnLst>
+                    </p:cTn>
+                  </p:par>
+                  <p:par>
+                    <p:cTn id="7" fill="hold">
+                      <p:stCondLst>
+                        <p:cond delay="indefinite"/>
+                      </p:stCondLst>
+                      <p:childTnLst>
+                        <p:par>
+                          <p:cTn id="8" fill="hold">
+                            <p:stCondLst>
+                              <p:cond delay="0"/>
+                            </p:stCondLst>
+                            <p:childTnLst>
+                              <p:par>
+                                <p:cTn id="9" presetID="1" presetClass="entr" presetSubtype="0" fill="hold" grpId="0" nodeType="clickEffect">
+                                  <p:stCondLst>
+                                    <p:cond delay="0"/>
+                                  </p:stCondLst>
+                                  <p:childTnLst>
+                                    <p:set>
+                                      <p:cBhvr>
+                                        <p:cTn id="10" dur="1" fill="hold">
+                                          <p:stCondLst>
+                                            <p:cond delay="0"/>
+                                          </p:stCondLst>
+                                        </p:cTn>
+                                        <p:tgtEl>
+                                          <p:spTgt spid="3">
+                                            <p:txEl>
+                                              <p:pRg st="1" end="1"/>
+                                            </p:txEl>
+                                          </p:spTgt>
+                                        </p:tgtEl>
+                                        <p:attrNameLst>
+                                          <p:attrName>style.visibility</p:attrName>
+                                        </p:attrNameLst>
+                                      </p:cBhvr>
+                                      <p:to>
+                                        <p:strVal val="visible"/>
+                                      </p:to>
+                                    </p:set>
+                                  </p:childTnLst>
+                                </p:cTn>
+                              </p:par>
+                            </p:childTnLst>
+                          </p:cTn>
+                        </p:par>
+                      </p:childTnLst>
+                    </p:cTn>
+                  </p:par>
+                  <p:par>
+                    <p:cTn id="11" fill="hold">
+                      <p:stCondLst>
+                        <p:cond delay="indefinite"/>
+                      </p:stCondLst>
+                      <p:childTnLst>
+                        <p:par>
+                          <p:cTn id="12" fill="hold">
+                            <p:stCondLst>
+                              <p:cond delay="0"/>
+                            </p:stCondLst>
+                            <p:childTnLst>
+                              <p:par>
+                                <p:cTn id="13" presetID="1" presetClass="entr" presetSubtype="0" fill="hold" grpId="0" nodeType="clickEffect">
+                                  <p:stCondLst>
+                                    <p:cond delay="0"/>
+                                  </p:stCondLst>
+                                  <p:childTnLst>
+                                    <p:set>
+                                      <p:cBhvr>
+                                        <p:cTn id="14" dur="1" fill="hold">
+                                          <p:stCondLst>
+                                            <p:cond delay="0"/>
+                                          </p:stCondLst>
+                                        </p:cTn>
+                                        <p:tgtEl>
+                                          <p:spTgt spid="3">
+                                            <p:txEl>
+                                              <p:pRg st="2" end="2"/>
+                                            </p:txEl>
+                                          </p:spTgt>
+                                        </p:tgtEl>
+                                        <p:attrNameLst>
+                                          <p:attrName>style.visibility</p:attrName>
+                                        </p:attrNameLst>
+                                      </p:cBhvr>
+                                      <p:to>
+                                        <p:strVal val="visible"/>
+                                      </p:to>
+                                    </p:set>
+                                  </p:childTnLst>
+                                </p:cTn>
+                              </p:par>
+                            </p:childTnLst>
+                          </p:cTn>
+                        </p:par>
+                      </p:childTnLst>
+                    </p:cTn>
+                  </p:par>
+                  <p:par>
+                    <p:cTn id="15" fill="hold">
+                      <p:stCondLst>
+                        <p:cond delay="indefinite"/>
+                      </p:stCondLst>
+                      <p:childTnLst>
+                        <p:par>
+                          <p:cTn id="16" fill="hold">
+                            <p:stCondLst>
+                              <p:cond delay="0"/>
+                            </p:stCondLst>
+                            <p:childTnLst>
+                              <p:par>
+                                <p:cTn id="17" presetID="1" presetClass="entr" presetSubtype="0" fill="hold" grpId="0" nodeType="clickEffect">
+                                  <p:stCondLst>
+                                    <p:cond delay="0"/>
+                                  </p:stCondLst>
+                                  <p:childTnLst>
+                                    <p:set>
+                                      <p:cBhvr>
+                                        <p:cTn id="18" dur="1" fill="hold">
+                                          <p:stCondLst>
+                                            <p:cond delay="0"/>
+                                          </p:stCondLst>
+                                        </p:cTn>
+                                        <p:tgtEl>
+                                          <p:spTgt spid="3">
+                                            <p:txEl>
+                                              <p:pRg st="3" end="3"/>
+                                            </p:txEl>
+                                          </p:spTgt>
+                                        </p:tgtEl>
+                                        <p:attrNameLst>
+                                          <p:attrName>style.visibility</p:attrName>
+                                        </p:attrNameLst>
+                                      </p:cBhvr>
+                                      <p:to>
+                                        <p:strVal val="visible"/>
+                                      </p:to>
+                                    </p:set>
+                                  </p:childTnLst>
+                                </p:cTn>
+                              </p:par>
+                            </p:childTnLst>
+                          </p:cTn>
+                        </p:par>
+                      </p:childTnLst>
+                    </p:cTn>
+                  </p:par>
+                  <p:par>
+                    <p:cTn id="19" fill="hold">
+                      <p:stCondLst>
+                        <p:cond delay="indefinite"/>
+                      </p:stCondLst>
+                      <p:childTnLst>
+                        <p:par>
+                          <p:cTn id="20" fill="hold">
+                            <p:stCondLst>
+                              <p:cond delay="0"/>
+                            </p:stCondLst>
+                            <p:childTnLst>
+                              <p:par>
+                                <p:cTn id="21" presetID="1" presetClass="entr" presetSubtype="0" fill="hold" grpId="0" nodeType="clickEffect">
+                                  <p:stCondLst>
+                                    <p:cond delay="0"/>
+                                  </p:stCondLst>
+                                  <p:childTnLst>
+                                    <p:set>
+                                      <p:cBhvr>
+                                        <p:cTn id="22" dur="1" fill="hold">
+                                          <p:stCondLst>
+                                            <p:cond delay="0"/>
+                                          </p:stCondLst>
+                                        </p:cTn>
+                                        <p:tgtEl>
+                                          <p:spTgt spid="3">
+                                            <p:txEl>
+                                              <p:pRg st="5" end="5"/>
+                                            </p:txEl>
+                                          </p:spTgt>
+                                        </p:tgtEl>
+                                        <p:attrNameLst>
+                                          <p:attrName>style.visibility</p:attrName>
+                                        </p:attrNameLst>
+                                      </p:cBhvr>
+                                      <p:to>
+                                        <p:strVal val="visible"/>
+                                      </p:to>
+                                    </p:set>
+                                  </p:childTnLst>
+                                </p:cTn>
+                              </p:par>
+                            </p:childTnLst>
+                          </p:cTn>
+                        </p:par>
+                      </p:childTnLst>
+                    </p:cTn>
+                  </p:par>
+                  <p:par>
+                    <p:cTn id="23" fill="hold">
+                      <p:stCondLst>
+                        <p:cond delay="indefinite"/>
+                      </p:stCondLst>
+                      <p:childTnLst>
+                        <p:par>
+                          <p:cTn id="24" fill="hold">
+                            <p:stCondLst>
+                              <p:cond delay="0"/>
+                            </p:stCondLst>
+                            <p:childTnLst>
+                              <p:par>
+                                <p:cTn id="25" presetID="1" presetClass="entr" presetSubtype="0" fill="hold" grpId="0" nodeType="clickEffect">
+                                  <p:stCondLst>
+                                    <p:cond delay="0"/>
+                                  </p:stCondLst>
+                                  <p:childTnLst>
+                                    <p:set>
+                                      <p:cBhvr>
+                                        <p:cTn id="26" dur="1" fill="hold">
+                                          <p:stCondLst>
+                                            <p:cond delay="0"/>
+                                          </p:stCondLst>
+                                        </p:cTn>
+                                        <p:tgtEl>
+                                          <p:spTgt spid="3">
+                                            <p:txEl>
+                                              <p:pRg st="7" end="7"/>
+                                            </p:txEl>
+                                          </p:spTgt>
+                                        </p:tgtEl>
+                                        <p:attrNameLst>
+                                          <p:attrName>style.visibility</p:attrName>
+                                        </p:attrNameLst>
+                                      </p:cBhvr>
+                                      <p:to>
+                                        <p:strVal val="visible"/>
+                                      </p:to>
+                                    </p:set>
+                                  </p:childTnLst>
+                                </p:cTn>
+                              </p:par>
+                            </p:childTnLst>
+                          </p:cTn>
+                        </p:par>
+                      </p:childTnLst>
+                    </p:cTn>
+                  </p:par>
+                  <p:par>
+                    <p:cTn id="27" fill="hold">
+                      <p:stCondLst>
+                        <p:cond delay="indefinite"/>
+                      </p:stCondLst>
+                      <p:childTnLst>
+                        <p:par>
+                          <p:cTn id="28" fill="hold">
+                            <p:stCondLst>
+                              <p:cond delay="0"/>
+                            </p:stCondLst>
+                            <p:childTnLst>
+                              <p:par>
+                                <p:cTn id="29" presetID="1" presetClass="entr" presetSubtype="0" fill="hold" grpId="0" nodeType="clickEffect">
+                                  <p:stCondLst>
+                                    <p:cond delay="0"/>
+                                  </p:stCondLst>
+                                  <p:childTnLst>
+                                    <p:set>
+                                      <p:cBhvr>
+                                        <p:cTn id="30" dur="1" fill="hold">
+                                          <p:stCondLst>
+                                            <p:cond delay="0"/>
+                                          </p:stCondLst>
+                                        </p:cTn>
+                                        <p:tgtEl>
+                                          <p:spTgt spid="3">
+                                            <p:txEl>
+                                              <p:pRg st="9" end="9"/>
+                                            </p:txEl>
+                                          </p:spTgt>
+                                        </p:tgtEl>
+                                        <p:attrNameLst>
+                                          <p:attrName>style.visibility</p:attrName>
+                                        </p:attrNameLst>
+                                      </p:cBhvr>
+                                      <p:to>
+                                        <p:strVal val="visible"/>
+                                      </p:to>
+                                    </p:set>
+                                  </p:childTnLst>
+                                </p:cTn>
+                              </p:par>
+                            </p:childTnLst>
+                          </p:cTn>
+                        </p:par>
+                      </p:childTnLst>
+                    </p:cTn>
+                  </p:par>
+                </p:childTnLst>
+              </p:cTn>
+              <p:prevCondLst>
+                <p:cond evt="onPrev" delay="0">
+                  <p:tgtEl>
+                    <p:sldTgt/>
+                  </p:tgtEl>
+                </p:cond>
+              </p:prevCondLst>
+              <p:nextCondLst>
+                <p:cond evt="onNext" delay="0">
+                  <p:tgtEl>
+                    <p:sldTgt/>
+                  </p:tgtEl>
+                </p:cond>
+              </p:nextCondLst>
+            </p:seq>
+          </p:childTnLst>
+        </p:cTn>
+      </p:par>
+    </p:tnLst>
+    <p:bldLst>
+      <p:bldP spid="3" grpId="0" build="p"/>
+    </p:bldLst>
+  </p:timing>
+</p:sld>
+</file>
+
+<file path=ppt/slides/slide14.xml><?xml version="1.0" encoding="utf-8"?>
+<p:sld xmlns:a="http://schemas.openxmlformats.org/drawingml/2006/main" xmlns:r="http://schemas.openxmlformats.org/officeDocument/2006/relationships" xmlns:p="http://schemas.openxmlformats.org/presentationml/2006/main">
+  <p:cSld>
+    <p:spTree>
+      <p:nvGrpSpPr>
+        <p:cNvPr id="1" name=""/>
+        <p:cNvGrpSpPr/>
+        <p:nvPr/>
+      </p:nvGrpSpPr>
+      <p:grpSpPr>
+        <a:xfrm>
+          <a:off x="0" y="0"/>
+          <a:ext cx="0" cy="0"/>
+          <a:chOff x="0" y="0"/>
+          <a:chExt cx="0" cy="0"/>
+        </a:xfrm>
+      </p:grpSpPr>
+      <p:sp>
+        <p:nvSpPr>
+          <p:cNvPr id="2" name="Title 1">
+            <a:extLst>
+              <a:ext uri="{FF2B5EF4-FFF2-40B4-BE49-F238E27FC236}">
+                <a16:creationId xmlns:a16="http://schemas.microsoft.com/office/drawing/2014/main" id="{4AEFEEFD-5153-49AC-BA0C-139C2E3CF1CE}"/>
+              </a:ext>
+            </a:extLst>
+          </p:cNvPr>
+          <p:cNvSpPr>
+            <a:spLocks noGrp="1"/>
+          </p:cNvSpPr>
+          <p:nvPr>
+            <p:ph type="ctrTitle"/>
+          </p:nvPr>
+        </p:nvSpPr>
+        <p:spPr/>
+        <p:txBody>
+          <a:bodyPr/>
+          <a:lstStyle/>
+          <a:p>
+            <a:r>
+              <a:rPr lang="en-GB" dirty="0"/>
+              <a:t>Thank you for listening</a:t>
+            </a:r>
+          </a:p>
+        </p:txBody>
+      </p:sp>
+      <p:sp>
+        <p:nvSpPr>
+          <p:cNvPr id="3" name="Subtitle 2">
+            <a:extLst>
+              <a:ext uri="{FF2B5EF4-FFF2-40B4-BE49-F238E27FC236}">
+                <a16:creationId xmlns:a16="http://schemas.microsoft.com/office/drawing/2014/main" id="{3DA39296-081A-2DFB-C93B-FF736192873D}"/>
+              </a:ext>
+            </a:extLst>
+          </p:cNvPr>
+          <p:cNvSpPr>
+            <a:spLocks noGrp="1"/>
+          </p:cNvSpPr>
+          <p:nvPr>
+            <p:ph type="subTitle" idx="1"/>
+          </p:nvPr>
+        </p:nvSpPr>
+        <p:spPr/>
+        <p:txBody>
+          <a:bodyPr/>
+          <a:lstStyle/>
+          <a:p>
+            <a:endParaRPr lang="en-GB"/>
+          </a:p>
+        </p:txBody>
+      </p:sp>
+    </p:spTree>
+    <p:extLst>
+      <p:ext uri="{BB962C8B-B14F-4D97-AF65-F5344CB8AC3E}">
+        <p14:creationId xmlns:p14="http://schemas.microsoft.com/office/powerpoint/2010/main" val="2767603874"/>
+      </p:ext>
+    </p:extLst>
+  </p:cSld>
+  <p:clrMapOvr>
+    <a:masterClrMapping/>
+  </p:clrMapOvr>
+</p:sld>
+</file>
+
 <file path=ppt/slides/slide2.xml><?xml version="1.0" encoding="utf-8"?>
+<p:sld xmlns:a="http://schemas.openxmlformats.org/drawingml/2006/main" xmlns:r="http://schemas.openxmlformats.org/officeDocument/2006/relationships" xmlns:p="http://schemas.openxmlformats.org/presentationml/2006/main">
+  <p:cSld>
+    <p:spTree>
+      <p:nvGrpSpPr>
+        <p:cNvPr id="1" name=""/>
+        <p:cNvGrpSpPr/>
+        <p:nvPr/>
+      </p:nvGrpSpPr>
+      <p:grpSpPr>
+        <a:xfrm>
+          <a:off x="0" y="0"/>
+          <a:ext cx="0" cy="0"/>
+          <a:chOff x="0" y="0"/>
+          <a:chExt cx="0" cy="0"/>
+        </a:xfrm>
+      </p:grpSpPr>
+      <p:sp>
+        <p:nvSpPr>
+          <p:cNvPr id="2" name="Title 1">
+            <a:extLst>
+              <a:ext uri="{FF2B5EF4-FFF2-40B4-BE49-F238E27FC236}">
+                <a16:creationId xmlns:a16="http://schemas.microsoft.com/office/drawing/2014/main" id="{E45F5C17-B7FB-C88D-9872-395A86E8C193}"/>
+              </a:ext>
+            </a:extLst>
+          </p:cNvPr>
+          <p:cNvSpPr>
+            <a:spLocks noGrp="1"/>
+          </p:cNvSpPr>
+          <p:nvPr>
+            <p:ph type="title"/>
+          </p:nvPr>
+        </p:nvSpPr>
+        <p:spPr/>
+        <p:txBody>
+          <a:bodyPr/>
+          <a:lstStyle/>
+          <a:p>
+            <a:r>
+              <a:rPr lang="en-GB" dirty="0"/>
+              <a:t>Theory</a:t>
+            </a:r>
+          </a:p>
+        </p:txBody>
+      </p:sp>
+      <mc:AlternateContent xmlns:mc="http://schemas.openxmlformats.org/markup-compatibility/2006" xmlns:a14="http://schemas.microsoft.com/office/drawing/2010/main">
+        <mc:Choice Requires="a14">
+          <p:sp>
+            <p:nvSpPr>
+              <p:cNvPr id="3" name="Content Placeholder 2">
+                <a:extLst>
+                  <a:ext uri="{FF2B5EF4-FFF2-40B4-BE49-F238E27FC236}">
+                    <a16:creationId xmlns:a16="http://schemas.microsoft.com/office/drawing/2014/main" id="{5A2CEAFD-F254-5C1B-1AAA-AE42879A6ABB}"/>
+                  </a:ext>
+                </a:extLst>
+              </p:cNvPr>
+              <p:cNvSpPr>
+                <a:spLocks noGrp="1"/>
+              </p:cNvSpPr>
+              <p:nvPr>
+                <p:ph idx="1"/>
+              </p:nvPr>
+            </p:nvSpPr>
+            <p:spPr/>
+            <p:txBody>
+              <a:bodyPr/>
+              <a:lstStyle/>
+              <a:p>
+                <a:pPr marL="0" indent="0">
+                  <a:buNone/>
+                </a:pPr>
+                <a:r>
+                  <a:rPr lang="en-GB" dirty="0"/>
+                  <a:t>Einstein’ Field Equations:</a:t>
+                </a:r>
+              </a:p>
+              <a:p>
+                <a:pPr marL="0" indent="0">
+                  <a:buNone/>
+                </a:pPr>
+                <a:endParaRPr lang="en-GB" dirty="0"/>
+              </a:p>
+              <a:p>
+                <a:pPr marL="0" indent="0">
+                  <a:buNone/>
+                </a:pPr>
+                <a14:m>
+                  <m:oMathPara xmlns:m="http://schemas.openxmlformats.org/officeDocument/2006/math">
+                    <m:oMathParaPr>
+                      <m:jc m:val="centerGroup"/>
+                    </m:oMathParaPr>
+                    <m:oMath xmlns:m="http://schemas.openxmlformats.org/officeDocument/2006/math">
+                      <m:sSub>
+                        <m:sSubPr>
+                          <m:ctrlPr>
+                            <a:rPr lang="en-US" i="1">
+                              <a:latin typeface="Cambria Math" panose="02040503050406030204" pitchFamily="18" charset="0"/>
+                            </a:rPr>
+                          </m:ctrlPr>
+                        </m:sSubPr>
+                        <m:e>
+                          <m:r>
+                            <a:rPr lang="en-US" i="1">
+                              <a:latin typeface="Cambria Math" panose="02040503050406030204" pitchFamily="18" charset="0"/>
+                            </a:rPr>
+                            <m:t>𝐺</m:t>
+                          </m:r>
+                        </m:e>
+                        <m:sub>
+                          <m:r>
+                            <a:rPr lang="en-US" i="1">
+                              <a:latin typeface="Cambria Math" panose="02040503050406030204" pitchFamily="18" charset="0"/>
+                            </a:rPr>
+                            <m:t>𝜇𝜈</m:t>
+                          </m:r>
+                        </m:sub>
+                      </m:sSub>
+                      <m:r>
+                        <a:rPr lang="en-US" i="1">
+                          <a:latin typeface="Cambria Math" panose="02040503050406030204" pitchFamily="18" charset="0"/>
+                        </a:rPr>
+                        <m:t>=8</m:t>
+                      </m:r>
+                      <m:r>
+                        <a:rPr lang="en-US" i="1">
+                          <a:latin typeface="Cambria Math" panose="02040503050406030204" pitchFamily="18" charset="0"/>
+                        </a:rPr>
+                        <m:t>𝜋</m:t>
+                      </m:r>
+                      <m:r>
+                        <a:rPr lang="en-US" i="1">
+                          <a:latin typeface="Cambria Math" panose="02040503050406030204" pitchFamily="18" charset="0"/>
+                        </a:rPr>
+                        <m:t>𝐺</m:t>
+                      </m:r>
+                      <m:sSub>
+                        <m:sSubPr>
+                          <m:ctrlPr>
+                            <a:rPr lang="en-US" i="1">
+                              <a:latin typeface="Cambria Math" panose="02040503050406030204" pitchFamily="18" charset="0"/>
+                            </a:rPr>
+                          </m:ctrlPr>
+                        </m:sSubPr>
+                        <m:e>
+                          <m:r>
+                            <a:rPr lang="en-US" i="1">
+                              <a:latin typeface="Cambria Math" panose="02040503050406030204" pitchFamily="18" charset="0"/>
+                            </a:rPr>
+                            <m:t>𝑇</m:t>
+                          </m:r>
+                        </m:e>
+                        <m:sub>
+                          <m:r>
+                            <a:rPr lang="en-US" i="1">
+                              <a:latin typeface="Cambria Math" panose="02040503050406030204" pitchFamily="18" charset="0"/>
+                            </a:rPr>
+                            <m:t>𝜇𝜈</m:t>
+                          </m:r>
+                        </m:sub>
+                      </m:sSub>
+                    </m:oMath>
+                  </m:oMathPara>
+                </a14:m>
+                <a:endParaRPr lang="en-GB" dirty="0"/>
+              </a:p>
+              <a:p>
+                <a:pPr marL="0" indent="0">
+                  <a:buNone/>
+                </a:pPr>
+                <a:endParaRPr lang="en-GB" dirty="0"/>
+              </a:p>
+              <a:p>
+                <a:pPr marL="0" indent="0">
+                  <a:buNone/>
+                </a:pPr>
+                <a:r>
+                  <a:rPr lang="en-GB" dirty="0"/>
+                  <a:t>Hamiltonian Constraint Equation:</a:t>
+                </a:r>
+              </a:p>
+              <a:p>
+                <a:pPr marL="0" indent="0">
+                  <a:buNone/>
+                </a:pPr>
+                <a:endParaRPr lang="en-GB" dirty="0"/>
+              </a:p>
+              <a:p>
+                <a:pPr marL="0" indent="0">
+                  <a:buNone/>
+                </a:pPr>
+                <a14:m>
+                  <m:oMathPara xmlns:m="http://schemas.openxmlformats.org/officeDocument/2006/math">
+                    <m:oMathParaPr>
+                      <m:jc m:val="centerGroup"/>
+                    </m:oMathParaPr>
+                    <m:oMath xmlns:m="http://schemas.openxmlformats.org/officeDocument/2006/math">
+                      <m:r>
+                        <m:rPr>
+                          <m:sty m:val="p"/>
+                        </m:rPr>
+                        <a:rPr lang="en-US" i="1">
+                          <a:latin typeface="Cambria Math" panose="02040503050406030204" pitchFamily="18" charset="0"/>
+                        </a:rPr>
+                        <m:t>Δu</m:t>
+                      </m:r>
+                      <m:r>
+                        <a:rPr lang="en-US" i="1">
+                          <a:latin typeface="Cambria Math" panose="02040503050406030204" pitchFamily="18" charset="0"/>
+                        </a:rPr>
+                        <m:t>+</m:t>
+                      </m:r>
+                      <m:f>
+                        <m:fPr>
+                          <m:ctrlPr>
+                            <a:rPr lang="en-US" i="1">
+                              <a:latin typeface="Cambria Math" panose="02040503050406030204" pitchFamily="18" charset="0"/>
+                            </a:rPr>
+                          </m:ctrlPr>
+                        </m:fPr>
+                        <m:num>
+                          <m:r>
+                            <a:rPr lang="en-US" i="1">
+                              <a:latin typeface="Cambria Math" panose="02040503050406030204" pitchFamily="18" charset="0"/>
+                            </a:rPr>
+                            <m:t>1</m:t>
+                          </m:r>
+                        </m:num>
+                        <m:den>
+                          <m:r>
+                            <a:rPr lang="en-US" i="1">
+                              <a:latin typeface="Cambria Math" panose="02040503050406030204" pitchFamily="18" charset="0"/>
+                            </a:rPr>
+                            <m:t>8</m:t>
+                          </m:r>
+                        </m:den>
+                      </m:f>
+                      <m:sSup>
+                        <m:sSupPr>
+                          <m:ctrlPr>
+                            <a:rPr lang="en-US" i="1">
+                              <a:latin typeface="Cambria Math" panose="02040503050406030204" pitchFamily="18" charset="0"/>
+                            </a:rPr>
+                          </m:ctrlPr>
+                        </m:sSupPr>
+                        <m:e>
+                          <m:d>
+                            <m:dPr>
+                              <m:ctrlPr>
+                                <a:rPr lang="en-US" i="1">
+                                  <a:latin typeface="Cambria Math" panose="02040503050406030204" pitchFamily="18" charset="0"/>
+                                </a:rPr>
+                              </m:ctrlPr>
+                            </m:dPr>
+                            <m:e>
+                              <m:r>
+                                <a:rPr lang="en-US" i="1">
+                                  <a:latin typeface="Cambria Math" panose="02040503050406030204" pitchFamily="18" charset="0"/>
+                                </a:rPr>
+                                <m:t>1+</m:t>
+                              </m:r>
+                              <m:nary>
+                                <m:naryPr>
+                                  <m:chr m:val="∑"/>
+                                  <m:limLoc m:val="undOvr"/>
+                                  <m:supHide m:val="on"/>
+                                  <m:ctrlPr>
+                                    <a:rPr lang="en-US" i="1">
+                                      <a:latin typeface="Cambria Math" panose="02040503050406030204" pitchFamily="18" charset="0"/>
+                                    </a:rPr>
+                                  </m:ctrlPr>
+                                </m:naryPr>
+                                <m:sub>
+                                  <m:r>
+                                    <a:rPr lang="en-US" i="1">
+                                      <a:latin typeface="Cambria Math" panose="02040503050406030204" pitchFamily="18" charset="0"/>
+                                    </a:rPr>
+                                    <m:t>𝑛</m:t>
+                                  </m:r>
+                                </m:sub>
+                                <m:sup/>
+                                <m:e>
+                                  <m:f>
+                                    <m:fPr>
+                                      <m:ctrlPr>
+                                        <a:rPr lang="en-US" i="1">
+                                          <a:latin typeface="Cambria Math" panose="02040503050406030204" pitchFamily="18" charset="0"/>
+                                        </a:rPr>
+                                      </m:ctrlPr>
+                                    </m:fPr>
+                                    <m:num>
+                                      <m:sSub>
+                                        <m:sSubPr>
+                                          <m:ctrlPr>
+                                            <a:rPr lang="en-US" i="1">
+                                              <a:latin typeface="Cambria Math" panose="02040503050406030204" pitchFamily="18" charset="0"/>
+                                            </a:rPr>
+                                          </m:ctrlPr>
+                                        </m:sSubPr>
+                                        <m:e>
+                                          <m:r>
+                                            <a:rPr lang="en-US" i="1">
+                                              <a:latin typeface="Cambria Math" panose="02040503050406030204" pitchFamily="18" charset="0"/>
+                                            </a:rPr>
+                                            <m:t>𝑚</m:t>
+                                          </m:r>
+                                        </m:e>
+                                        <m:sub>
+                                          <m:r>
+                                            <a:rPr lang="en-US" i="1">
+                                              <a:latin typeface="Cambria Math" panose="02040503050406030204" pitchFamily="18" charset="0"/>
+                                            </a:rPr>
+                                            <m:t>𝑛</m:t>
+                                          </m:r>
+                                        </m:sub>
+                                      </m:sSub>
+                                    </m:num>
+                                    <m:den>
+                                      <m:r>
+                                        <a:rPr lang="en-US" i="1">
+                                          <a:latin typeface="Cambria Math" panose="02040503050406030204" pitchFamily="18" charset="0"/>
+                                        </a:rPr>
+                                        <m:t>2</m:t>
+                                      </m:r>
+                                      <m:sSub>
+                                        <m:sSubPr>
+                                          <m:ctrlPr>
+                                            <a:rPr lang="en-US" i="1">
+                                              <a:latin typeface="Cambria Math" panose="02040503050406030204" pitchFamily="18" charset="0"/>
+                                            </a:rPr>
+                                          </m:ctrlPr>
+                                        </m:sSubPr>
+                                        <m:e>
+                                          <m:r>
+                                            <a:rPr lang="en-US" i="1">
+                                              <a:latin typeface="Cambria Math" panose="02040503050406030204" pitchFamily="18" charset="0"/>
+                                            </a:rPr>
+                                            <m:t>𝑟</m:t>
+                                          </m:r>
+                                        </m:e>
+                                        <m:sub>
+                                          <m:r>
+                                            <a:rPr lang="en-US" i="1">
+                                              <a:latin typeface="Cambria Math" panose="02040503050406030204" pitchFamily="18" charset="0"/>
+                                            </a:rPr>
+                                            <m:t>𝑛</m:t>
+                                          </m:r>
+                                        </m:sub>
+                                      </m:sSub>
+                                    </m:den>
+                                  </m:f>
+                                </m:e>
+                              </m:nary>
+                              <m:r>
+                                <a:rPr lang="en-US" i="1">
+                                  <a:latin typeface="Cambria Math" panose="02040503050406030204" pitchFamily="18" charset="0"/>
+                                </a:rPr>
+                                <m:t>+</m:t>
+                              </m:r>
+                              <m:r>
+                                <m:rPr>
+                                  <m:sty m:val="p"/>
+                                </m:rPr>
+                                <a:rPr lang="en-US" i="1">
+                                  <a:latin typeface="Cambria Math" panose="02040503050406030204" pitchFamily="18" charset="0"/>
+                                </a:rPr>
+                                <m:t>u</m:t>
+                              </m:r>
+                            </m:e>
+                          </m:d>
+                        </m:e>
+                        <m:sup>
+                          <m:r>
+                            <a:rPr lang="en-US" i="1">
+                              <a:latin typeface="Cambria Math" panose="02040503050406030204" pitchFamily="18" charset="0"/>
+                            </a:rPr>
+                            <m:t>−7</m:t>
+                          </m:r>
+                        </m:sup>
+                      </m:sSup>
+                      <m:sSub>
+                        <m:sSubPr>
+                          <m:ctrlPr>
+                            <a:rPr lang="en-US" i="1">
+                              <a:latin typeface="Cambria Math" panose="02040503050406030204" pitchFamily="18" charset="0"/>
+                            </a:rPr>
+                          </m:ctrlPr>
+                        </m:sSubPr>
+                        <m:e>
+                          <m:acc>
+                            <m:accPr>
+                              <m:chr m:val="̅"/>
+                              <m:ctrlPr>
+                                <a:rPr lang="en-US" i="1">
+                                  <a:latin typeface="Cambria Math" panose="02040503050406030204" pitchFamily="18" charset="0"/>
+                                </a:rPr>
+                              </m:ctrlPr>
+                            </m:accPr>
+                            <m:e>
+                              <m:r>
+                                <a:rPr lang="en-US" i="1">
+                                  <a:latin typeface="Cambria Math" panose="02040503050406030204" pitchFamily="18" charset="0"/>
+                                </a:rPr>
+                                <m:t>𝐾</m:t>
+                              </m:r>
+                            </m:e>
+                          </m:acc>
+                        </m:e>
+                        <m:sub>
+                          <m:r>
+                            <a:rPr lang="en-US" i="1">
+                              <a:latin typeface="Cambria Math" panose="02040503050406030204" pitchFamily="18" charset="0"/>
+                            </a:rPr>
+                            <m:t>𝑖𝑗</m:t>
+                          </m:r>
+                        </m:sub>
+                      </m:sSub>
+                      <m:sSup>
+                        <m:sSupPr>
+                          <m:ctrlPr>
+                            <a:rPr lang="en-US" i="1">
+                              <a:latin typeface="Cambria Math" panose="02040503050406030204" pitchFamily="18" charset="0"/>
+                            </a:rPr>
+                          </m:ctrlPr>
+                        </m:sSupPr>
+                        <m:e>
+                          <m:acc>
+                            <m:accPr>
+                              <m:chr m:val="̅"/>
+                              <m:ctrlPr>
+                                <a:rPr lang="en-US" i="1">
+                                  <a:latin typeface="Cambria Math" panose="02040503050406030204" pitchFamily="18" charset="0"/>
+                                </a:rPr>
+                              </m:ctrlPr>
+                            </m:accPr>
+                            <m:e>
+                              <m:r>
+                                <a:rPr lang="en-US" i="1">
+                                  <a:latin typeface="Cambria Math" panose="02040503050406030204" pitchFamily="18" charset="0"/>
+                                </a:rPr>
+                                <m:t>𝐾</m:t>
+                              </m:r>
+                            </m:e>
+                          </m:acc>
+                        </m:e>
+                        <m:sup>
+                          <m:r>
+                            <a:rPr lang="en-US" i="1">
+                              <a:latin typeface="Cambria Math" panose="02040503050406030204" pitchFamily="18" charset="0"/>
+                            </a:rPr>
+                            <m:t>𝑖𝑗</m:t>
+                          </m:r>
+                        </m:sup>
+                      </m:sSup>
+                      <m:r>
+                        <a:rPr lang="en-US" i="1">
+                          <a:latin typeface="Cambria Math" panose="02040503050406030204" pitchFamily="18" charset="0"/>
+                        </a:rPr>
+                        <m:t>=0</m:t>
+                      </m:r>
+                    </m:oMath>
+                  </m:oMathPara>
+                </a14:m>
+                <a:endParaRPr lang="en-US" dirty="0"/>
+              </a:p>
+              <a:p>
+                <a:pPr marL="0" indent="0">
+                  <a:buNone/>
+                </a:pPr>
+                <a:endParaRPr lang="en-GB" dirty="0"/>
+              </a:p>
+            </p:txBody>
+          </p:sp>
+        </mc:Choice>
+        <mc:Fallback xmlns="">
+          <p:sp>
+            <p:nvSpPr>
+              <p:cNvPr id="3" name="Content Placeholder 2">
+                <a:extLst>
+                  <a:ext uri="{FF2B5EF4-FFF2-40B4-BE49-F238E27FC236}">
+                    <a16:creationId xmlns:a16="http://schemas.microsoft.com/office/drawing/2014/main" id="{5A2CEAFD-F254-5C1B-1AAA-AE42879A6ABB}"/>
+                  </a:ext>
+                </a:extLst>
+              </p:cNvPr>
+              <p:cNvSpPr>
+                <a:spLocks noGrp="1" noRot="1" noChangeAspect="1" noMove="1" noResize="1" noEditPoints="1" noAdjustHandles="1" noChangeArrowheads="1" noChangeShapeType="1" noTextEdit="1"/>
+              </p:cNvSpPr>
+              <p:nvPr>
+                <p:ph idx="1"/>
+              </p:nvPr>
+            </p:nvSpPr>
+            <p:spPr>
+              <a:blipFill>
+                <a:blip r:embed="rId2"/>
+                <a:stretch>
+                  <a:fillRect l="-1217" t="-2381"/>
+                </a:stretch>
+              </a:blipFill>
+            </p:spPr>
+            <p:txBody>
+              <a:bodyPr/>
+              <a:lstStyle/>
+              <a:p>
+                <a:r>
+                  <a:rPr lang="en-GB">
+                    <a:noFill/>
+                  </a:rPr>
+                  <a:t> </a:t>
+                </a:r>
+              </a:p>
+            </p:txBody>
+          </p:sp>
+        </mc:Fallback>
+      </mc:AlternateContent>
+    </p:spTree>
+    <p:extLst>
+      <p:ext uri="{BB962C8B-B14F-4D97-AF65-F5344CB8AC3E}">
+        <p14:creationId xmlns:p14="http://schemas.microsoft.com/office/powerpoint/2010/main" val="870757209"/>
+      </p:ext>
+    </p:extLst>
+  </p:cSld>
+  <p:clrMapOvr>
+    <a:masterClrMapping/>
+  </p:clrMapOvr>
+  <p:timing>
+    <p:tnLst>
+      <p:par>
+        <p:cTn id="1" dur="indefinite" restart="never" nodeType="tmRoot">
+          <p:childTnLst>
+            <p:seq concurrent="1" nextAc="seek">
+              <p:cTn id="2" dur="indefinite" nodeType="mainSeq">
+                <p:childTnLst>
+                  <p:par>
+                    <p:cTn id="3" fill="hold">
+                      <p:stCondLst>
+                        <p:cond delay="indefinite"/>
+                        <p:cond evt="onBegin" delay="0">
+                          <p:tn val="2"/>
+                        </p:cond>
+                      </p:stCondLst>
+                      <p:childTnLst>
+                        <p:par>
+                          <p:cTn id="4" fill="hold">
+                            <p:stCondLst>
+                              <p:cond delay="0"/>
+                            </p:stCondLst>
+                            <p:childTnLst>
+                              <p:par>
+                                <p:cTn id="5" presetID="1" presetClass="entr" presetSubtype="0" fill="hold" grpId="0" nodeType="withEffect">
+                                  <p:stCondLst>
+                                    <p:cond delay="0"/>
+                                  </p:stCondLst>
+                                  <p:childTnLst>
+                                    <p:set>
+                                      <p:cBhvr>
+                                        <p:cTn id="6" dur="1" fill="hold">
+                                          <p:stCondLst>
+                                            <p:cond delay="0"/>
+                                          </p:stCondLst>
+                                        </p:cTn>
+                                        <p:tgtEl>
+                                          <p:spTgt spid="3">
+                                            <p:txEl>
+                                              <p:pRg st="0" end="0"/>
+                                            </p:txEl>
+                                          </p:spTgt>
+                                        </p:tgtEl>
+                                        <p:attrNameLst>
+                                          <p:attrName>style.visibility</p:attrName>
+                                        </p:attrNameLst>
+                                      </p:cBhvr>
+                                      <p:to>
+                                        <p:strVal val="visible"/>
+                                      </p:to>
+                                    </p:set>
+                                  </p:childTnLst>
+                                </p:cTn>
+                              </p:par>
+                              <p:par>
+                                <p:cTn id="7" presetID="1" presetClass="entr" presetSubtype="0" fill="hold" grpId="0" nodeType="withEffect">
+                                  <p:stCondLst>
+                                    <p:cond delay="0"/>
+                                  </p:stCondLst>
+                                  <p:childTnLst>
+                                    <p:set>
+                                      <p:cBhvr>
+                                        <p:cTn id="8" dur="1" fill="hold">
+                                          <p:stCondLst>
+                                            <p:cond delay="0"/>
+                                          </p:stCondLst>
+                                        </p:cTn>
+                                        <p:tgtEl>
+                                          <p:spTgt spid="3">
+                                            <p:txEl>
+                                              <p:pRg st="2" end="2"/>
+                                            </p:txEl>
+                                          </p:spTgt>
+                                        </p:tgtEl>
+                                        <p:attrNameLst>
+                                          <p:attrName>style.visibility</p:attrName>
+                                        </p:attrNameLst>
+                                      </p:cBhvr>
+                                      <p:to>
+                                        <p:strVal val="visible"/>
+                                      </p:to>
+                                    </p:set>
+                                  </p:childTnLst>
+                                </p:cTn>
+                              </p:par>
+                            </p:childTnLst>
+                          </p:cTn>
+                        </p:par>
+                      </p:childTnLst>
+                    </p:cTn>
+                  </p:par>
+                  <p:par>
+                    <p:cTn id="9" fill="hold">
+                      <p:stCondLst>
+                        <p:cond delay="indefinite"/>
+                      </p:stCondLst>
+                      <p:childTnLst>
+                        <p:par>
+                          <p:cTn id="10" fill="hold">
+                            <p:stCondLst>
+                              <p:cond delay="0"/>
+                            </p:stCondLst>
+                            <p:childTnLst>
+                              <p:par>
+                                <p:cTn id="11" presetID="1" presetClass="entr" presetSubtype="0" fill="hold" grpId="0" nodeType="clickEffect">
+                                  <p:stCondLst>
+                                    <p:cond delay="0"/>
+                                  </p:stCondLst>
+                                  <p:childTnLst>
+                                    <p:set>
+                                      <p:cBhvr>
+                                        <p:cTn id="12" dur="1" fill="hold">
+                                          <p:stCondLst>
+                                            <p:cond delay="0"/>
+                                          </p:stCondLst>
+                                        </p:cTn>
+                                        <p:tgtEl>
+                                          <p:spTgt spid="3">
+                                            <p:txEl>
+                                              <p:pRg st="4" end="4"/>
+                                            </p:txEl>
+                                          </p:spTgt>
+                                        </p:tgtEl>
+                                        <p:attrNameLst>
+                                          <p:attrName>style.visibility</p:attrName>
+                                        </p:attrNameLst>
+                                      </p:cBhvr>
+                                      <p:to>
+                                        <p:strVal val="visible"/>
+                                      </p:to>
+                                    </p:set>
+                                  </p:childTnLst>
+                                </p:cTn>
+                              </p:par>
+                              <p:par>
+                                <p:cTn id="13" presetID="1" presetClass="entr" presetSubtype="0" fill="hold" grpId="0" nodeType="withEffect">
+                                  <p:stCondLst>
+                                    <p:cond delay="0"/>
+                                  </p:stCondLst>
+                                  <p:childTnLst>
+                                    <p:set>
+                                      <p:cBhvr>
+                                        <p:cTn id="14" dur="1" fill="hold">
+                                          <p:stCondLst>
+                                            <p:cond delay="0"/>
+                                          </p:stCondLst>
+                                        </p:cTn>
+                                        <p:tgtEl>
+                                          <p:spTgt spid="3">
+                                            <p:txEl>
+                                              <p:pRg st="6" end="6"/>
+                                            </p:txEl>
+                                          </p:spTgt>
+                                        </p:tgtEl>
+                                        <p:attrNameLst>
+                                          <p:attrName>style.visibility</p:attrName>
+                                        </p:attrNameLst>
+                                      </p:cBhvr>
+                                      <p:to>
+                                        <p:strVal val="visible"/>
+                                      </p:to>
+                                    </p:set>
+                                  </p:childTnLst>
+                                </p:cTn>
+                              </p:par>
+                            </p:childTnLst>
+                          </p:cTn>
+                        </p:par>
+                      </p:childTnLst>
+                    </p:cTn>
+                  </p:par>
+                </p:childTnLst>
+              </p:cTn>
+              <p:prevCondLst>
+                <p:cond evt="onPrev" delay="0">
+                  <p:tgtEl>
+                    <p:sldTgt/>
+                  </p:tgtEl>
+                </p:cond>
+              </p:prevCondLst>
+              <p:nextCondLst>
+                <p:cond evt="onNext" delay="0">
+                  <p:tgtEl>
+                    <p:sldTgt/>
+                  </p:tgtEl>
+                </p:cond>
+              </p:nextCondLst>
+            </p:seq>
+          </p:childTnLst>
+        </p:cTn>
+      </p:par>
+    </p:tnLst>
+    <p:bldLst>
+      <p:bldP spid="3" grpId="0" uiExpand="1" build="p"/>
+    </p:bldLst>
+  </p:timing>
+</p:sld>
+</file>
+
+<file path=ppt/slides/slide3.xml><?xml version="1.0" encoding="utf-8"?>
+<p:sld xmlns:a="http://schemas.openxmlformats.org/drawingml/2006/main" xmlns:r="http://schemas.openxmlformats.org/officeDocument/2006/relationships" xmlns:p="http://schemas.openxmlformats.org/presentationml/2006/main">
+  <p:cSld>
+    <p:bg>
+      <p:bgPr>
+        <a:solidFill>
+          <a:schemeClr val="bg1"/>
+        </a:solidFill>
+        <a:effectLst/>
+      </p:bgPr>
+    </p:bg>
+    <p:spTree>
+      <p:nvGrpSpPr>
+        <p:cNvPr id="1" name=""/>
+        <p:cNvGrpSpPr/>
+        <p:nvPr/>
+      </p:nvGrpSpPr>
+      <p:grpSpPr>
+        <a:xfrm>
+          <a:off x="0" y="0"/>
+          <a:ext cx="0" cy="0"/>
+          <a:chOff x="0" y="0"/>
+          <a:chExt cx="0" cy="0"/>
+        </a:xfrm>
+      </p:grpSpPr>
+      <p:pic>
+        <p:nvPicPr>
+          <p:cNvPr id="3" name="Picture Placeholder 5">
+            <a:extLst>
+              <a:ext uri="{FF2B5EF4-FFF2-40B4-BE49-F238E27FC236}">
+                <a16:creationId xmlns:a16="http://schemas.microsoft.com/office/drawing/2014/main" id="{554EE638-E6B3-7C24-69CB-6B85927E05C3}"/>
+              </a:ext>
+            </a:extLst>
+          </p:cNvPr>
+          <p:cNvPicPr>
+            <a:picLocks noChangeAspect="1"/>
+          </p:cNvPicPr>
+          <p:nvPr/>
+        </p:nvPicPr>
+        <p:blipFill>
+          <a:blip r:embed="rId2"/>
+          <a:srcRect r="4420" b="-1"/>
+          <a:stretch>
+            <a:fillRect/>
+          </a:stretch>
+        </p:blipFill>
+        <p:spPr>
+          <a:xfrm>
+            <a:off x="3497109" y="82414"/>
+            <a:ext cx="5197781" cy="6693172"/>
+          </a:xfrm>
+          <a:prstGeom prst="rect">
+            <a:avLst/>
+          </a:prstGeom>
+        </p:spPr>
+      </p:pic>
+    </p:spTree>
+    <p:extLst>
+      <p:ext uri="{BB962C8B-B14F-4D97-AF65-F5344CB8AC3E}">
+        <p14:creationId xmlns:p14="http://schemas.microsoft.com/office/powerpoint/2010/main" val="3736582521"/>
+      </p:ext>
+    </p:extLst>
+  </p:cSld>
+  <p:clrMapOvr>
+    <a:masterClrMapping/>
+  </p:clrMapOvr>
+</p:sld>
+</file>
+
+<file path=ppt/slides/slide4.xml><?xml version="1.0" encoding="utf-8"?>
+<p:sld xmlns:a="http://schemas.openxmlformats.org/drawingml/2006/main" xmlns:r="http://schemas.openxmlformats.org/officeDocument/2006/relationships" xmlns:p="http://schemas.openxmlformats.org/presentationml/2006/main">
+  <p:cSld>
+    <p:spTree>
+      <p:nvGrpSpPr>
+        <p:cNvPr id="1" name=""/>
+        <p:cNvGrpSpPr/>
+        <p:nvPr/>
+      </p:nvGrpSpPr>
+      <p:grpSpPr>
+        <a:xfrm>
+          <a:off x="0" y="0"/>
+          <a:ext cx="0" cy="0"/>
+          <a:chOff x="0" y="0"/>
+          <a:chExt cx="0" cy="0"/>
+        </a:xfrm>
+      </p:grpSpPr>
+      <p:sp>
+        <p:nvSpPr>
+          <p:cNvPr id="2" name="Title 1">
+            <a:extLst>
+              <a:ext uri="{FF2B5EF4-FFF2-40B4-BE49-F238E27FC236}">
+                <a16:creationId xmlns:a16="http://schemas.microsoft.com/office/drawing/2014/main" id="{3689913C-495F-FBE7-3118-4FD44431BDDE}"/>
+              </a:ext>
+            </a:extLst>
+          </p:cNvPr>
+          <p:cNvSpPr>
+            <a:spLocks noGrp="1"/>
+          </p:cNvSpPr>
+          <p:nvPr>
+            <p:ph type="title"/>
+          </p:nvPr>
+        </p:nvSpPr>
+        <p:spPr/>
+        <p:txBody>
+          <a:bodyPr/>
+          <a:lstStyle/>
+          <a:p>
+            <a:r>
+              <a:rPr lang="en-GB" dirty="0"/>
+              <a:t>Loss function</a:t>
+            </a:r>
+          </a:p>
+        </p:txBody>
+      </p:sp>
+      <mc:AlternateContent xmlns:mc="http://schemas.openxmlformats.org/markup-compatibility/2006" xmlns:a14="http://schemas.microsoft.com/office/drawing/2010/main">
+        <mc:Choice Requires="a14">
+          <p:sp>
+            <p:nvSpPr>
+              <p:cNvPr id="3" name="Content Placeholder 2">
+                <a:extLst>
+                  <a:ext uri="{FF2B5EF4-FFF2-40B4-BE49-F238E27FC236}">
+                    <a16:creationId xmlns:a16="http://schemas.microsoft.com/office/drawing/2014/main" id="{06105865-72B0-7026-5848-AD934C2A4FCA}"/>
+                  </a:ext>
+                </a:extLst>
+              </p:cNvPr>
+              <p:cNvSpPr>
+                <a:spLocks noGrp="1"/>
+              </p:cNvSpPr>
+              <p:nvPr>
+                <p:ph idx="1"/>
+              </p:nvPr>
+            </p:nvSpPr>
+            <p:spPr/>
+            <p:txBody>
+              <a:bodyPr>
+                <a:normAutofit/>
+              </a:bodyPr>
+              <a:lstStyle/>
+              <a:p>
+                <a:pPr marL="0" indent="0">
+                  <a:buNone/>
+                </a:pPr>
+                <a:endParaRPr lang="en-US" b="0" i="1" dirty="0">
+                  <a:latin typeface="Cambria Math" panose="02040503050406030204" pitchFamily="18" charset="0"/>
+                </a:endParaRPr>
+              </a:p>
+              <a:p>
+                <a:pPr marL="0" indent="0">
+                  <a:buNone/>
+                </a:pPr>
+                <a14:m>
+                  <m:oMathPara xmlns:m="http://schemas.openxmlformats.org/officeDocument/2006/math">
+                    <m:oMathParaPr>
+                      <m:jc m:val="centerGroup"/>
+                    </m:oMathParaPr>
+                    <m:oMath xmlns:m="http://schemas.openxmlformats.org/officeDocument/2006/math">
+                      <m:r>
+                        <a:rPr lang="en-US" b="0" i="1" smtClean="0">
+                          <a:latin typeface="Cambria Math" panose="02040503050406030204" pitchFamily="18" charset="0"/>
+                        </a:rPr>
+                        <m:t>ℒ</m:t>
+                      </m:r>
+                      <m:r>
+                        <a:rPr lang="en-US" b="0" i="1" smtClean="0">
+                          <a:latin typeface="Cambria Math" panose="02040503050406030204" pitchFamily="18" charset="0"/>
+                        </a:rPr>
+                        <m:t>=</m:t>
+                      </m:r>
+                      <m:sSub>
+                        <m:sSubPr>
+                          <m:ctrlPr>
+                            <a:rPr lang="en-US" b="0" i="1" smtClean="0">
+                              <a:latin typeface="Cambria Math" panose="02040503050406030204" pitchFamily="18" charset="0"/>
+                            </a:rPr>
+                          </m:ctrlPr>
+                        </m:sSubPr>
+                        <m:e>
+                          <m:r>
+                            <a:rPr lang="en-US" b="0" i="1" smtClean="0">
+                              <a:latin typeface="Cambria Math" panose="02040503050406030204" pitchFamily="18" charset="0"/>
+                            </a:rPr>
+                            <m:t>𝑤</m:t>
+                          </m:r>
+                        </m:e>
+                        <m:sub>
+                          <m:r>
+                            <a:rPr lang="en-US" b="0" i="1" smtClean="0">
+                              <a:latin typeface="Cambria Math" panose="02040503050406030204" pitchFamily="18" charset="0"/>
+                            </a:rPr>
+                            <m:t>2</m:t>
+                          </m:r>
+                        </m:sub>
+                      </m:sSub>
+                      <m:sSub>
+                        <m:sSubPr>
+                          <m:ctrlPr>
+                            <a:rPr lang="en-US" b="0" i="1" smtClean="0">
+                              <a:latin typeface="Cambria Math" panose="02040503050406030204" pitchFamily="18" charset="0"/>
+                            </a:rPr>
+                          </m:ctrlPr>
+                        </m:sSubPr>
+                        <m:e>
+                          <m:r>
+                            <a:rPr lang="en-US" b="0" i="1" smtClean="0">
+                              <a:latin typeface="Cambria Math" panose="02040503050406030204" pitchFamily="18" charset="0"/>
+                            </a:rPr>
+                            <m:t>𝐿</m:t>
+                          </m:r>
+                        </m:e>
+                        <m:sub>
+                          <m:r>
+                            <a:rPr lang="en-US" b="0" i="1" smtClean="0">
+                              <a:latin typeface="Cambria Math" panose="02040503050406030204" pitchFamily="18" charset="0"/>
+                            </a:rPr>
+                            <m:t>2</m:t>
+                          </m:r>
+                        </m:sub>
+                      </m:sSub>
+                      <m:r>
+                        <a:rPr lang="en-US" b="0" i="1" smtClean="0">
+                          <a:latin typeface="Cambria Math" panose="02040503050406030204" pitchFamily="18" charset="0"/>
+                        </a:rPr>
+                        <m:t>+</m:t>
+                      </m:r>
+                      <m:sSub>
+                        <m:sSubPr>
+                          <m:ctrlPr>
+                            <a:rPr lang="en-US" b="0" i="1" smtClean="0">
+                              <a:latin typeface="Cambria Math" panose="02040503050406030204" pitchFamily="18" charset="0"/>
+                            </a:rPr>
+                          </m:ctrlPr>
+                        </m:sSubPr>
+                        <m:e>
+                          <m:r>
+                            <a:rPr lang="en-US" b="0" i="1" smtClean="0">
+                              <a:latin typeface="Cambria Math" panose="02040503050406030204" pitchFamily="18" charset="0"/>
+                            </a:rPr>
+                            <m:t>𝑤</m:t>
+                          </m:r>
+                        </m:e>
+                        <m:sub>
+                          <m:r>
+                            <a:rPr lang="en-US" b="0" i="1" smtClean="0">
+                              <a:latin typeface="Cambria Math" panose="02040503050406030204" pitchFamily="18" charset="0"/>
+                            </a:rPr>
+                            <m:t>∞</m:t>
+                          </m:r>
+                        </m:sub>
+                      </m:sSub>
+                      <m:r>
+                        <m:rPr>
+                          <m:nor/>
+                        </m:rPr>
+                        <a:rPr lang="en-US" b="0" i="0" smtClean="0">
+                          <a:latin typeface="Cambria Math" panose="02040503050406030204" pitchFamily="18" charset="0"/>
+                        </a:rPr>
+                        <m:t>soft</m:t>
+                      </m:r>
+                      <m:r>
+                        <a:rPr lang="en-US" b="0" i="1" smtClean="0">
+                          <a:latin typeface="Cambria Math" panose="02040503050406030204" pitchFamily="18" charset="0"/>
+                        </a:rPr>
+                        <m:t>−</m:t>
+                      </m:r>
+                      <m:sSub>
+                        <m:sSubPr>
+                          <m:ctrlPr>
+                            <a:rPr lang="en-US" b="0" i="1" smtClean="0">
+                              <a:latin typeface="Cambria Math" panose="02040503050406030204" pitchFamily="18" charset="0"/>
+                            </a:rPr>
+                          </m:ctrlPr>
+                        </m:sSubPr>
+                        <m:e>
+                          <m:r>
+                            <a:rPr lang="en-US" b="0" i="1" smtClean="0">
+                              <a:latin typeface="Cambria Math" panose="02040503050406030204" pitchFamily="18" charset="0"/>
+                            </a:rPr>
+                            <m:t>𝐿</m:t>
+                          </m:r>
+                        </m:e>
+                        <m:sub>
+                          <m:r>
+                            <a:rPr lang="en-US" b="0" i="1" smtClean="0">
+                              <a:latin typeface="Cambria Math" panose="02040503050406030204" pitchFamily="18" charset="0"/>
+                            </a:rPr>
+                            <m:t>∞</m:t>
+                          </m:r>
+                        </m:sub>
+                      </m:sSub>
+                      <m:r>
+                        <a:rPr lang="en-US" b="0" i="1" smtClean="0">
+                          <a:latin typeface="Cambria Math" panose="02040503050406030204" pitchFamily="18" charset="0"/>
+                        </a:rPr>
+                        <m:t>+</m:t>
+                      </m:r>
+                      <m:sSub>
+                        <m:sSubPr>
+                          <m:ctrlPr>
+                            <a:rPr lang="en-US" b="0" i="1" smtClean="0">
+                              <a:latin typeface="Cambria Math" panose="02040503050406030204" pitchFamily="18" charset="0"/>
+                            </a:rPr>
+                          </m:ctrlPr>
+                        </m:sSubPr>
+                        <m:e>
+                          <m:r>
+                            <a:rPr lang="en-US" b="0" i="1" smtClean="0">
+                              <a:latin typeface="Cambria Math" panose="02040503050406030204" pitchFamily="18" charset="0"/>
+                            </a:rPr>
+                            <m:t>𝑤</m:t>
+                          </m:r>
+                        </m:e>
+                        <m:sub>
+                          <m:r>
+                            <a:rPr lang="en-US" b="0" i="1" smtClean="0">
+                              <a:latin typeface="Cambria Math" panose="02040503050406030204" pitchFamily="18" charset="0"/>
+                            </a:rPr>
+                            <m:t>𝑟𝑜𝑏</m:t>
+                          </m:r>
+                        </m:sub>
+                      </m:sSub>
+                      <m:sSub>
+                        <m:sSubPr>
+                          <m:ctrlPr>
+                            <a:rPr lang="en-US" b="0" i="1" smtClean="0">
+                              <a:latin typeface="Cambria Math" panose="02040503050406030204" pitchFamily="18" charset="0"/>
+                            </a:rPr>
+                          </m:ctrlPr>
+                        </m:sSubPr>
+                        <m:e>
+                          <m:r>
+                            <a:rPr lang="en-US" b="0" i="1" smtClean="0">
+                              <a:latin typeface="Cambria Math" panose="02040503050406030204" pitchFamily="18" charset="0"/>
+                            </a:rPr>
+                            <m:t>ℒ</m:t>
+                          </m:r>
+                        </m:e>
+                        <m:sub>
+                          <m:r>
+                            <a:rPr lang="en-US" b="0" i="1" smtClean="0">
+                              <a:latin typeface="Cambria Math" panose="02040503050406030204" pitchFamily="18" charset="0"/>
+                            </a:rPr>
+                            <m:t>𝐵𝐶</m:t>
+                          </m:r>
+                        </m:sub>
+                      </m:sSub>
+                    </m:oMath>
+                  </m:oMathPara>
+                </a14:m>
+                <a:endParaRPr lang="en-US" b="0" dirty="0"/>
+              </a:p>
+              <a:p>
+                <a:pPr marL="0" indent="0">
+                  <a:buNone/>
+                </a:pPr>
+                <a:endParaRPr lang="en-GB" dirty="0"/>
+              </a:p>
+              <a:p>
+                <a:pPr marL="0" indent="0">
+                  <a:buNone/>
+                </a:pPr>
+                <a14:m>
+                  <m:oMathPara xmlns:m="http://schemas.openxmlformats.org/officeDocument/2006/math">
+                    <m:oMathParaPr>
+                      <m:jc m:val="left"/>
+                    </m:oMathParaPr>
+                    <m:oMath xmlns:m="http://schemas.openxmlformats.org/officeDocument/2006/math">
+                      <m:sSub>
+                        <m:sSubPr>
+                          <m:ctrlPr>
+                            <a:rPr lang="en-US" b="0" i="1" smtClean="0">
+                              <a:latin typeface="Cambria Math" panose="02040503050406030204" pitchFamily="18" charset="0"/>
+                            </a:rPr>
+                          </m:ctrlPr>
+                        </m:sSubPr>
+                        <m:e>
+                          <m:r>
+                            <a:rPr lang="en-US" b="0" i="1" smtClean="0">
+                              <a:latin typeface="Cambria Math" panose="02040503050406030204" pitchFamily="18" charset="0"/>
+                            </a:rPr>
+                            <m:t>𝐿</m:t>
+                          </m:r>
+                        </m:e>
+                        <m:sub>
+                          <m:r>
+                            <a:rPr lang="en-US" b="0" i="1" smtClean="0">
+                              <a:latin typeface="Cambria Math" panose="02040503050406030204" pitchFamily="18" charset="0"/>
+                            </a:rPr>
+                            <m:t>2</m:t>
+                          </m:r>
+                        </m:sub>
+                      </m:sSub>
+                      <m:r>
+                        <a:rPr lang="en-US" b="0" i="1" smtClean="0">
+                          <a:latin typeface="Cambria Math" panose="02040503050406030204" pitchFamily="18" charset="0"/>
+                        </a:rPr>
+                        <m:t>∼</m:t>
+                      </m:r>
+                      <m:sSup>
+                        <m:sSupPr>
+                          <m:ctrlPr>
+                            <a:rPr lang="en-US" b="0" i="1" smtClean="0">
+                              <a:latin typeface="Cambria Math" panose="02040503050406030204" pitchFamily="18" charset="0"/>
+                            </a:rPr>
+                          </m:ctrlPr>
+                        </m:sSupPr>
+                        <m:e>
+                          <m:r>
+                            <a:rPr lang="en-US" b="0" i="1" smtClean="0">
+                              <a:latin typeface="Cambria Math" panose="02040503050406030204" pitchFamily="18" charset="0"/>
+                            </a:rPr>
+                            <m:t>10</m:t>
+                          </m:r>
+                        </m:e>
+                        <m:sup>
+                          <m:r>
+                            <a:rPr lang="en-US" b="0" i="1" smtClean="0">
+                              <a:latin typeface="Cambria Math" panose="02040503050406030204" pitchFamily="18" charset="0"/>
+                            </a:rPr>
+                            <m:t>−8</m:t>
+                          </m:r>
+                        </m:sup>
+                      </m:sSup>
+                      <m:r>
+                        <a:rPr lang="en-US" b="0" i="1" smtClean="0">
+                          <a:latin typeface="Cambria Math" panose="02040503050406030204" pitchFamily="18" charset="0"/>
+                        </a:rPr>
+                        <m:t>−</m:t>
+                      </m:r>
+                      <m:sSup>
+                        <m:sSupPr>
+                          <m:ctrlPr>
+                            <a:rPr lang="en-US" b="0" i="1" smtClean="0">
+                              <a:latin typeface="Cambria Math" panose="02040503050406030204" pitchFamily="18" charset="0"/>
+                            </a:rPr>
+                          </m:ctrlPr>
+                        </m:sSupPr>
+                        <m:e>
+                          <m:r>
+                            <a:rPr lang="en-US" b="0" i="1" smtClean="0">
+                              <a:latin typeface="Cambria Math" panose="02040503050406030204" pitchFamily="18" charset="0"/>
+                            </a:rPr>
+                            <m:t>10</m:t>
+                          </m:r>
+                        </m:e>
+                        <m:sup>
+                          <m:r>
+                            <a:rPr lang="en-US" b="0" i="1" smtClean="0">
+                              <a:latin typeface="Cambria Math" panose="02040503050406030204" pitchFamily="18" charset="0"/>
+                            </a:rPr>
+                            <m:t>−11</m:t>
+                          </m:r>
+                        </m:sup>
+                      </m:sSup>
+                    </m:oMath>
+                  </m:oMathPara>
+                </a14:m>
+                <a:endParaRPr lang="en-US" b="0" dirty="0"/>
+              </a:p>
+              <a:p>
+                <a:pPr marL="0" indent="0">
+                  <a:buNone/>
+                </a:pPr>
+                <a:endParaRPr lang="en-US" dirty="0"/>
+              </a:p>
+              <a:p>
+                <a:pPr marL="0" indent="0">
+                  <a:buNone/>
+                </a:pPr>
+                <a:r>
+                  <a:rPr lang="en-US" b="0" dirty="0"/>
+                  <a:t>soft-</a:t>
+                </a:r>
+                <a14:m>
+                  <m:oMath xmlns:m="http://schemas.openxmlformats.org/officeDocument/2006/math">
+                    <m:sSub>
+                      <m:sSubPr>
+                        <m:ctrlPr>
+                          <a:rPr lang="en-US" b="0" i="1" smtClean="0">
+                            <a:latin typeface="Cambria Math" panose="02040503050406030204" pitchFamily="18" charset="0"/>
+                          </a:rPr>
+                        </m:ctrlPr>
+                      </m:sSubPr>
+                      <m:e>
+                        <m:r>
+                          <a:rPr lang="en-US" b="0" i="1" smtClean="0">
+                            <a:latin typeface="Cambria Math" panose="02040503050406030204" pitchFamily="18" charset="0"/>
+                          </a:rPr>
+                          <m:t>𝐿</m:t>
+                        </m:r>
+                      </m:e>
+                      <m:sub>
+                        <m:r>
+                          <a:rPr lang="en-US" b="0" i="1" smtClean="0">
+                            <a:latin typeface="Cambria Math" panose="02040503050406030204" pitchFamily="18" charset="0"/>
+                          </a:rPr>
+                          <m:t>∞</m:t>
+                        </m:r>
+                      </m:sub>
+                    </m:sSub>
+                    <m:r>
+                      <a:rPr lang="en-US" b="0" i="1" smtClean="0">
+                        <a:latin typeface="Cambria Math" panose="02040503050406030204" pitchFamily="18" charset="0"/>
+                      </a:rPr>
+                      <m:t>∼</m:t>
+                    </m:r>
+                    <m:sSup>
+                      <m:sSupPr>
+                        <m:ctrlPr>
+                          <a:rPr lang="en-US" b="0" i="1" smtClean="0">
+                            <a:latin typeface="Cambria Math" panose="02040503050406030204" pitchFamily="18" charset="0"/>
+                          </a:rPr>
+                        </m:ctrlPr>
+                      </m:sSupPr>
+                      <m:e>
+                        <m:r>
+                          <a:rPr lang="en-US" b="0" i="1" smtClean="0">
+                            <a:latin typeface="Cambria Math" panose="02040503050406030204" pitchFamily="18" charset="0"/>
+                          </a:rPr>
+                          <m:t>10</m:t>
+                        </m:r>
+                      </m:e>
+                      <m:sup>
+                        <m:r>
+                          <a:rPr lang="en-US" b="0" i="1" smtClean="0">
+                            <a:latin typeface="Cambria Math" panose="02040503050406030204" pitchFamily="18" charset="0"/>
+                          </a:rPr>
+                          <m:t>−5</m:t>
+                        </m:r>
+                      </m:sup>
+                    </m:sSup>
+                  </m:oMath>
+                </a14:m>
+                <a:endParaRPr lang="en-US" b="0" dirty="0"/>
+              </a:p>
+              <a:p>
+                <a:pPr marL="0" indent="0">
+                  <a:buNone/>
+                </a:pPr>
+                <a:endParaRPr lang="en-US" dirty="0"/>
+              </a:p>
+              <a:p>
+                <a:pPr marL="0" indent="0">
+                  <a:buNone/>
+                </a:pPr>
+                <a14:m>
+                  <m:oMathPara xmlns:m="http://schemas.openxmlformats.org/officeDocument/2006/math">
+                    <m:oMathParaPr>
+                      <m:jc m:val="left"/>
+                    </m:oMathParaPr>
+                    <m:oMath xmlns:m="http://schemas.openxmlformats.org/officeDocument/2006/math">
+                      <m:sSub>
+                        <m:sSubPr>
+                          <m:ctrlPr>
+                            <a:rPr lang="en-US" b="0" i="1" smtClean="0">
+                              <a:latin typeface="Cambria Math" panose="02040503050406030204" pitchFamily="18" charset="0"/>
+                            </a:rPr>
+                          </m:ctrlPr>
+                        </m:sSubPr>
+                        <m:e>
+                          <m:r>
+                            <a:rPr lang="en-US" b="0" i="1" smtClean="0">
+                              <a:latin typeface="Cambria Math" panose="02040503050406030204" pitchFamily="18" charset="0"/>
+                            </a:rPr>
+                            <m:t>ℒ</m:t>
+                          </m:r>
+                        </m:e>
+                        <m:sub>
+                          <m:r>
+                            <a:rPr lang="en-US" b="0" i="1" smtClean="0">
+                              <a:latin typeface="Cambria Math" panose="02040503050406030204" pitchFamily="18" charset="0"/>
+                            </a:rPr>
+                            <m:t>𝐵𝐶</m:t>
+                          </m:r>
+                        </m:sub>
+                      </m:sSub>
+                      <m:r>
+                        <a:rPr lang="en-US" b="0" i="1" smtClean="0">
+                          <a:latin typeface="Cambria Math" panose="02040503050406030204" pitchFamily="18" charset="0"/>
+                        </a:rPr>
+                        <m:t>∼</m:t>
+                      </m:r>
+                      <m:sSup>
+                        <m:sSupPr>
+                          <m:ctrlPr>
+                            <a:rPr lang="en-US" b="0" i="1" smtClean="0">
+                              <a:latin typeface="Cambria Math" panose="02040503050406030204" pitchFamily="18" charset="0"/>
+                            </a:rPr>
+                          </m:ctrlPr>
+                        </m:sSupPr>
+                        <m:e>
+                          <m:r>
+                            <a:rPr lang="en-US" b="0" i="1" smtClean="0">
+                              <a:latin typeface="Cambria Math" panose="02040503050406030204" pitchFamily="18" charset="0"/>
+                            </a:rPr>
+                            <m:t>10</m:t>
+                          </m:r>
+                        </m:e>
+                        <m:sup>
+                          <m:r>
+                            <a:rPr lang="en-US" b="0" i="1" smtClean="0">
+                              <a:latin typeface="Cambria Math" panose="02040503050406030204" pitchFamily="18" charset="0"/>
+                            </a:rPr>
+                            <m:t>−12</m:t>
+                          </m:r>
+                        </m:sup>
+                      </m:sSup>
+                    </m:oMath>
+                  </m:oMathPara>
+                </a14:m>
+                <a:endParaRPr lang="en-US" b="0" dirty="0"/>
+              </a:p>
+              <a:p>
+                <a:pPr marL="0" indent="0">
+                  <a:buNone/>
+                </a:pPr>
+                <a:endParaRPr lang="en-US" b="0" dirty="0"/>
+              </a:p>
+              <a:p>
+                <a:pPr marL="0" indent="0">
+                  <a:buNone/>
+                </a:pPr>
+                <a:endParaRPr lang="en-US" b="0" dirty="0"/>
+              </a:p>
+              <a:p>
+                <a:pPr marL="0" indent="0">
+                  <a:buNone/>
+                </a:pPr>
+                <a:endParaRPr lang="en-US" b="0" dirty="0"/>
+              </a:p>
+              <a:p>
+                <a:pPr marL="0" indent="0">
+                  <a:buNone/>
+                </a:pPr>
+                <a:endParaRPr lang="en-US" b="0" dirty="0"/>
+              </a:p>
+              <a:p>
+                <a:pPr marL="0" indent="0">
+                  <a:buNone/>
+                </a:pPr>
+                <a:endParaRPr lang="en-US" b="0" dirty="0"/>
+              </a:p>
+              <a:p>
+                <a:pPr marL="0" indent="0">
+                  <a:buNone/>
+                </a:pPr>
+                <a:endParaRPr lang="en-GB" dirty="0"/>
+              </a:p>
+            </p:txBody>
+          </p:sp>
+        </mc:Choice>
+        <mc:Fallback xmlns="">
+          <p:sp>
+            <p:nvSpPr>
+              <p:cNvPr id="3" name="Content Placeholder 2">
+                <a:extLst>
+                  <a:ext uri="{FF2B5EF4-FFF2-40B4-BE49-F238E27FC236}">
+                    <a16:creationId xmlns:a16="http://schemas.microsoft.com/office/drawing/2014/main" id="{06105865-72B0-7026-5848-AD934C2A4FCA}"/>
+                  </a:ext>
+                </a:extLst>
+              </p:cNvPr>
+              <p:cNvSpPr>
+                <a:spLocks noGrp="1" noRot="1" noChangeAspect="1" noMove="1" noResize="1" noEditPoints="1" noAdjustHandles="1" noChangeArrowheads="1" noChangeShapeType="1" noTextEdit="1"/>
+              </p:cNvSpPr>
+              <p:nvPr>
+                <p:ph idx="1"/>
+              </p:nvPr>
+            </p:nvSpPr>
+            <p:spPr>
+              <a:blipFill>
+                <a:blip r:embed="rId2"/>
+                <a:stretch>
+                  <a:fillRect l="-1217"/>
+                </a:stretch>
+              </a:blipFill>
+            </p:spPr>
+            <p:txBody>
+              <a:bodyPr/>
+              <a:lstStyle/>
+              <a:p>
+                <a:r>
+                  <a:rPr lang="en-GB">
+                    <a:noFill/>
+                  </a:rPr>
+                  <a:t> </a:t>
+                </a:r>
+              </a:p>
+            </p:txBody>
+          </p:sp>
+        </mc:Fallback>
+      </mc:AlternateContent>
+    </p:spTree>
+    <p:extLst>
+      <p:ext uri="{BB962C8B-B14F-4D97-AF65-F5344CB8AC3E}">
+        <p14:creationId xmlns:p14="http://schemas.microsoft.com/office/powerpoint/2010/main" val="803992300"/>
+      </p:ext>
+    </p:extLst>
+  </p:cSld>
+  <p:clrMapOvr>
+    <a:masterClrMapping/>
+  </p:clrMapOvr>
+  <p:timing>
+    <p:tnLst>
+      <p:par>
+        <p:cTn id="1" dur="indefinite" restart="never" nodeType="tmRoot">
+          <p:childTnLst>
+            <p:seq concurrent="1" nextAc="seek">
+              <p:cTn id="2" dur="indefinite" nodeType="mainSeq">
+                <p:childTnLst>
+                  <p:par>
+                    <p:cTn id="3" fill="hold">
+                      <p:stCondLst>
+                        <p:cond delay="indefinite"/>
+                      </p:stCondLst>
+                      <p:childTnLst>
+                        <p:par>
+                          <p:cTn id="4" fill="hold">
+                            <p:stCondLst>
+                              <p:cond delay="0"/>
+                            </p:stCondLst>
+                            <p:childTnLst>
+                              <p:par>
+                                <p:cTn id="5" presetID="1" presetClass="entr" presetSubtype="0" fill="hold" grpId="0" nodeType="clickEffect">
+                                  <p:stCondLst>
+                                    <p:cond delay="0"/>
+                                  </p:stCondLst>
+                                  <p:childTnLst>
+                                    <p:set>
+                                      <p:cBhvr>
+                                        <p:cTn id="6" dur="1" fill="hold">
+                                          <p:stCondLst>
+                                            <p:cond delay="0"/>
+                                          </p:stCondLst>
+                                        </p:cTn>
+                                        <p:tgtEl>
+                                          <p:spTgt spid="3">
+                                            <p:txEl>
+                                              <p:pRg st="1" end="1"/>
+                                            </p:txEl>
+                                          </p:spTgt>
+                                        </p:tgtEl>
+                                        <p:attrNameLst>
+                                          <p:attrName>style.visibility</p:attrName>
+                                        </p:attrNameLst>
+                                      </p:cBhvr>
+                                      <p:to>
+                                        <p:strVal val="visible"/>
+                                      </p:to>
+                                    </p:set>
+                                  </p:childTnLst>
+                                </p:cTn>
+                              </p:par>
+                            </p:childTnLst>
+                          </p:cTn>
+                        </p:par>
+                      </p:childTnLst>
+                    </p:cTn>
+                  </p:par>
+                  <p:par>
+                    <p:cTn id="7" fill="hold">
+                      <p:stCondLst>
+                        <p:cond delay="indefinite"/>
+                      </p:stCondLst>
+                      <p:childTnLst>
+                        <p:par>
+                          <p:cTn id="8" fill="hold">
+                            <p:stCondLst>
+                              <p:cond delay="0"/>
+                            </p:stCondLst>
+                            <p:childTnLst>
+                              <p:par>
+                                <p:cTn id="9" presetID="1" presetClass="entr" presetSubtype="0" fill="hold" grpId="0" nodeType="clickEffect">
+                                  <p:stCondLst>
+                                    <p:cond delay="0"/>
+                                  </p:stCondLst>
+                                  <p:childTnLst>
+                                    <p:set>
+                                      <p:cBhvr>
+                                        <p:cTn id="10" dur="1" fill="hold">
+                                          <p:stCondLst>
+                                            <p:cond delay="0"/>
+                                          </p:stCondLst>
+                                        </p:cTn>
+                                        <p:tgtEl>
+                                          <p:spTgt spid="3">
+                                            <p:txEl>
+                                              <p:pRg st="3" end="3"/>
+                                            </p:txEl>
+                                          </p:spTgt>
+                                        </p:tgtEl>
+                                        <p:attrNameLst>
+                                          <p:attrName>style.visibility</p:attrName>
+                                        </p:attrNameLst>
+                                      </p:cBhvr>
+                                      <p:to>
+                                        <p:strVal val="visible"/>
+                                      </p:to>
+                                    </p:set>
+                                  </p:childTnLst>
+                                </p:cTn>
+                              </p:par>
+                            </p:childTnLst>
+                          </p:cTn>
+                        </p:par>
+                      </p:childTnLst>
+                    </p:cTn>
+                  </p:par>
+                  <p:par>
+                    <p:cTn id="11" fill="hold">
+                      <p:stCondLst>
+                        <p:cond delay="indefinite"/>
+                      </p:stCondLst>
+                      <p:childTnLst>
+                        <p:par>
+                          <p:cTn id="12" fill="hold">
+                            <p:stCondLst>
+                              <p:cond delay="0"/>
+                            </p:stCondLst>
+                            <p:childTnLst>
+                              <p:par>
+                                <p:cTn id="13" presetID="1" presetClass="entr" presetSubtype="0" fill="hold" grpId="0" nodeType="clickEffect">
+                                  <p:stCondLst>
+                                    <p:cond delay="0"/>
+                                  </p:stCondLst>
+                                  <p:childTnLst>
+                                    <p:set>
+                                      <p:cBhvr>
+                                        <p:cTn id="14" dur="1" fill="hold">
+                                          <p:stCondLst>
+                                            <p:cond delay="0"/>
+                                          </p:stCondLst>
+                                        </p:cTn>
+                                        <p:tgtEl>
+                                          <p:spTgt spid="3">
+                                            <p:txEl>
+                                              <p:pRg st="5" end="5"/>
+                                            </p:txEl>
+                                          </p:spTgt>
+                                        </p:tgtEl>
+                                        <p:attrNameLst>
+                                          <p:attrName>style.visibility</p:attrName>
+                                        </p:attrNameLst>
+                                      </p:cBhvr>
+                                      <p:to>
+                                        <p:strVal val="visible"/>
+                                      </p:to>
+                                    </p:set>
+                                  </p:childTnLst>
+                                </p:cTn>
+                              </p:par>
+                            </p:childTnLst>
+                          </p:cTn>
+                        </p:par>
+                      </p:childTnLst>
+                    </p:cTn>
+                  </p:par>
+                  <p:par>
+                    <p:cTn id="15" fill="hold">
+                      <p:stCondLst>
+                        <p:cond delay="indefinite"/>
+                      </p:stCondLst>
+                      <p:childTnLst>
+                        <p:par>
+                          <p:cTn id="16" fill="hold">
+                            <p:stCondLst>
+                              <p:cond delay="0"/>
+                            </p:stCondLst>
+                            <p:childTnLst>
+                              <p:par>
+                                <p:cTn id="17" presetID="1" presetClass="entr" presetSubtype="0" fill="hold" grpId="0" nodeType="clickEffect">
+                                  <p:stCondLst>
+                                    <p:cond delay="0"/>
+                                  </p:stCondLst>
+                                  <p:childTnLst>
+                                    <p:set>
+                                      <p:cBhvr>
+                                        <p:cTn id="18" dur="1" fill="hold">
+                                          <p:stCondLst>
+                                            <p:cond delay="0"/>
+                                          </p:stCondLst>
+                                        </p:cTn>
+                                        <p:tgtEl>
+                                          <p:spTgt spid="3">
+                                            <p:txEl>
+                                              <p:pRg st="7" end="7"/>
+                                            </p:txEl>
+                                          </p:spTgt>
+                                        </p:tgtEl>
+                                        <p:attrNameLst>
+                                          <p:attrName>style.visibility</p:attrName>
+                                        </p:attrNameLst>
+                                      </p:cBhvr>
+                                      <p:to>
+                                        <p:strVal val="visible"/>
+                                      </p:to>
+                                    </p:set>
+                                  </p:childTnLst>
+                                </p:cTn>
+                              </p:par>
+                            </p:childTnLst>
+                          </p:cTn>
+                        </p:par>
+                      </p:childTnLst>
+                    </p:cTn>
+                  </p:par>
+                </p:childTnLst>
+              </p:cTn>
+              <p:prevCondLst>
+                <p:cond evt="onPrev" delay="0">
+                  <p:tgtEl>
+                    <p:sldTgt/>
+                  </p:tgtEl>
+                </p:cond>
+              </p:prevCondLst>
+              <p:nextCondLst>
+                <p:cond evt="onNext" delay="0">
+                  <p:tgtEl>
+                    <p:sldTgt/>
+                  </p:tgtEl>
+                </p:cond>
+              </p:nextCondLst>
+            </p:seq>
+          </p:childTnLst>
+        </p:cTn>
+      </p:par>
+    </p:tnLst>
+    <p:bldLst>
+      <p:bldP spid="3" grpId="0" build="p"/>
+    </p:bldLst>
+  </p:timing>
+</p:sld>
+</file>
+
+<file path=ppt/slides/slide5.xml><?xml version="1.0" encoding="utf-8"?>
+<p:sld xmlns:a="http://schemas.openxmlformats.org/drawingml/2006/main" xmlns:r="http://schemas.openxmlformats.org/officeDocument/2006/relationships" xmlns:p="http://schemas.openxmlformats.org/presentationml/2006/main">
+  <p:cSld>
+    <p:spTree>
+      <p:nvGrpSpPr>
+        <p:cNvPr id="1" name=""/>
+        <p:cNvGrpSpPr/>
+        <p:nvPr/>
+      </p:nvGrpSpPr>
+      <p:grpSpPr>
+        <a:xfrm>
+          <a:off x="0" y="0"/>
+          <a:ext cx="0" cy="0"/>
+          <a:chOff x="0" y="0"/>
+          <a:chExt cx="0" cy="0"/>
+        </a:xfrm>
+      </p:grpSpPr>
+      <p:sp>
+        <p:nvSpPr>
+          <p:cNvPr id="2" name="Title 1">
+            <a:extLst>
+              <a:ext uri="{FF2B5EF4-FFF2-40B4-BE49-F238E27FC236}">
+                <a16:creationId xmlns:a16="http://schemas.microsoft.com/office/drawing/2014/main" id="{8FC7F84E-BE1B-B59F-C328-C0E7F9396F30}"/>
+              </a:ext>
+            </a:extLst>
+          </p:cNvPr>
+          <p:cNvSpPr>
+            <a:spLocks noGrp="1"/>
+          </p:cNvSpPr>
+          <p:nvPr>
+            <p:ph type="title"/>
+          </p:nvPr>
+        </p:nvSpPr>
+        <p:spPr/>
+        <p:txBody>
+          <a:bodyPr/>
+          <a:lstStyle/>
+          <a:p>
+            <a:r>
+              <a:rPr lang="en-GB" dirty="0"/>
+              <a:t>Exponential Moving Average (EMA) method</a:t>
+            </a:r>
+          </a:p>
+        </p:txBody>
+      </p:sp>
+      <mc:AlternateContent xmlns:mc="http://schemas.openxmlformats.org/markup-compatibility/2006" xmlns:a14="http://schemas.microsoft.com/office/drawing/2010/main">
+        <mc:Choice Requires="a14">
+          <p:sp>
+            <p:nvSpPr>
+              <p:cNvPr id="3" name="Content Placeholder 2">
+                <a:extLst>
+                  <a:ext uri="{FF2B5EF4-FFF2-40B4-BE49-F238E27FC236}">
+                    <a16:creationId xmlns:a16="http://schemas.microsoft.com/office/drawing/2014/main" id="{F09852CE-BB42-63E7-1A4A-891F79F8BF06}"/>
+                  </a:ext>
+                </a:extLst>
+              </p:cNvPr>
+              <p:cNvSpPr>
+                <a:spLocks noGrp="1"/>
+              </p:cNvSpPr>
+              <p:nvPr>
+                <p:ph idx="1"/>
+              </p:nvPr>
+            </p:nvSpPr>
+            <p:spPr/>
+            <p:txBody>
+              <a:bodyPr/>
+              <a:lstStyle/>
+              <a:p>
+                <a:pPr marL="0" indent="0">
+                  <a:buNone/>
+                </a:pPr>
+                <a14:m>
+                  <m:oMathPara xmlns:m="http://schemas.openxmlformats.org/officeDocument/2006/math">
+                    <m:oMathParaPr>
+                      <m:jc m:val="centerGroup"/>
+                    </m:oMathParaPr>
+                    <m:oMath xmlns:m="http://schemas.openxmlformats.org/officeDocument/2006/math">
+                      <m:sSub>
+                        <m:sSubPr>
+                          <m:ctrlPr>
+                            <a:rPr lang="en-US" b="0" i="1" smtClean="0">
+                              <a:latin typeface="Cambria Math" panose="02040503050406030204" pitchFamily="18" charset="0"/>
+                            </a:rPr>
+                          </m:ctrlPr>
+                        </m:sSubPr>
+                        <m:e>
+                          <m:acc>
+                            <m:accPr>
+                              <m:chr m:val="̅"/>
+                              <m:ctrlPr>
+                                <a:rPr lang="en-US" b="0" i="1" smtClean="0">
+                                  <a:latin typeface="Cambria Math" panose="02040503050406030204" pitchFamily="18" charset="0"/>
+                                </a:rPr>
+                              </m:ctrlPr>
+                            </m:accPr>
+                            <m:e>
+                              <m:r>
+                                <a:rPr lang="en-US" b="0" i="1" smtClean="0">
+                                  <a:latin typeface="Cambria Math" panose="02040503050406030204" pitchFamily="18" charset="0"/>
+                                </a:rPr>
+                                <m:t>𝐿</m:t>
+                              </m:r>
+                            </m:e>
+                          </m:acc>
+                        </m:e>
+                        <m:sub>
+                          <m:r>
+                            <a:rPr lang="en-US" b="0" i="1" smtClean="0">
+                              <a:latin typeface="Cambria Math" panose="02040503050406030204" pitchFamily="18" charset="0"/>
+                            </a:rPr>
+                            <m:t>𝑘</m:t>
+                          </m:r>
+                        </m:sub>
+                      </m:sSub>
+                      <m:d>
+                        <m:dPr>
+                          <m:ctrlPr>
+                            <a:rPr lang="en-US" b="0" i="1" smtClean="0">
+                              <a:latin typeface="Cambria Math" panose="02040503050406030204" pitchFamily="18" charset="0"/>
+                            </a:rPr>
+                          </m:ctrlPr>
+                        </m:dPr>
+                        <m:e>
+                          <m:sSub>
+                            <m:sSubPr>
+                              <m:ctrlPr>
+                                <a:rPr lang="en-US" b="0" i="1" smtClean="0">
+                                  <a:latin typeface="Cambria Math" panose="02040503050406030204" pitchFamily="18" charset="0"/>
+                                </a:rPr>
+                              </m:ctrlPr>
+                            </m:sSubPr>
+                            <m:e>
+                              <m:r>
+                                <a:rPr lang="en-US" b="0" i="1" smtClean="0">
+                                  <a:latin typeface="Cambria Math" panose="02040503050406030204" pitchFamily="18" charset="0"/>
+                                </a:rPr>
+                                <m:t>𝑡</m:t>
+                              </m:r>
+                            </m:e>
+                            <m:sub>
+                              <m:r>
+                                <a:rPr lang="en-US" b="0" i="1" smtClean="0">
+                                  <a:latin typeface="Cambria Math" panose="02040503050406030204" pitchFamily="18" charset="0"/>
+                                </a:rPr>
+                                <m:t>𝑛</m:t>
+                              </m:r>
+                            </m:sub>
+                          </m:sSub>
+                        </m:e>
+                      </m:d>
+                      <m:r>
+                        <a:rPr lang="en-US" b="0" i="1" smtClean="0">
+                          <a:latin typeface="Cambria Math" panose="02040503050406030204" pitchFamily="18" charset="0"/>
+                        </a:rPr>
+                        <m:t>=</m:t>
+                      </m:r>
+                      <m:r>
+                        <a:rPr lang="en-US" b="0" i="1" smtClean="0">
+                          <a:latin typeface="Cambria Math" panose="02040503050406030204" pitchFamily="18" charset="0"/>
+                        </a:rPr>
+                        <m:t>𝛼</m:t>
+                      </m:r>
+                      <m:sSub>
+                        <m:sSubPr>
+                          <m:ctrlPr>
+                            <a:rPr lang="en-US" b="0" i="1" smtClean="0">
+                              <a:latin typeface="Cambria Math" panose="02040503050406030204" pitchFamily="18" charset="0"/>
+                            </a:rPr>
+                          </m:ctrlPr>
+                        </m:sSubPr>
+                        <m:e>
+                          <m:acc>
+                            <m:accPr>
+                              <m:chr m:val="̅"/>
+                              <m:ctrlPr>
+                                <a:rPr lang="en-US" b="0" i="1" smtClean="0">
+                                  <a:latin typeface="Cambria Math" panose="02040503050406030204" pitchFamily="18" charset="0"/>
+                                </a:rPr>
+                              </m:ctrlPr>
+                            </m:accPr>
+                            <m:e>
+                              <m:r>
+                                <a:rPr lang="en-US" b="0" i="1" smtClean="0">
+                                  <a:latin typeface="Cambria Math" panose="02040503050406030204" pitchFamily="18" charset="0"/>
+                                </a:rPr>
+                                <m:t>𝐿</m:t>
+                              </m:r>
+                            </m:e>
+                          </m:acc>
+                        </m:e>
+                        <m:sub>
+                          <m:r>
+                            <a:rPr lang="en-US" b="0" i="1" smtClean="0">
+                              <a:latin typeface="Cambria Math" panose="02040503050406030204" pitchFamily="18" charset="0"/>
+                            </a:rPr>
+                            <m:t>𝑘</m:t>
+                          </m:r>
+                        </m:sub>
+                      </m:sSub>
+                      <m:d>
+                        <m:dPr>
+                          <m:ctrlPr>
+                            <a:rPr lang="en-US" b="0" i="1" smtClean="0">
+                              <a:latin typeface="Cambria Math" panose="02040503050406030204" pitchFamily="18" charset="0"/>
+                            </a:rPr>
+                          </m:ctrlPr>
+                        </m:dPr>
+                        <m:e>
+                          <m:sSub>
+                            <m:sSubPr>
+                              <m:ctrlPr>
+                                <a:rPr lang="en-US" b="0" i="1" smtClean="0">
+                                  <a:latin typeface="Cambria Math" panose="02040503050406030204" pitchFamily="18" charset="0"/>
+                                </a:rPr>
+                              </m:ctrlPr>
+                            </m:sSubPr>
+                            <m:e>
+                              <m:r>
+                                <a:rPr lang="en-US" b="0" i="1" smtClean="0">
+                                  <a:latin typeface="Cambria Math" panose="02040503050406030204" pitchFamily="18" charset="0"/>
+                                </a:rPr>
+                                <m:t>𝑡</m:t>
+                              </m:r>
+                            </m:e>
+                            <m:sub>
+                              <m:r>
+                                <a:rPr lang="en-US" b="0" i="1" smtClean="0">
+                                  <a:latin typeface="Cambria Math" panose="02040503050406030204" pitchFamily="18" charset="0"/>
+                                </a:rPr>
+                                <m:t>𝑛</m:t>
+                              </m:r>
+                              <m:r>
+                                <a:rPr lang="en-US" b="0" i="1" smtClean="0">
+                                  <a:latin typeface="Cambria Math" panose="02040503050406030204" pitchFamily="18" charset="0"/>
+                                </a:rPr>
+                                <m:t>−1</m:t>
+                              </m:r>
+                            </m:sub>
+                          </m:sSub>
+                        </m:e>
+                      </m:d>
+                      <m:r>
+                        <a:rPr lang="en-US" b="0" i="1" smtClean="0">
+                          <a:latin typeface="Cambria Math" panose="02040503050406030204" pitchFamily="18" charset="0"/>
+                        </a:rPr>
+                        <m:t>+</m:t>
+                      </m:r>
+                      <m:d>
+                        <m:dPr>
+                          <m:ctrlPr>
+                            <a:rPr lang="en-US" b="0" i="1" smtClean="0">
+                              <a:latin typeface="Cambria Math" panose="02040503050406030204" pitchFamily="18" charset="0"/>
+                            </a:rPr>
+                          </m:ctrlPr>
+                        </m:dPr>
+                        <m:e>
+                          <m:r>
+                            <a:rPr lang="en-US" b="0" i="1" smtClean="0">
+                              <a:latin typeface="Cambria Math" panose="02040503050406030204" pitchFamily="18" charset="0"/>
+                            </a:rPr>
+                            <m:t>1−</m:t>
+                          </m:r>
+                          <m:r>
+                            <a:rPr lang="en-US" b="0" i="1" smtClean="0">
+                              <a:latin typeface="Cambria Math" panose="02040503050406030204" pitchFamily="18" charset="0"/>
+                            </a:rPr>
+                            <m:t>𝛼</m:t>
+                          </m:r>
+                        </m:e>
+                      </m:d>
+                      <m:sSub>
+                        <m:sSubPr>
+                          <m:ctrlPr>
+                            <a:rPr lang="en-US" b="0" i="1" smtClean="0">
+                              <a:latin typeface="Cambria Math" panose="02040503050406030204" pitchFamily="18" charset="0"/>
+                            </a:rPr>
+                          </m:ctrlPr>
+                        </m:sSubPr>
+                        <m:e>
+                          <m:r>
+                            <a:rPr lang="en-US" b="0" i="1" smtClean="0">
+                              <a:latin typeface="Cambria Math" panose="02040503050406030204" pitchFamily="18" charset="0"/>
+                            </a:rPr>
+                            <m:t>𝐿</m:t>
+                          </m:r>
+                        </m:e>
+                        <m:sub>
+                          <m:r>
+                            <a:rPr lang="en-US" b="0" i="1" smtClean="0">
+                              <a:latin typeface="Cambria Math" panose="02040503050406030204" pitchFamily="18" charset="0"/>
+                            </a:rPr>
+                            <m:t>𝑘</m:t>
+                          </m:r>
+                        </m:sub>
+                      </m:sSub>
+                      <m:d>
+                        <m:dPr>
+                          <m:ctrlPr>
+                            <a:rPr lang="en-US" b="0" i="1" smtClean="0">
+                              <a:latin typeface="Cambria Math" panose="02040503050406030204" pitchFamily="18" charset="0"/>
+                            </a:rPr>
+                          </m:ctrlPr>
+                        </m:dPr>
+                        <m:e>
+                          <m:sSub>
+                            <m:sSubPr>
+                              <m:ctrlPr>
+                                <a:rPr lang="en-US" b="0" i="1" smtClean="0">
+                                  <a:latin typeface="Cambria Math" panose="02040503050406030204" pitchFamily="18" charset="0"/>
+                                </a:rPr>
+                              </m:ctrlPr>
+                            </m:sSubPr>
+                            <m:e>
+                              <m:r>
+                                <a:rPr lang="en-US" b="0" i="1" smtClean="0">
+                                  <a:latin typeface="Cambria Math" panose="02040503050406030204" pitchFamily="18" charset="0"/>
+                                </a:rPr>
+                                <m:t>𝑡</m:t>
+                              </m:r>
+                            </m:e>
+                            <m:sub>
+                              <m:r>
+                                <a:rPr lang="en-US" b="0" i="1" smtClean="0">
+                                  <a:latin typeface="Cambria Math" panose="02040503050406030204" pitchFamily="18" charset="0"/>
+                                </a:rPr>
+                                <m:t>𝑛</m:t>
+                              </m:r>
+                            </m:sub>
+                          </m:sSub>
+                        </m:e>
+                      </m:d>
+                    </m:oMath>
+                  </m:oMathPara>
+                </a14:m>
+                <a:endParaRPr lang="en-US" b="0" i="1" dirty="0">
+                  <a:latin typeface="Cambria Math" panose="02040503050406030204" pitchFamily="18" charset="0"/>
+                </a:endParaRPr>
+              </a:p>
+              <a:p>
+                <a:pPr marL="0" indent="0">
+                  <a:buNone/>
+                </a:pPr>
+                <a:endParaRPr lang="en-US" b="0" i="1" dirty="0">
+                  <a:latin typeface="Cambria Math" panose="02040503050406030204" pitchFamily="18" charset="0"/>
+                </a:endParaRPr>
+              </a:p>
+              <a:p>
+                <a:pPr marL="0" indent="0">
+                  <a:buNone/>
+                </a:pPr>
+                <a14:m>
+                  <m:oMathPara xmlns:m="http://schemas.openxmlformats.org/officeDocument/2006/math">
+                    <m:oMathParaPr>
+                      <m:jc m:val="centerGroup"/>
+                    </m:oMathParaPr>
+                    <m:oMath xmlns:m="http://schemas.openxmlformats.org/officeDocument/2006/math">
+                      <m:sSub>
+                        <m:sSubPr>
+                          <m:ctrlPr>
+                            <a:rPr lang="en-US" b="0" i="1" smtClean="0">
+                              <a:latin typeface="Cambria Math" panose="02040503050406030204" pitchFamily="18" charset="0"/>
+                            </a:rPr>
+                          </m:ctrlPr>
+                        </m:sSubPr>
+                        <m:e>
+                          <m:r>
+                            <a:rPr lang="en-US" b="0" i="1" smtClean="0">
+                              <a:latin typeface="Cambria Math" panose="02040503050406030204" pitchFamily="18" charset="0"/>
+                            </a:rPr>
+                            <m:t>𝐿</m:t>
+                          </m:r>
+                        </m:e>
+                        <m:sub>
+                          <m:r>
+                            <a:rPr lang="en-US" b="0" i="1" smtClean="0">
+                              <a:latin typeface="Cambria Math" panose="02040503050406030204" pitchFamily="18" charset="0"/>
+                            </a:rPr>
+                            <m:t>𝑘</m:t>
+                          </m:r>
+                        </m:sub>
+                      </m:sSub>
+                      <m:r>
+                        <a:rPr lang="en-US" b="0" i="1" smtClean="0">
+                          <a:latin typeface="Cambria Math" panose="02040503050406030204" pitchFamily="18" charset="0"/>
+                        </a:rPr>
+                        <m:t>={</m:t>
+                      </m:r>
+                      <m:sSub>
+                        <m:sSubPr>
+                          <m:ctrlPr>
+                            <a:rPr lang="en-US" b="0" i="1" smtClean="0">
+                              <a:latin typeface="Cambria Math" panose="02040503050406030204" pitchFamily="18" charset="0"/>
+                            </a:rPr>
+                          </m:ctrlPr>
+                        </m:sSubPr>
+                        <m:e>
+                          <m:r>
+                            <a:rPr lang="en-US" b="0" i="1" smtClean="0">
+                              <a:latin typeface="Cambria Math" panose="02040503050406030204" pitchFamily="18" charset="0"/>
+                            </a:rPr>
+                            <m:t>𝐿</m:t>
+                          </m:r>
+                        </m:e>
+                        <m:sub>
+                          <m:r>
+                            <a:rPr lang="en-US" b="0" i="1" smtClean="0">
+                              <a:latin typeface="Cambria Math" panose="02040503050406030204" pitchFamily="18" charset="0"/>
+                            </a:rPr>
+                            <m:t>2</m:t>
+                          </m:r>
+                        </m:sub>
+                      </m:sSub>
+                      <m:r>
+                        <a:rPr lang="en-US" b="0" i="1" smtClean="0">
+                          <a:latin typeface="Cambria Math" panose="02040503050406030204" pitchFamily="18" charset="0"/>
+                        </a:rPr>
+                        <m:t>,</m:t>
+                      </m:r>
+                      <m:r>
+                        <m:rPr>
+                          <m:nor/>
+                        </m:rPr>
+                        <a:rPr lang="en-US" b="0" i="0" smtClean="0">
+                          <a:latin typeface="Cambria Math" panose="02040503050406030204" pitchFamily="18" charset="0"/>
+                        </a:rPr>
+                        <m:t>soft</m:t>
+                      </m:r>
+                      <m:r>
+                        <a:rPr lang="en-US" b="0" i="1" smtClean="0">
+                          <a:latin typeface="Cambria Math" panose="02040503050406030204" pitchFamily="18" charset="0"/>
+                        </a:rPr>
+                        <m:t>−</m:t>
+                      </m:r>
+                      <m:sSub>
+                        <m:sSubPr>
+                          <m:ctrlPr>
+                            <a:rPr lang="en-US" b="0" i="1" smtClean="0">
+                              <a:latin typeface="Cambria Math" panose="02040503050406030204" pitchFamily="18" charset="0"/>
+                            </a:rPr>
+                          </m:ctrlPr>
+                        </m:sSubPr>
+                        <m:e>
+                          <m:r>
+                            <a:rPr lang="en-US" b="0" i="1" smtClean="0">
+                              <a:latin typeface="Cambria Math" panose="02040503050406030204" pitchFamily="18" charset="0"/>
+                            </a:rPr>
+                            <m:t>𝐿</m:t>
+                          </m:r>
+                        </m:e>
+                        <m:sub>
+                          <m:r>
+                            <a:rPr lang="en-US" b="0" i="1" smtClean="0">
+                              <a:latin typeface="Cambria Math" panose="02040503050406030204" pitchFamily="18" charset="0"/>
+                            </a:rPr>
+                            <m:t>∞</m:t>
+                          </m:r>
+                        </m:sub>
+                      </m:sSub>
+                      <m:r>
+                        <a:rPr lang="en-US" b="0" i="1" smtClean="0">
+                          <a:latin typeface="Cambria Math" panose="02040503050406030204" pitchFamily="18" charset="0"/>
+                        </a:rPr>
+                        <m:t>,</m:t>
+                      </m:r>
+                      <m:sSub>
+                        <m:sSubPr>
+                          <m:ctrlPr>
+                            <a:rPr lang="en-US" b="0" i="1" smtClean="0">
+                              <a:latin typeface="Cambria Math" panose="02040503050406030204" pitchFamily="18" charset="0"/>
+                            </a:rPr>
+                          </m:ctrlPr>
+                        </m:sSubPr>
+                        <m:e>
+                          <m:r>
+                            <a:rPr lang="en-US" b="0" i="1" smtClean="0">
+                              <a:latin typeface="Cambria Math" panose="02040503050406030204" pitchFamily="18" charset="0"/>
+                            </a:rPr>
+                            <m:t>ℒ</m:t>
+                          </m:r>
+                        </m:e>
+                        <m:sub>
+                          <m:r>
+                            <a:rPr lang="en-US" b="0" i="1" smtClean="0">
+                              <a:latin typeface="Cambria Math" panose="02040503050406030204" pitchFamily="18" charset="0"/>
+                            </a:rPr>
+                            <m:t>𝐵𝐶</m:t>
+                          </m:r>
+                        </m:sub>
+                      </m:sSub>
+                      <m:r>
+                        <a:rPr lang="en-US" b="0" i="1" smtClean="0">
+                          <a:latin typeface="Cambria Math" panose="02040503050406030204" pitchFamily="18" charset="0"/>
+                        </a:rPr>
+                        <m:t>}</m:t>
+                      </m:r>
+                    </m:oMath>
+                  </m:oMathPara>
+                </a14:m>
+                <a:endParaRPr lang="en-US" b="0" dirty="0"/>
+              </a:p>
+              <a:p>
+                <a:pPr marL="0" indent="0">
+                  <a:buNone/>
+                </a:pPr>
+                <a:endParaRPr lang="en-GB" dirty="0"/>
+              </a:p>
+              <a:p>
+                <a:pPr marL="0" indent="0" algn="ctr">
+                  <a:buNone/>
+                </a:pPr>
+                <a14:m>
+                  <m:oMath xmlns:m="http://schemas.openxmlformats.org/officeDocument/2006/math">
+                    <m:r>
+                      <a:rPr lang="en-US" b="0" i="1" smtClean="0">
+                        <a:latin typeface="Cambria Math" panose="02040503050406030204" pitchFamily="18" charset="0"/>
+                      </a:rPr>
+                      <m:t>𝛼</m:t>
+                    </m:r>
+                    <m:r>
+                      <a:rPr lang="en-US" b="0" i="1" smtClean="0">
+                        <a:latin typeface="Cambria Math" panose="02040503050406030204" pitchFamily="18" charset="0"/>
+                      </a:rPr>
+                      <m:t>∈</m:t>
+                    </m:r>
+                    <m:d>
+                      <m:dPr>
+                        <m:begChr m:val="["/>
+                        <m:ctrlPr>
+                          <a:rPr lang="en-US" b="0" i="1" smtClean="0">
+                            <a:latin typeface="Cambria Math" panose="02040503050406030204" pitchFamily="18" charset="0"/>
+                          </a:rPr>
+                        </m:ctrlPr>
+                      </m:dPr>
+                      <m:e>
+                        <m:r>
+                          <a:rPr lang="en-US" b="0" i="1" smtClean="0">
+                            <a:latin typeface="Cambria Math" panose="02040503050406030204" pitchFamily="18" charset="0"/>
+                          </a:rPr>
+                          <m:t>0,1</m:t>
+                        </m:r>
+                      </m:e>
+                    </m:d>
+                  </m:oMath>
+                </a14:m>
+                <a:r>
+                  <a:rPr lang="en-US" dirty="0"/>
+                  <a:t>, chosen to be 0.99</a:t>
+                </a:r>
+              </a:p>
+              <a:p>
+                <a:pPr marL="0" indent="0">
+                  <a:buNone/>
+                </a:pPr>
+                <a:endParaRPr lang="en-US" b="0" dirty="0"/>
+              </a:p>
+              <a:p>
+                <a:pPr marL="0" indent="0">
+                  <a:buNone/>
+                </a:pPr>
+                <a14:m>
+                  <m:oMathPara xmlns:m="http://schemas.openxmlformats.org/officeDocument/2006/math">
+                    <m:oMathParaPr>
+                      <m:jc m:val="centerGroup"/>
+                    </m:oMathParaPr>
+                    <m:oMath xmlns:m="http://schemas.openxmlformats.org/officeDocument/2006/math">
+                      <m:acc>
+                        <m:accPr>
+                          <m:chr m:val="˜"/>
+                          <m:ctrlPr>
+                            <a:rPr lang="en-US" b="0" i="1" smtClean="0">
+                              <a:latin typeface="Cambria Math" panose="02040503050406030204" pitchFamily="18" charset="0"/>
+                            </a:rPr>
+                          </m:ctrlPr>
+                        </m:accPr>
+                        <m:e>
+                          <m:r>
+                            <a:rPr lang="en-US" b="0" i="1" smtClean="0">
+                              <a:latin typeface="Cambria Math" panose="02040503050406030204" pitchFamily="18" charset="0"/>
+                            </a:rPr>
+                            <m:t>𝐿</m:t>
+                          </m:r>
+                        </m:e>
+                      </m:acc>
+                      <m:d>
+                        <m:dPr>
+                          <m:ctrlPr>
+                            <a:rPr lang="en-US" b="0" i="1" smtClean="0">
+                              <a:latin typeface="Cambria Math" panose="02040503050406030204" pitchFamily="18" charset="0"/>
+                            </a:rPr>
+                          </m:ctrlPr>
+                        </m:dPr>
+                        <m:e>
+                          <m:sSub>
+                            <m:sSubPr>
+                              <m:ctrlPr>
+                                <a:rPr lang="en-US" b="0" i="1" smtClean="0">
+                                  <a:latin typeface="Cambria Math" panose="02040503050406030204" pitchFamily="18" charset="0"/>
+                                </a:rPr>
+                              </m:ctrlPr>
+                            </m:sSubPr>
+                            <m:e>
+                              <m:r>
+                                <a:rPr lang="en-US" b="0" i="1" smtClean="0">
+                                  <a:latin typeface="Cambria Math" panose="02040503050406030204" pitchFamily="18" charset="0"/>
+                                </a:rPr>
+                                <m:t>𝑡</m:t>
+                              </m:r>
+                            </m:e>
+                            <m:sub>
+                              <m:r>
+                                <a:rPr lang="en-US" b="0" i="1" smtClean="0">
+                                  <a:latin typeface="Cambria Math" panose="02040503050406030204" pitchFamily="18" charset="0"/>
+                                </a:rPr>
+                                <m:t>𝑛</m:t>
+                              </m:r>
+                            </m:sub>
+                          </m:sSub>
+                        </m:e>
+                      </m:d>
+                      <m:r>
+                        <a:rPr lang="en-US" b="0" i="1" smtClean="0">
+                          <a:latin typeface="Cambria Math" panose="02040503050406030204" pitchFamily="18" charset="0"/>
+                        </a:rPr>
+                        <m:t>=</m:t>
+                      </m:r>
+                      <m:f>
+                        <m:fPr>
+                          <m:ctrlPr>
+                            <a:rPr lang="en-US" b="0" i="1" smtClean="0">
+                              <a:latin typeface="Cambria Math" panose="02040503050406030204" pitchFamily="18" charset="0"/>
+                            </a:rPr>
+                          </m:ctrlPr>
+                        </m:fPr>
+                        <m:num>
+                          <m:sSub>
+                            <m:sSubPr>
+                              <m:ctrlPr>
+                                <a:rPr lang="en-US" b="0" i="1" smtClean="0">
+                                  <a:latin typeface="Cambria Math" panose="02040503050406030204" pitchFamily="18" charset="0"/>
+                                </a:rPr>
+                              </m:ctrlPr>
+                            </m:sSubPr>
+                            <m:e>
+                              <m:r>
+                                <a:rPr lang="en-US" b="0" i="1" smtClean="0">
+                                  <a:latin typeface="Cambria Math" panose="02040503050406030204" pitchFamily="18" charset="0"/>
+                                </a:rPr>
+                                <m:t>𝐿</m:t>
+                              </m:r>
+                            </m:e>
+                            <m:sub>
+                              <m:r>
+                                <a:rPr lang="en-US" b="0" i="1" smtClean="0">
+                                  <a:latin typeface="Cambria Math" panose="02040503050406030204" pitchFamily="18" charset="0"/>
+                                </a:rPr>
+                                <m:t>𝑘</m:t>
+                              </m:r>
+                            </m:sub>
+                          </m:sSub>
+                          <m:d>
+                            <m:dPr>
+                              <m:ctrlPr>
+                                <a:rPr lang="en-US" b="0" i="1" smtClean="0">
+                                  <a:latin typeface="Cambria Math" panose="02040503050406030204" pitchFamily="18" charset="0"/>
+                                </a:rPr>
+                              </m:ctrlPr>
+                            </m:dPr>
+                            <m:e>
+                              <m:sSub>
+                                <m:sSubPr>
+                                  <m:ctrlPr>
+                                    <a:rPr lang="en-US" b="0" i="1" smtClean="0">
+                                      <a:latin typeface="Cambria Math" panose="02040503050406030204" pitchFamily="18" charset="0"/>
+                                    </a:rPr>
+                                  </m:ctrlPr>
+                                </m:sSubPr>
+                                <m:e>
+                                  <m:r>
+                                    <a:rPr lang="en-US" b="0" i="1" smtClean="0">
+                                      <a:latin typeface="Cambria Math" panose="02040503050406030204" pitchFamily="18" charset="0"/>
+                                    </a:rPr>
+                                    <m:t>𝑡</m:t>
+                                  </m:r>
+                                </m:e>
+                                <m:sub>
+                                  <m:r>
+                                    <a:rPr lang="en-US" b="0" i="1" smtClean="0">
+                                      <a:latin typeface="Cambria Math" panose="02040503050406030204" pitchFamily="18" charset="0"/>
+                                    </a:rPr>
+                                    <m:t>𝑛</m:t>
+                                  </m:r>
+                                </m:sub>
+                              </m:sSub>
+                            </m:e>
+                          </m:d>
+                        </m:num>
+                        <m:den>
+                          <m:sSub>
+                            <m:sSubPr>
+                              <m:ctrlPr>
+                                <a:rPr lang="en-US" b="0" i="1" smtClean="0">
+                                  <a:latin typeface="Cambria Math" panose="02040503050406030204" pitchFamily="18" charset="0"/>
+                                </a:rPr>
+                              </m:ctrlPr>
+                            </m:sSubPr>
+                            <m:e>
+                              <m:acc>
+                                <m:accPr>
+                                  <m:chr m:val="̅"/>
+                                  <m:ctrlPr>
+                                    <a:rPr lang="en-US" b="0" i="1" smtClean="0">
+                                      <a:latin typeface="Cambria Math" panose="02040503050406030204" pitchFamily="18" charset="0"/>
+                                    </a:rPr>
+                                  </m:ctrlPr>
+                                </m:accPr>
+                                <m:e>
+                                  <m:r>
+                                    <a:rPr lang="en-US" b="0" i="1" smtClean="0">
+                                      <a:latin typeface="Cambria Math" panose="02040503050406030204" pitchFamily="18" charset="0"/>
+                                    </a:rPr>
+                                    <m:t>𝐿</m:t>
+                                  </m:r>
+                                </m:e>
+                              </m:acc>
+                            </m:e>
+                            <m:sub>
+                              <m:r>
+                                <a:rPr lang="en-US" b="0" i="1" smtClean="0">
+                                  <a:latin typeface="Cambria Math" panose="02040503050406030204" pitchFamily="18" charset="0"/>
+                                </a:rPr>
+                                <m:t>𝑘</m:t>
+                              </m:r>
+                            </m:sub>
+                          </m:sSub>
+                          <m:d>
+                            <m:dPr>
+                              <m:ctrlPr>
+                                <a:rPr lang="en-US" b="0" i="1" smtClean="0">
+                                  <a:latin typeface="Cambria Math" panose="02040503050406030204" pitchFamily="18" charset="0"/>
+                                </a:rPr>
+                              </m:ctrlPr>
+                            </m:dPr>
+                            <m:e>
+                              <m:sSub>
+                                <m:sSubPr>
+                                  <m:ctrlPr>
+                                    <a:rPr lang="en-US" b="0" i="1" smtClean="0">
+                                      <a:latin typeface="Cambria Math" panose="02040503050406030204" pitchFamily="18" charset="0"/>
+                                    </a:rPr>
+                                  </m:ctrlPr>
+                                </m:sSubPr>
+                                <m:e>
+                                  <m:r>
+                                    <a:rPr lang="en-US" b="0" i="1" smtClean="0">
+                                      <a:latin typeface="Cambria Math" panose="02040503050406030204" pitchFamily="18" charset="0"/>
+                                    </a:rPr>
+                                    <m:t>𝑡</m:t>
+                                  </m:r>
+                                </m:e>
+                                <m:sub>
+                                  <m:r>
+                                    <a:rPr lang="en-US" b="0" i="1" smtClean="0">
+                                      <a:latin typeface="Cambria Math" panose="02040503050406030204" pitchFamily="18" charset="0"/>
+                                    </a:rPr>
+                                    <m:t>𝑛</m:t>
+                                  </m:r>
+                                </m:sub>
+                              </m:sSub>
+                            </m:e>
+                          </m:d>
+                        </m:den>
+                      </m:f>
+                    </m:oMath>
+                  </m:oMathPara>
+                </a14:m>
+                <a:endParaRPr lang="en-US" b="0" dirty="0"/>
+              </a:p>
+              <a:p>
+                <a:pPr marL="0" indent="0">
+                  <a:buNone/>
+                </a:pPr>
+                <a:endParaRPr lang="en-US" b="0" dirty="0"/>
+              </a:p>
+              <a:p>
+                <a:pPr marL="0" indent="0">
+                  <a:buNone/>
+                </a:pPr>
+                <a:endParaRPr lang="en-US" b="0" dirty="0"/>
+              </a:p>
+              <a:p>
+                <a:pPr marL="0" indent="0">
+                  <a:buNone/>
+                </a:pPr>
+                <a:endParaRPr lang="en-GB" dirty="0"/>
+              </a:p>
+            </p:txBody>
+          </p:sp>
+        </mc:Choice>
+        <mc:Fallback xmlns="">
+          <p:sp>
+            <p:nvSpPr>
+              <p:cNvPr id="3" name="Content Placeholder 2">
+                <a:extLst>
+                  <a:ext uri="{FF2B5EF4-FFF2-40B4-BE49-F238E27FC236}">
+                    <a16:creationId xmlns:a16="http://schemas.microsoft.com/office/drawing/2014/main" id="{F09852CE-BB42-63E7-1A4A-891F79F8BF06}"/>
+                  </a:ext>
+                </a:extLst>
+              </p:cNvPr>
+              <p:cNvSpPr>
+                <a:spLocks noGrp="1" noRot="1" noChangeAspect="1" noMove="1" noResize="1" noEditPoints="1" noAdjustHandles="1" noChangeArrowheads="1" noChangeShapeType="1" noTextEdit="1"/>
+              </p:cNvSpPr>
+              <p:nvPr>
+                <p:ph idx="1"/>
+              </p:nvPr>
+            </p:nvSpPr>
+            <p:spPr>
+              <a:blipFill>
+                <a:blip r:embed="rId2"/>
+                <a:stretch>
+                  <a:fillRect/>
+                </a:stretch>
+              </a:blipFill>
+            </p:spPr>
+            <p:txBody>
+              <a:bodyPr/>
+              <a:lstStyle/>
+              <a:p>
+                <a:r>
+                  <a:rPr lang="en-GB">
+                    <a:noFill/>
+                  </a:rPr>
+                  <a:t> </a:t>
+                </a:r>
+              </a:p>
+            </p:txBody>
+          </p:sp>
+        </mc:Fallback>
+      </mc:AlternateContent>
+    </p:spTree>
+    <p:extLst>
+      <p:ext uri="{BB962C8B-B14F-4D97-AF65-F5344CB8AC3E}">
+        <p14:creationId xmlns:p14="http://schemas.microsoft.com/office/powerpoint/2010/main" val="137426355"/>
+      </p:ext>
+    </p:extLst>
+  </p:cSld>
+  <p:clrMapOvr>
+    <a:masterClrMapping/>
+  </p:clrMapOvr>
+  <p:timing>
+    <p:tnLst>
+      <p:par>
+        <p:cTn id="1" dur="indefinite" restart="never" nodeType="tmRoot">
+          <p:childTnLst>
+            <p:seq concurrent="1" nextAc="seek">
+              <p:cTn id="2" dur="indefinite" nodeType="mainSeq">
+                <p:childTnLst>
+                  <p:par>
+                    <p:cTn id="3" fill="hold">
+                      <p:stCondLst>
+                        <p:cond delay="indefinite"/>
+                      </p:stCondLst>
+                      <p:childTnLst>
+                        <p:par>
+                          <p:cTn id="4" fill="hold">
+                            <p:stCondLst>
+                              <p:cond delay="0"/>
+                            </p:stCondLst>
+                            <p:childTnLst>
+                              <p:par>
+                                <p:cTn id="5" presetID="1" presetClass="entr" presetSubtype="0" fill="hold" grpId="0" nodeType="clickEffect">
+                                  <p:stCondLst>
+                                    <p:cond delay="0"/>
+                                  </p:stCondLst>
+                                  <p:childTnLst>
+                                    <p:set>
+                                      <p:cBhvr>
+                                        <p:cTn id="6" dur="1" fill="hold">
+                                          <p:stCondLst>
+                                            <p:cond delay="0"/>
+                                          </p:stCondLst>
+                                        </p:cTn>
+                                        <p:tgtEl>
+                                          <p:spTgt spid="3">
+                                            <p:txEl>
+                                              <p:pRg st="0" end="0"/>
+                                            </p:txEl>
+                                          </p:spTgt>
+                                        </p:tgtEl>
+                                        <p:attrNameLst>
+                                          <p:attrName>style.visibility</p:attrName>
+                                        </p:attrNameLst>
+                                      </p:cBhvr>
+                                      <p:to>
+                                        <p:strVal val="visible"/>
+                                      </p:to>
+                                    </p:set>
+                                  </p:childTnLst>
+                                </p:cTn>
+                              </p:par>
+                              <p:par>
+                                <p:cTn id="7" presetID="1" presetClass="entr" presetSubtype="0" fill="hold" grpId="0" nodeType="withEffect">
+                                  <p:stCondLst>
+                                    <p:cond delay="0"/>
+                                  </p:stCondLst>
+                                  <p:childTnLst>
+                                    <p:set>
+                                      <p:cBhvr>
+                                        <p:cTn id="8" dur="1" fill="hold">
+                                          <p:stCondLst>
+                                            <p:cond delay="0"/>
+                                          </p:stCondLst>
+                                        </p:cTn>
+                                        <p:tgtEl>
+                                          <p:spTgt spid="3">
+                                            <p:txEl>
+                                              <p:pRg st="2" end="2"/>
+                                            </p:txEl>
+                                          </p:spTgt>
+                                        </p:tgtEl>
+                                        <p:attrNameLst>
+                                          <p:attrName>style.visibility</p:attrName>
+                                        </p:attrNameLst>
+                                      </p:cBhvr>
+                                      <p:to>
+                                        <p:strVal val="visible"/>
+                                      </p:to>
+                                    </p:set>
+                                  </p:childTnLst>
+                                </p:cTn>
+                              </p:par>
+                              <p:par>
+                                <p:cTn id="9" presetID="1" presetClass="entr" presetSubtype="0" fill="hold" grpId="0" nodeType="withEffect">
+                                  <p:stCondLst>
+                                    <p:cond delay="0"/>
+                                  </p:stCondLst>
+                                  <p:childTnLst>
+                                    <p:set>
+                                      <p:cBhvr>
+                                        <p:cTn id="10" dur="1" fill="hold">
+                                          <p:stCondLst>
+                                            <p:cond delay="0"/>
+                                          </p:stCondLst>
+                                        </p:cTn>
+                                        <p:tgtEl>
+                                          <p:spTgt spid="3">
+                                            <p:txEl>
+                                              <p:pRg st="4" end="4"/>
+                                            </p:txEl>
+                                          </p:spTgt>
+                                        </p:tgtEl>
+                                        <p:attrNameLst>
+                                          <p:attrName>style.visibility</p:attrName>
+                                        </p:attrNameLst>
+                                      </p:cBhvr>
+                                      <p:to>
+                                        <p:strVal val="visible"/>
+                                      </p:to>
+                                    </p:set>
+                                  </p:childTnLst>
+                                </p:cTn>
+                              </p:par>
+                            </p:childTnLst>
+                          </p:cTn>
+                        </p:par>
+                      </p:childTnLst>
+                    </p:cTn>
+                  </p:par>
+                  <p:par>
+                    <p:cTn id="11" fill="hold">
+                      <p:stCondLst>
+                        <p:cond delay="indefinite"/>
+                      </p:stCondLst>
+                      <p:childTnLst>
+                        <p:par>
+                          <p:cTn id="12" fill="hold">
+                            <p:stCondLst>
+                              <p:cond delay="0"/>
+                            </p:stCondLst>
+                            <p:childTnLst>
+                              <p:par>
+                                <p:cTn id="13" presetID="1" presetClass="entr" presetSubtype="0" fill="hold" grpId="0" nodeType="clickEffect">
+                                  <p:stCondLst>
+                                    <p:cond delay="0"/>
+                                  </p:stCondLst>
+                                  <p:childTnLst>
+                                    <p:set>
+                                      <p:cBhvr>
+                                        <p:cTn id="14" dur="1" fill="hold">
+                                          <p:stCondLst>
+                                            <p:cond delay="0"/>
+                                          </p:stCondLst>
+                                        </p:cTn>
+                                        <p:tgtEl>
+                                          <p:spTgt spid="3">
+                                            <p:txEl>
+                                              <p:pRg st="6" end="6"/>
+                                            </p:txEl>
+                                          </p:spTgt>
+                                        </p:tgtEl>
+                                        <p:attrNameLst>
+                                          <p:attrName>style.visibility</p:attrName>
+                                        </p:attrNameLst>
+                                      </p:cBhvr>
+                                      <p:to>
+                                        <p:strVal val="visible"/>
+                                      </p:to>
+                                    </p:set>
+                                  </p:childTnLst>
+                                </p:cTn>
+                              </p:par>
+                            </p:childTnLst>
+                          </p:cTn>
+                        </p:par>
+                      </p:childTnLst>
+                    </p:cTn>
+                  </p:par>
+                </p:childTnLst>
+              </p:cTn>
+              <p:prevCondLst>
+                <p:cond evt="onPrev" delay="0">
+                  <p:tgtEl>
+                    <p:sldTgt/>
+                  </p:tgtEl>
+                </p:cond>
+              </p:prevCondLst>
+              <p:nextCondLst>
+                <p:cond evt="onNext" delay="0">
+                  <p:tgtEl>
+                    <p:sldTgt/>
+                  </p:tgtEl>
+                </p:cond>
+              </p:nextCondLst>
+            </p:seq>
+          </p:childTnLst>
+        </p:cTn>
+      </p:par>
+    </p:tnLst>
+    <p:bldLst>
+      <p:bldP spid="3" grpId="0" uiExpand="1" build="p"/>
+    </p:bldLst>
+  </p:timing>
+</p:sld>
+</file>
+
+<file path=ppt/slides/slide6.xml><?xml version="1.0" encoding="utf-8"?>
+<p:sld xmlns:a="http://schemas.openxmlformats.org/drawingml/2006/main" xmlns:r="http://schemas.openxmlformats.org/officeDocument/2006/relationships" xmlns:p="http://schemas.openxmlformats.org/presentationml/2006/main">
+  <p:cSld>
+    <p:spTree>
+      <p:nvGrpSpPr>
+        <p:cNvPr id="1" name=""/>
+        <p:cNvGrpSpPr/>
+        <p:nvPr/>
+      </p:nvGrpSpPr>
+      <p:grpSpPr>
+        <a:xfrm>
+          <a:off x="0" y="0"/>
+          <a:ext cx="0" cy="0"/>
+          <a:chOff x="0" y="0"/>
+          <a:chExt cx="0" cy="0"/>
+        </a:xfrm>
+      </p:grpSpPr>
+      <p:sp>
+        <p:nvSpPr>
+          <p:cNvPr id="2" name="Title 1">
+            <a:extLst>
+              <a:ext uri="{FF2B5EF4-FFF2-40B4-BE49-F238E27FC236}">
+                <a16:creationId xmlns:a16="http://schemas.microsoft.com/office/drawing/2014/main" id="{D0170A49-9E36-7E1A-9381-06E90214C509}"/>
+              </a:ext>
+            </a:extLst>
+          </p:cNvPr>
+          <p:cNvSpPr>
+            <a:spLocks noGrp="1"/>
+          </p:cNvSpPr>
+          <p:nvPr>
+            <p:ph type="title"/>
+          </p:nvPr>
+        </p:nvSpPr>
+        <p:spPr/>
+        <p:txBody>
+          <a:bodyPr/>
+          <a:lstStyle/>
+          <a:p>
+            <a:r>
+              <a:rPr lang="en-GB" dirty="0"/>
+              <a:t> Paper Results</a:t>
+            </a:r>
+          </a:p>
+        </p:txBody>
+      </p:sp>
+      <p:sp>
+        <p:nvSpPr>
+          <p:cNvPr id="3" name="Content Placeholder 2">
+            <a:extLst>
+              <a:ext uri="{FF2B5EF4-FFF2-40B4-BE49-F238E27FC236}">
+                <a16:creationId xmlns:a16="http://schemas.microsoft.com/office/drawing/2014/main" id="{96545DF0-1D0B-FFE2-7087-190397A10ED0}"/>
+              </a:ext>
+            </a:extLst>
+          </p:cNvPr>
+          <p:cNvSpPr>
+            <a:spLocks noGrp="1"/>
+          </p:cNvSpPr>
+          <p:nvPr>
+            <p:ph sz="half" idx="1"/>
+          </p:nvPr>
+        </p:nvSpPr>
+        <p:spPr/>
+        <p:txBody>
+          <a:bodyPr/>
+          <a:lstStyle/>
+          <a:p>
+            <a:endParaRPr lang="en-GB" dirty="0"/>
+          </a:p>
+        </p:txBody>
+      </p:sp>
+      <p:sp>
+        <p:nvSpPr>
+          <p:cNvPr id="4" name="Content Placeholder 3">
+            <a:extLst>
+              <a:ext uri="{FF2B5EF4-FFF2-40B4-BE49-F238E27FC236}">
+                <a16:creationId xmlns:a16="http://schemas.microsoft.com/office/drawing/2014/main" id="{D4912B28-7A2C-A0AD-FE30-A17B89525436}"/>
+              </a:ext>
+            </a:extLst>
+          </p:cNvPr>
+          <p:cNvSpPr>
+            <a:spLocks noGrp="1"/>
+          </p:cNvSpPr>
+          <p:nvPr>
+            <p:ph sz="half" idx="2"/>
+          </p:nvPr>
+        </p:nvSpPr>
+        <p:spPr/>
+        <p:txBody>
+          <a:bodyPr/>
+          <a:lstStyle/>
+          <a:p>
+            <a:endParaRPr lang="en-GB"/>
+          </a:p>
+        </p:txBody>
+      </p:sp>
+      <mc:AlternateContent xmlns:mc="http://schemas.openxmlformats.org/markup-compatibility/2006" xmlns:a14="http://schemas.microsoft.com/office/drawing/2010/main">
+        <mc:Choice Requires="a14">
+          <p:sp>
+            <p:nvSpPr>
+              <p:cNvPr id="5" name="Content Placeholder 2">
+                <a:extLst>
+                  <a:ext uri="{FF2B5EF4-FFF2-40B4-BE49-F238E27FC236}">
+                    <a16:creationId xmlns:a16="http://schemas.microsoft.com/office/drawing/2014/main" id="{79844D93-AF0E-828D-3200-D318EF16C1FD}"/>
+                  </a:ext>
+                </a:extLst>
+              </p:cNvPr>
+              <p:cNvSpPr txBox="1">
+                <a:spLocks/>
+              </p:cNvSpPr>
+              <p:nvPr/>
+            </p:nvSpPr>
+            <p:spPr>
+              <a:xfrm>
+                <a:off x="838200" y="1825625"/>
+                <a:ext cx="5181600" cy="4351338"/>
+              </a:xfrm>
+              <a:prstGeom prst="rect">
+                <a:avLst/>
+              </a:prstGeom>
+            </p:spPr>
+            <p:txBody>
+              <a:bodyPr vert="horz" lIns="91440" tIns="45720" rIns="91440" bIns="45720" rtlCol="0">
+                <a:normAutofit lnSpcReduction="10000"/>
+              </a:bodyPr>
+              <a:lstStyle>
+                <a:lvl1pPr marL="228600" indent="-228600" algn="l" defTabSz="914400" rtl="0" eaLnBrk="1" latinLnBrk="0" hangingPunct="1">
+                  <a:lnSpc>
+                    <a:spcPct val="90000"/>
+                  </a:lnSpc>
+                  <a:spcBef>
+                    <a:spcPts val="1000"/>
+                  </a:spcBef>
+                  <a:buFont typeface="Arial" panose="020B0604020202020204" pitchFamily="34" charset="0"/>
+                  <a:buChar char="•"/>
+                  <a:defRPr sz="2800" kern="1200">
+                    <a:solidFill>
+                      <a:schemeClr val="tx1"/>
+                    </a:solidFill>
+                    <a:latin typeface="Times New Roman" panose="02020603050405020304" pitchFamily="18" charset="0"/>
+                    <a:ea typeface="+mn-ea"/>
+                    <a:cs typeface="Times New Roman" panose="02020603050405020304" pitchFamily="18" charset="0"/>
+                  </a:defRPr>
+                </a:lvl1pPr>
+                <a:lvl2pPr marL="685800" indent="-228600" algn="l" defTabSz="914400" rtl="0" eaLnBrk="1" latinLnBrk="0" hangingPunct="1">
+                  <a:lnSpc>
+                    <a:spcPct val="90000"/>
+                  </a:lnSpc>
+                  <a:spcBef>
+                    <a:spcPts val="500"/>
+                  </a:spcBef>
+                  <a:buFont typeface="Arial" panose="020B0604020202020204" pitchFamily="34" charset="0"/>
+                  <a:buChar char="•"/>
+                  <a:defRPr sz="2400" kern="1200">
+                    <a:solidFill>
+                      <a:schemeClr val="tx1"/>
+                    </a:solidFill>
+                    <a:latin typeface="Times New Roman" panose="02020603050405020304" pitchFamily="18" charset="0"/>
+                    <a:ea typeface="+mn-ea"/>
+                    <a:cs typeface="Times New Roman" panose="02020603050405020304" pitchFamily="18" charset="0"/>
+                  </a:defRPr>
+                </a:lvl2pPr>
+                <a:lvl3pPr marL="1143000" indent="-228600" algn="l" defTabSz="914400" rtl="0" eaLnBrk="1" latinLnBrk="0" hangingPunct="1">
+                  <a:lnSpc>
+                    <a:spcPct val="90000"/>
+                  </a:lnSpc>
+                  <a:spcBef>
+                    <a:spcPts val="500"/>
+                  </a:spcBef>
+                  <a:buFont typeface="Arial" panose="020B0604020202020204" pitchFamily="34" charset="0"/>
+                  <a:buChar char="•"/>
+                  <a:defRPr sz="2000" kern="1200">
+                    <a:solidFill>
+                      <a:schemeClr val="tx1"/>
+                    </a:solidFill>
+                    <a:latin typeface="Times New Roman" panose="02020603050405020304" pitchFamily="18" charset="0"/>
+                    <a:ea typeface="+mn-ea"/>
+                    <a:cs typeface="Times New Roman" panose="02020603050405020304" pitchFamily="18" charset="0"/>
+                  </a:defRPr>
+                </a:lvl3pPr>
+                <a:lvl4pPr marL="1600200" indent="-228600" algn="l" defTabSz="914400" rtl="0" eaLnBrk="1" latinLnBrk="0" hangingPunct="1">
+                  <a:lnSpc>
+                    <a:spcPct val="90000"/>
+                  </a:lnSpc>
+                  <a:spcBef>
+                    <a:spcPts val="500"/>
+                  </a:spcBef>
+                  <a:buFont typeface="Arial" panose="020B0604020202020204" pitchFamily="34" charset="0"/>
+                  <a:buChar char="•"/>
+                  <a:defRPr sz="1800" kern="1200">
+                    <a:solidFill>
+                      <a:schemeClr val="tx1"/>
+                    </a:solidFill>
+                    <a:latin typeface="Times New Roman" panose="02020603050405020304" pitchFamily="18" charset="0"/>
+                    <a:ea typeface="+mn-ea"/>
+                    <a:cs typeface="Times New Roman" panose="02020603050405020304" pitchFamily="18" charset="0"/>
+                  </a:defRPr>
+                </a:lvl4pPr>
+                <a:lvl5pPr marL="2057400" indent="-228600" algn="l" defTabSz="914400" rtl="0" eaLnBrk="1" latinLnBrk="0" hangingPunct="1">
+                  <a:lnSpc>
+                    <a:spcPct val="90000"/>
+                  </a:lnSpc>
+                  <a:spcBef>
+                    <a:spcPts val="500"/>
+                  </a:spcBef>
+                  <a:buFont typeface="Arial" panose="020B0604020202020204" pitchFamily="34" charset="0"/>
+                  <a:buChar char="•"/>
+                  <a:defRPr sz="1800" kern="1200">
+                    <a:solidFill>
+                      <a:schemeClr val="tx1"/>
+                    </a:solidFill>
+                    <a:latin typeface="Times New Roman" panose="02020603050405020304" pitchFamily="18" charset="0"/>
+                    <a:ea typeface="+mn-ea"/>
+                    <a:cs typeface="Times New Roman" panose="02020603050405020304" pitchFamily="18" charset="0"/>
+                  </a:defRPr>
+                </a:lvl5pPr>
+                <a:lvl6pPr marL="2514600" indent="-228600" algn="l" defTabSz="914400" rtl="0" eaLnBrk="1" latinLnBrk="0" hangingPunct="1">
+                  <a:lnSpc>
+                    <a:spcPct val="90000"/>
+                  </a:lnSpc>
+                  <a:spcBef>
+                    <a:spcPts val="500"/>
+                  </a:spcBef>
+                  <a:buFont typeface="Arial" panose="020B0604020202020204" pitchFamily="34" charset="0"/>
+                  <a:buChar char="•"/>
+                  <a:defRPr sz="1800" kern="1200">
+                    <a:solidFill>
+                      <a:schemeClr val="tx1"/>
+                    </a:solidFill>
+                    <a:latin typeface="+mn-lt"/>
+                    <a:ea typeface="+mn-ea"/>
+                    <a:cs typeface="+mn-cs"/>
+                  </a:defRPr>
+                </a:lvl6pPr>
+                <a:lvl7pPr marL="2971800" indent="-228600" algn="l" defTabSz="914400" rtl="0" eaLnBrk="1" latinLnBrk="0" hangingPunct="1">
+                  <a:lnSpc>
+                    <a:spcPct val="90000"/>
+                  </a:lnSpc>
+                  <a:spcBef>
+                    <a:spcPts val="500"/>
+                  </a:spcBef>
+                  <a:buFont typeface="Arial" panose="020B0604020202020204" pitchFamily="34" charset="0"/>
+                  <a:buChar char="•"/>
+                  <a:defRPr sz="1800" kern="1200">
+                    <a:solidFill>
+                      <a:schemeClr val="tx1"/>
+                    </a:solidFill>
+                    <a:latin typeface="+mn-lt"/>
+                    <a:ea typeface="+mn-ea"/>
+                    <a:cs typeface="+mn-cs"/>
+                  </a:defRPr>
+                </a:lvl7pPr>
+                <a:lvl8pPr marL="3429000" indent="-228600" algn="l" defTabSz="914400" rtl="0" eaLnBrk="1" latinLnBrk="0" hangingPunct="1">
+                  <a:lnSpc>
+                    <a:spcPct val="90000"/>
+                  </a:lnSpc>
+                  <a:spcBef>
+                    <a:spcPts val="500"/>
+                  </a:spcBef>
+                  <a:buFont typeface="Arial" panose="020B0604020202020204" pitchFamily="34" charset="0"/>
+                  <a:buChar char="•"/>
+                  <a:defRPr sz="1800" kern="1200">
+                    <a:solidFill>
+                      <a:schemeClr val="tx1"/>
+                    </a:solidFill>
+                    <a:latin typeface="+mn-lt"/>
+                    <a:ea typeface="+mn-ea"/>
+                    <a:cs typeface="+mn-cs"/>
+                  </a:defRPr>
+                </a:lvl8pPr>
+                <a:lvl9pPr marL="3886200" indent="-228600" algn="l" defTabSz="914400" rtl="0" eaLnBrk="1" latinLnBrk="0" hangingPunct="1">
+                  <a:lnSpc>
+                    <a:spcPct val="90000"/>
+                  </a:lnSpc>
+                  <a:spcBef>
+                    <a:spcPts val="500"/>
+                  </a:spcBef>
+                  <a:buFont typeface="Arial" panose="020B0604020202020204" pitchFamily="34" charset="0"/>
+                  <a:buChar char="•"/>
+                  <a:defRPr sz="1800" kern="1200">
+                    <a:solidFill>
+                      <a:schemeClr val="tx1"/>
+                    </a:solidFill>
+                    <a:latin typeface="+mn-lt"/>
+                    <a:ea typeface="+mn-ea"/>
+                    <a:cs typeface="+mn-cs"/>
+                  </a:defRPr>
+                </a:lvl9pPr>
+              </a:lstStyle>
+              <a:p>
+                <a:pPr marL="0" indent="0">
+                  <a:buFont typeface="Arial" panose="020B0604020202020204" pitchFamily="34" charset="0"/>
+                  <a:buNone/>
+                </a:pPr>
+                <a:endParaRPr lang="en-US" dirty="0">
+                  <a:latin typeface="Cambria Math" panose="02040503050406030204" pitchFamily="18" charset="0"/>
+                </a:endParaRPr>
+              </a:p>
+              <a:p>
+                <a:pPr marL="0" indent="0">
+                  <a:buFont typeface="Arial" panose="020B0604020202020204" pitchFamily="34" charset="0"/>
+                  <a:buNone/>
+                </a:pPr>
+                <a:endParaRPr lang="en-US" dirty="0">
+                  <a:latin typeface="Cambria Math" panose="02040503050406030204" pitchFamily="18" charset="0"/>
+                </a:endParaRPr>
+              </a:p>
+              <a:p>
+                <a:pPr marL="0" indent="0">
+                  <a:buFont typeface="Arial" panose="020B0604020202020204" pitchFamily="34" charset="0"/>
+                  <a:buNone/>
+                </a:pPr>
+                <a:endParaRPr lang="en-US" dirty="0">
+                  <a:latin typeface="Cambria Math" panose="02040503050406030204" pitchFamily="18" charset="0"/>
+                </a:endParaRPr>
+              </a:p>
+              <a:p>
+                <a:pPr marL="0" indent="0">
+                  <a:buFont typeface="Arial" panose="020B0604020202020204" pitchFamily="34" charset="0"/>
+                  <a:buNone/>
+                </a:pPr>
+                <a:endParaRPr lang="en-US" dirty="0">
+                  <a:latin typeface="Cambria Math" panose="02040503050406030204" pitchFamily="18" charset="0"/>
+                </a:endParaRPr>
+              </a:p>
+              <a:p>
+                <a:pPr marL="0" indent="0">
+                  <a:buFont typeface="Arial" panose="020B0604020202020204" pitchFamily="34" charset="0"/>
+                  <a:buNone/>
+                </a:pPr>
+                <a:endParaRPr lang="en-US" dirty="0">
+                  <a:latin typeface="Cambria Math" panose="02040503050406030204" pitchFamily="18" charset="0"/>
+                </a:endParaRPr>
+              </a:p>
+              <a:p>
+                <a:pPr marL="0" indent="0">
+                  <a:buFont typeface="Arial" panose="020B0604020202020204" pitchFamily="34" charset="0"/>
+                  <a:buNone/>
+                </a:pPr>
+                <a:endParaRPr lang="en-US" dirty="0">
+                  <a:latin typeface="Cambria Math" panose="02040503050406030204" pitchFamily="18" charset="0"/>
+                </a:endParaRPr>
+              </a:p>
+              <a:p>
+                <a:pPr marL="0" indent="0">
+                  <a:buFont typeface="Arial" panose="020B0604020202020204" pitchFamily="34" charset="0"/>
+                  <a:buNone/>
+                </a:pPr>
+                <a:endParaRPr lang="en-US" dirty="0">
+                  <a:latin typeface="Cambria Math" panose="02040503050406030204" pitchFamily="18" charset="0"/>
+                </a:endParaRPr>
+              </a:p>
+              <a:p>
+                <a:pPr marL="0" indent="0">
+                  <a:buFont typeface="Arial" panose="020B0604020202020204" pitchFamily="34" charset="0"/>
+                  <a:buNone/>
+                </a:pPr>
+                <a:endParaRPr lang="en-US" dirty="0">
+                  <a:latin typeface="Cambria Math" panose="02040503050406030204" pitchFamily="18" charset="0"/>
+                </a:endParaRPr>
+              </a:p>
+              <a:p>
+                <a:pPr marL="0" indent="0">
+                  <a:buFont typeface="Arial" panose="020B0604020202020204" pitchFamily="34" charset="0"/>
+                  <a:buNone/>
+                </a:pPr>
+                <a14:m>
+                  <m:oMathPara xmlns:m="http://schemas.openxmlformats.org/officeDocument/2006/math">
+                    <m:oMathParaPr>
+                      <m:jc m:val="centerGroup"/>
+                    </m:oMathParaPr>
+                    <m:oMath xmlns:m="http://schemas.openxmlformats.org/officeDocument/2006/math">
+                      <m:r>
+                        <m:rPr>
+                          <m:nor/>
+                        </m:rPr>
+                        <a:rPr lang="en-US" i="0" smtClean="0">
+                          <a:latin typeface="Cambria Math" panose="02040503050406030204" pitchFamily="18" charset="0"/>
+                        </a:rPr>
+                        <m:t>L</m:t>
+                      </m:r>
+                      <m:r>
+                        <m:rPr>
+                          <m:nor/>
+                        </m:rPr>
+                        <a:rPr lang="en-US" i="0" smtClean="0">
+                          <a:latin typeface="Cambria Math" panose="02040503050406030204" pitchFamily="18" charset="0"/>
+                        </a:rPr>
+                        <m:t>2</m:t>
+                      </m:r>
+                      <m:r>
+                        <m:rPr>
+                          <m:nor/>
+                        </m:rPr>
+                        <a:rPr lang="en-US" i="0" smtClean="0">
+                          <a:latin typeface="Cambria Math" panose="02040503050406030204" pitchFamily="18" charset="0"/>
+                        </a:rPr>
+                        <m:t>RE</m:t>
+                      </m:r>
+                      <m:r>
+                        <a:rPr lang="en-US" i="1" smtClean="0">
+                          <a:latin typeface="Cambria Math" panose="02040503050406030204" pitchFamily="18" charset="0"/>
+                        </a:rPr>
+                        <m:t>=0.0172±0.0040</m:t>
+                      </m:r>
+                    </m:oMath>
+                  </m:oMathPara>
+                </a14:m>
+                <a:endParaRPr lang="en-US" dirty="0"/>
+              </a:p>
+              <a:p>
+                <a:pPr marL="0" indent="0">
+                  <a:buFont typeface="Arial" panose="020B0604020202020204" pitchFamily="34" charset="0"/>
+                  <a:buNone/>
+                </a:pPr>
+                <a:endParaRPr lang="en-GB" dirty="0"/>
+              </a:p>
+            </p:txBody>
+          </p:sp>
+        </mc:Choice>
+        <mc:Fallback xmlns="">
+          <p:sp>
+            <p:nvSpPr>
+              <p:cNvPr id="5" name="Content Placeholder 2">
+                <a:extLst>
+                  <a:ext uri="{FF2B5EF4-FFF2-40B4-BE49-F238E27FC236}">
+                    <a16:creationId xmlns:a16="http://schemas.microsoft.com/office/drawing/2014/main" id="{79844D93-AF0E-828D-3200-D318EF16C1FD}"/>
+                  </a:ext>
+                </a:extLst>
+              </p:cNvPr>
+              <p:cNvSpPr txBox="1">
+                <a:spLocks noRot="1" noChangeAspect="1" noMove="1" noResize="1" noEditPoints="1" noAdjustHandles="1" noChangeArrowheads="1" noChangeShapeType="1" noTextEdit="1"/>
+              </p:cNvSpPr>
+              <p:nvPr/>
+            </p:nvSpPr>
+            <p:spPr>
+              <a:xfrm>
+                <a:off x="838200" y="1825625"/>
+                <a:ext cx="5181600" cy="4351338"/>
+              </a:xfrm>
+              <a:prstGeom prst="rect">
+                <a:avLst/>
+              </a:prstGeom>
+              <a:blipFill>
+                <a:blip r:embed="rId2"/>
+                <a:stretch>
+                  <a:fillRect/>
+                </a:stretch>
+              </a:blipFill>
+            </p:spPr>
+            <p:txBody>
+              <a:bodyPr/>
+              <a:lstStyle/>
+              <a:p>
+                <a:r>
+                  <a:rPr lang="en-GB">
+                    <a:noFill/>
+                  </a:rPr>
+                  <a:t> </a:t>
+                </a:r>
+              </a:p>
+            </p:txBody>
+          </p:sp>
+        </mc:Fallback>
+      </mc:AlternateContent>
+      <mc:AlternateContent xmlns:mc="http://schemas.openxmlformats.org/markup-compatibility/2006" xmlns:a14="http://schemas.microsoft.com/office/drawing/2010/main">
+        <mc:Choice Requires="a14">
+          <p:sp>
+            <p:nvSpPr>
+              <p:cNvPr id="6" name="Content Placeholder 3">
+                <a:extLst>
+                  <a:ext uri="{FF2B5EF4-FFF2-40B4-BE49-F238E27FC236}">
+                    <a16:creationId xmlns:a16="http://schemas.microsoft.com/office/drawing/2014/main" id="{CE8B227F-10DE-3EC5-9FE8-3C2C3520F431}"/>
+                  </a:ext>
+                </a:extLst>
+              </p:cNvPr>
+              <p:cNvSpPr txBox="1">
+                <a:spLocks/>
+              </p:cNvSpPr>
+              <p:nvPr/>
+            </p:nvSpPr>
+            <p:spPr>
+              <a:xfrm>
+                <a:off x="6172200" y="1825625"/>
+                <a:ext cx="5181600" cy="4351338"/>
+              </a:xfrm>
+              <a:prstGeom prst="rect">
+                <a:avLst/>
+              </a:prstGeom>
+            </p:spPr>
+            <p:txBody>
+              <a:bodyPr vert="horz" lIns="91440" tIns="45720" rIns="91440" bIns="45720" rtlCol="0">
+                <a:normAutofit lnSpcReduction="10000"/>
+              </a:bodyPr>
+              <a:lstStyle>
+                <a:lvl1pPr marL="228600" indent="-228600" algn="l" defTabSz="914400" rtl="0" eaLnBrk="1" latinLnBrk="0" hangingPunct="1">
+                  <a:lnSpc>
+                    <a:spcPct val="90000"/>
+                  </a:lnSpc>
+                  <a:spcBef>
+                    <a:spcPts val="1000"/>
+                  </a:spcBef>
+                  <a:buFont typeface="Arial" panose="020B0604020202020204" pitchFamily="34" charset="0"/>
+                  <a:buChar char="•"/>
+                  <a:defRPr sz="2800" kern="1200">
+                    <a:solidFill>
+                      <a:schemeClr val="tx1"/>
+                    </a:solidFill>
+                    <a:latin typeface="Times New Roman" panose="02020603050405020304" pitchFamily="18" charset="0"/>
+                    <a:ea typeface="+mn-ea"/>
+                    <a:cs typeface="Times New Roman" panose="02020603050405020304" pitchFamily="18" charset="0"/>
+                  </a:defRPr>
+                </a:lvl1pPr>
+                <a:lvl2pPr marL="685800" indent="-228600" algn="l" defTabSz="914400" rtl="0" eaLnBrk="1" latinLnBrk="0" hangingPunct="1">
+                  <a:lnSpc>
+                    <a:spcPct val="90000"/>
+                  </a:lnSpc>
+                  <a:spcBef>
+                    <a:spcPts val="500"/>
+                  </a:spcBef>
+                  <a:buFont typeface="Arial" panose="020B0604020202020204" pitchFamily="34" charset="0"/>
+                  <a:buChar char="•"/>
+                  <a:defRPr sz="2400" kern="1200">
+                    <a:solidFill>
+                      <a:schemeClr val="tx1"/>
+                    </a:solidFill>
+                    <a:latin typeface="Times New Roman" panose="02020603050405020304" pitchFamily="18" charset="0"/>
+                    <a:ea typeface="+mn-ea"/>
+                    <a:cs typeface="Times New Roman" panose="02020603050405020304" pitchFamily="18" charset="0"/>
+                  </a:defRPr>
+                </a:lvl2pPr>
+                <a:lvl3pPr marL="1143000" indent="-228600" algn="l" defTabSz="914400" rtl="0" eaLnBrk="1" latinLnBrk="0" hangingPunct="1">
+                  <a:lnSpc>
+                    <a:spcPct val="90000"/>
+                  </a:lnSpc>
+                  <a:spcBef>
+                    <a:spcPts val="500"/>
+                  </a:spcBef>
+                  <a:buFont typeface="Arial" panose="020B0604020202020204" pitchFamily="34" charset="0"/>
+                  <a:buChar char="•"/>
+                  <a:defRPr sz="2000" kern="1200">
+                    <a:solidFill>
+                      <a:schemeClr val="tx1"/>
+                    </a:solidFill>
+                    <a:latin typeface="Times New Roman" panose="02020603050405020304" pitchFamily="18" charset="0"/>
+                    <a:ea typeface="+mn-ea"/>
+                    <a:cs typeface="Times New Roman" panose="02020603050405020304" pitchFamily="18" charset="0"/>
+                  </a:defRPr>
+                </a:lvl3pPr>
+                <a:lvl4pPr marL="1600200" indent="-228600" algn="l" defTabSz="914400" rtl="0" eaLnBrk="1" latinLnBrk="0" hangingPunct="1">
+                  <a:lnSpc>
+                    <a:spcPct val="90000"/>
+                  </a:lnSpc>
+                  <a:spcBef>
+                    <a:spcPts val="500"/>
+                  </a:spcBef>
+                  <a:buFont typeface="Arial" panose="020B0604020202020204" pitchFamily="34" charset="0"/>
+                  <a:buChar char="•"/>
+                  <a:defRPr sz="1800" kern="1200">
+                    <a:solidFill>
+                      <a:schemeClr val="tx1"/>
+                    </a:solidFill>
+                    <a:latin typeface="Times New Roman" panose="02020603050405020304" pitchFamily="18" charset="0"/>
+                    <a:ea typeface="+mn-ea"/>
+                    <a:cs typeface="Times New Roman" panose="02020603050405020304" pitchFamily="18" charset="0"/>
+                  </a:defRPr>
+                </a:lvl4pPr>
+                <a:lvl5pPr marL="2057400" indent="-228600" algn="l" defTabSz="914400" rtl="0" eaLnBrk="1" latinLnBrk="0" hangingPunct="1">
+                  <a:lnSpc>
+                    <a:spcPct val="90000"/>
+                  </a:lnSpc>
+                  <a:spcBef>
+                    <a:spcPts val="500"/>
+                  </a:spcBef>
+                  <a:buFont typeface="Arial" panose="020B0604020202020204" pitchFamily="34" charset="0"/>
+                  <a:buChar char="•"/>
+                  <a:defRPr sz="1800" kern="1200">
+                    <a:solidFill>
+                      <a:schemeClr val="tx1"/>
+                    </a:solidFill>
+                    <a:latin typeface="Times New Roman" panose="02020603050405020304" pitchFamily="18" charset="0"/>
+                    <a:ea typeface="+mn-ea"/>
+                    <a:cs typeface="Times New Roman" panose="02020603050405020304" pitchFamily="18" charset="0"/>
+                  </a:defRPr>
+                </a:lvl5pPr>
+                <a:lvl6pPr marL="2514600" indent="-228600" algn="l" defTabSz="914400" rtl="0" eaLnBrk="1" latinLnBrk="0" hangingPunct="1">
+                  <a:lnSpc>
+                    <a:spcPct val="90000"/>
+                  </a:lnSpc>
+                  <a:spcBef>
+                    <a:spcPts val="500"/>
+                  </a:spcBef>
+                  <a:buFont typeface="Arial" panose="020B0604020202020204" pitchFamily="34" charset="0"/>
+                  <a:buChar char="•"/>
+                  <a:defRPr sz="1800" kern="1200">
+                    <a:solidFill>
+                      <a:schemeClr val="tx1"/>
+                    </a:solidFill>
+                    <a:latin typeface="+mn-lt"/>
+                    <a:ea typeface="+mn-ea"/>
+                    <a:cs typeface="+mn-cs"/>
+                  </a:defRPr>
+                </a:lvl6pPr>
+                <a:lvl7pPr marL="2971800" indent="-228600" algn="l" defTabSz="914400" rtl="0" eaLnBrk="1" latinLnBrk="0" hangingPunct="1">
+                  <a:lnSpc>
+                    <a:spcPct val="90000"/>
+                  </a:lnSpc>
+                  <a:spcBef>
+                    <a:spcPts val="500"/>
+                  </a:spcBef>
+                  <a:buFont typeface="Arial" panose="020B0604020202020204" pitchFamily="34" charset="0"/>
+                  <a:buChar char="•"/>
+                  <a:defRPr sz="1800" kern="1200">
+                    <a:solidFill>
+                      <a:schemeClr val="tx1"/>
+                    </a:solidFill>
+                    <a:latin typeface="+mn-lt"/>
+                    <a:ea typeface="+mn-ea"/>
+                    <a:cs typeface="+mn-cs"/>
+                  </a:defRPr>
+                </a:lvl7pPr>
+                <a:lvl8pPr marL="3429000" indent="-228600" algn="l" defTabSz="914400" rtl="0" eaLnBrk="1" latinLnBrk="0" hangingPunct="1">
+                  <a:lnSpc>
+                    <a:spcPct val="90000"/>
+                  </a:lnSpc>
+                  <a:spcBef>
+                    <a:spcPts val="500"/>
+                  </a:spcBef>
+                  <a:buFont typeface="Arial" panose="020B0604020202020204" pitchFamily="34" charset="0"/>
+                  <a:buChar char="•"/>
+                  <a:defRPr sz="1800" kern="1200">
+                    <a:solidFill>
+                      <a:schemeClr val="tx1"/>
+                    </a:solidFill>
+                    <a:latin typeface="+mn-lt"/>
+                    <a:ea typeface="+mn-ea"/>
+                    <a:cs typeface="+mn-cs"/>
+                  </a:defRPr>
+                </a:lvl8pPr>
+                <a:lvl9pPr marL="3886200" indent="-228600" algn="l" defTabSz="914400" rtl="0" eaLnBrk="1" latinLnBrk="0" hangingPunct="1">
+                  <a:lnSpc>
+                    <a:spcPct val="90000"/>
+                  </a:lnSpc>
+                  <a:spcBef>
+                    <a:spcPts val="500"/>
+                  </a:spcBef>
+                  <a:buFont typeface="Arial" panose="020B0604020202020204" pitchFamily="34" charset="0"/>
+                  <a:buChar char="•"/>
+                  <a:defRPr sz="1800" kern="1200">
+                    <a:solidFill>
+                      <a:schemeClr val="tx1"/>
+                    </a:solidFill>
+                    <a:latin typeface="+mn-lt"/>
+                    <a:ea typeface="+mn-ea"/>
+                    <a:cs typeface="+mn-cs"/>
+                  </a:defRPr>
+                </a:lvl9pPr>
+              </a:lstStyle>
+              <a:p>
+                <a:pPr marL="0" indent="0">
+                  <a:buFont typeface="Arial" panose="020B0604020202020204" pitchFamily="34" charset="0"/>
+                  <a:buNone/>
+                </a:pPr>
+                <a:endParaRPr lang="en-US" dirty="0">
+                  <a:latin typeface="Cambria Math" panose="02040503050406030204" pitchFamily="18" charset="0"/>
+                </a:endParaRPr>
+              </a:p>
+              <a:p>
+                <a:pPr marL="0" indent="0">
+                  <a:buFont typeface="Arial" panose="020B0604020202020204" pitchFamily="34" charset="0"/>
+                  <a:buNone/>
+                </a:pPr>
+                <a:endParaRPr lang="en-US" dirty="0">
+                  <a:latin typeface="Cambria Math" panose="02040503050406030204" pitchFamily="18" charset="0"/>
+                </a:endParaRPr>
+              </a:p>
+              <a:p>
+                <a:pPr marL="0" indent="0">
+                  <a:buFont typeface="Arial" panose="020B0604020202020204" pitchFamily="34" charset="0"/>
+                  <a:buNone/>
+                </a:pPr>
+                <a:endParaRPr lang="en-US" dirty="0">
+                  <a:latin typeface="Cambria Math" panose="02040503050406030204" pitchFamily="18" charset="0"/>
+                </a:endParaRPr>
+              </a:p>
+              <a:p>
+                <a:pPr marL="0" indent="0">
+                  <a:buFont typeface="Arial" panose="020B0604020202020204" pitchFamily="34" charset="0"/>
+                  <a:buNone/>
+                </a:pPr>
+                <a:endParaRPr lang="en-US" dirty="0">
+                  <a:latin typeface="Cambria Math" panose="02040503050406030204" pitchFamily="18" charset="0"/>
+                </a:endParaRPr>
+              </a:p>
+              <a:p>
+                <a:pPr marL="0" indent="0">
+                  <a:buFont typeface="Arial" panose="020B0604020202020204" pitchFamily="34" charset="0"/>
+                  <a:buNone/>
+                </a:pPr>
+                <a:endParaRPr lang="en-US" dirty="0">
+                  <a:latin typeface="Cambria Math" panose="02040503050406030204" pitchFamily="18" charset="0"/>
+                </a:endParaRPr>
+              </a:p>
+              <a:p>
+                <a:pPr marL="0" indent="0">
+                  <a:buFont typeface="Arial" panose="020B0604020202020204" pitchFamily="34" charset="0"/>
+                  <a:buNone/>
+                </a:pPr>
+                <a:endParaRPr lang="en-US" dirty="0">
+                  <a:latin typeface="Cambria Math" panose="02040503050406030204" pitchFamily="18" charset="0"/>
+                </a:endParaRPr>
+              </a:p>
+              <a:p>
+                <a:pPr marL="0" indent="0">
+                  <a:buFont typeface="Arial" panose="020B0604020202020204" pitchFamily="34" charset="0"/>
+                  <a:buNone/>
+                </a:pPr>
+                <a:endParaRPr lang="en-US" dirty="0">
+                  <a:latin typeface="Cambria Math" panose="02040503050406030204" pitchFamily="18" charset="0"/>
+                </a:endParaRPr>
+              </a:p>
+              <a:p>
+                <a:pPr marL="0" indent="0">
+                  <a:buFont typeface="Arial" panose="020B0604020202020204" pitchFamily="34" charset="0"/>
+                  <a:buNone/>
+                </a:pPr>
+                <a:endParaRPr lang="en-US" dirty="0">
+                  <a:latin typeface="Cambria Math" panose="02040503050406030204" pitchFamily="18" charset="0"/>
+                </a:endParaRPr>
+              </a:p>
+              <a:p>
+                <a:pPr marL="0" indent="0">
+                  <a:buFont typeface="Arial" panose="020B0604020202020204" pitchFamily="34" charset="0"/>
+                  <a:buNone/>
+                </a:pPr>
+                <a14:m>
+                  <m:oMathPara xmlns:m="http://schemas.openxmlformats.org/officeDocument/2006/math">
+                    <m:oMathParaPr>
+                      <m:jc m:val="centerGroup"/>
+                    </m:oMathParaPr>
+                    <m:oMath xmlns:m="http://schemas.openxmlformats.org/officeDocument/2006/math">
+                      <m:r>
+                        <m:rPr>
+                          <m:nor/>
+                        </m:rPr>
+                        <a:rPr lang="en-US" i="0" smtClean="0">
+                          <a:latin typeface="Cambria Math" panose="02040503050406030204" pitchFamily="18" charset="0"/>
+                        </a:rPr>
+                        <m:t>L</m:t>
+                      </m:r>
+                      <m:r>
+                        <m:rPr>
+                          <m:nor/>
+                        </m:rPr>
+                        <a:rPr lang="en-US" i="0" smtClean="0">
+                          <a:latin typeface="Cambria Math" panose="02040503050406030204" pitchFamily="18" charset="0"/>
+                        </a:rPr>
+                        <m:t>2</m:t>
+                      </m:r>
+                      <m:r>
+                        <m:rPr>
+                          <m:nor/>
+                        </m:rPr>
+                        <a:rPr lang="en-US" i="0" smtClean="0">
+                          <a:latin typeface="Cambria Math" panose="02040503050406030204" pitchFamily="18" charset="0"/>
+                        </a:rPr>
+                        <m:t>RE</m:t>
+                      </m:r>
+                      <m:r>
+                        <a:rPr lang="en-US" i="1" smtClean="0">
+                          <a:latin typeface="Cambria Math" panose="02040503050406030204" pitchFamily="18" charset="0"/>
+                        </a:rPr>
+                        <m:t>=0.0077±0.0007</m:t>
+                      </m:r>
+                    </m:oMath>
+                  </m:oMathPara>
+                </a14:m>
+                <a:endParaRPr lang="en-US" dirty="0"/>
+              </a:p>
+              <a:p>
+                <a:pPr marL="0" indent="0">
+                  <a:buFont typeface="Arial" panose="020B0604020202020204" pitchFamily="34" charset="0"/>
+                  <a:buNone/>
+                </a:pPr>
+                <a:endParaRPr lang="en-GB" dirty="0"/>
+              </a:p>
+            </p:txBody>
+          </p:sp>
+        </mc:Choice>
+        <mc:Fallback xmlns="">
+          <p:sp>
+            <p:nvSpPr>
+              <p:cNvPr id="6" name="Content Placeholder 3">
+                <a:extLst>
+                  <a:ext uri="{FF2B5EF4-FFF2-40B4-BE49-F238E27FC236}">
+                    <a16:creationId xmlns:a16="http://schemas.microsoft.com/office/drawing/2014/main" id="{CE8B227F-10DE-3EC5-9FE8-3C2C3520F431}"/>
+                  </a:ext>
+                </a:extLst>
+              </p:cNvPr>
+              <p:cNvSpPr txBox="1">
+                <a:spLocks noRot="1" noChangeAspect="1" noMove="1" noResize="1" noEditPoints="1" noAdjustHandles="1" noChangeArrowheads="1" noChangeShapeType="1" noTextEdit="1"/>
+              </p:cNvSpPr>
+              <p:nvPr/>
+            </p:nvSpPr>
+            <p:spPr>
+              <a:xfrm>
+                <a:off x="6172200" y="1825625"/>
+                <a:ext cx="5181600" cy="4351338"/>
+              </a:xfrm>
+              <a:prstGeom prst="rect">
+                <a:avLst/>
+              </a:prstGeom>
+              <a:blipFill>
+                <a:blip r:embed="rId3"/>
+                <a:stretch>
+                  <a:fillRect/>
+                </a:stretch>
+              </a:blipFill>
+            </p:spPr>
+            <p:txBody>
+              <a:bodyPr/>
+              <a:lstStyle/>
+              <a:p>
+                <a:r>
+                  <a:rPr lang="en-GB">
+                    <a:noFill/>
+                  </a:rPr>
+                  <a:t> </a:t>
+                </a:r>
+              </a:p>
+            </p:txBody>
+          </p:sp>
+        </mc:Fallback>
+      </mc:AlternateContent>
+      <p:pic>
+        <p:nvPicPr>
+          <p:cNvPr id="7" name="Picture 6">
+            <a:extLst>
+              <a:ext uri="{FF2B5EF4-FFF2-40B4-BE49-F238E27FC236}">
+                <a16:creationId xmlns:a16="http://schemas.microsoft.com/office/drawing/2014/main" id="{C05BD518-51ED-62B3-0499-EB3C1986F6CF}"/>
+              </a:ext>
+            </a:extLst>
+          </p:cNvPr>
+          <p:cNvPicPr>
+            <a:picLocks noChangeAspect="1"/>
+          </p:cNvPicPr>
+          <p:nvPr/>
+        </p:nvPicPr>
+        <p:blipFill>
+          <a:blip r:embed="rId4">
+            <a:extLst>
+              <a:ext uri="{28A0092B-C50C-407E-A947-70E740481C1C}">
+                <a14:useLocalDpi xmlns:a14="http://schemas.microsoft.com/office/drawing/2010/main" val="0"/>
+              </a:ext>
+            </a:extLst>
+          </a:blip>
+          <a:stretch>
+            <a:fillRect/>
+          </a:stretch>
+        </p:blipFill>
+        <p:spPr>
+          <a:xfrm>
+            <a:off x="6134995" y="1688194"/>
+            <a:ext cx="5326294" cy="3150231"/>
+          </a:xfrm>
+          <a:prstGeom prst="rect">
+            <a:avLst/>
+          </a:prstGeom>
+        </p:spPr>
+      </p:pic>
+      <p:pic>
+        <p:nvPicPr>
+          <p:cNvPr id="8" name="Picture 7">
+            <a:extLst>
+              <a:ext uri="{FF2B5EF4-FFF2-40B4-BE49-F238E27FC236}">
+                <a16:creationId xmlns:a16="http://schemas.microsoft.com/office/drawing/2014/main" id="{6AD27F1C-9BC8-688C-DBF8-62FA7B104874}"/>
+              </a:ext>
+            </a:extLst>
+          </p:cNvPr>
+          <p:cNvPicPr>
+            <a:picLocks noChangeAspect="1"/>
+          </p:cNvPicPr>
+          <p:nvPr/>
+        </p:nvPicPr>
+        <p:blipFill>
+          <a:blip r:embed="rId5">
+            <a:extLst>
+              <a:ext uri="{28A0092B-C50C-407E-A947-70E740481C1C}">
+                <a14:useLocalDpi xmlns:a14="http://schemas.microsoft.com/office/drawing/2010/main" val="0"/>
+              </a:ext>
+            </a:extLst>
+          </a:blip>
+          <a:stretch>
+            <a:fillRect/>
+          </a:stretch>
+        </p:blipFill>
+        <p:spPr>
+          <a:xfrm>
+            <a:off x="723005" y="1690688"/>
+            <a:ext cx="5296795" cy="3147737"/>
+          </a:xfrm>
+          <a:prstGeom prst="rect">
+            <a:avLst/>
+          </a:prstGeom>
+        </p:spPr>
+      </p:pic>
+    </p:spTree>
+    <p:extLst>
+      <p:ext uri="{BB962C8B-B14F-4D97-AF65-F5344CB8AC3E}">
+        <p14:creationId xmlns:p14="http://schemas.microsoft.com/office/powerpoint/2010/main" val="3004697908"/>
+      </p:ext>
+    </p:extLst>
+  </p:cSld>
+  <p:clrMapOvr>
+    <a:masterClrMapping/>
+  </p:clrMapOvr>
+  <p:timing>
+    <p:tnLst>
+      <p:par>
+        <p:cTn id="1" dur="indefinite" restart="never" nodeType="tmRoot">
+          <p:childTnLst>
+            <p:seq concurrent="1" nextAc="seek">
+              <p:cTn id="2" dur="indefinite" nodeType="mainSeq">
+                <p:childTnLst>
+                  <p:par>
+                    <p:cTn id="3" fill="hold">
+                      <p:stCondLst>
+                        <p:cond delay="indefinite"/>
+                      </p:stCondLst>
+                      <p:childTnLst>
+                        <p:par>
+                          <p:cTn id="4" fill="hold">
+                            <p:stCondLst>
+                              <p:cond delay="0"/>
+                            </p:stCondLst>
+                            <p:childTnLst>
+                              <p:par>
+                                <p:cTn id="5" presetID="1" presetClass="entr" presetSubtype="0" fill="hold" nodeType="clickEffect">
+                                  <p:stCondLst>
+                                    <p:cond delay="0"/>
+                                  </p:stCondLst>
+                                  <p:childTnLst>
+                                    <p:set>
+                                      <p:cBhvr>
+                                        <p:cTn id="6" dur="1" fill="hold">
+                                          <p:stCondLst>
+                                            <p:cond delay="0"/>
+                                          </p:stCondLst>
+                                        </p:cTn>
+                                        <p:tgtEl>
+                                          <p:spTgt spid="8"/>
+                                        </p:tgtEl>
+                                        <p:attrNameLst>
+                                          <p:attrName>style.visibility</p:attrName>
+                                        </p:attrNameLst>
+                                      </p:cBhvr>
+                                      <p:to>
+                                        <p:strVal val="visible"/>
+                                      </p:to>
+                                    </p:set>
+                                  </p:childTnLst>
+                                </p:cTn>
+                              </p:par>
+                              <p:par>
+                                <p:cTn id="7" presetID="1" presetClass="entr" presetSubtype="0" fill="hold" grpId="0" nodeType="withEffect">
+                                  <p:stCondLst>
+                                    <p:cond delay="0"/>
+                                  </p:stCondLst>
+                                  <p:childTnLst>
+                                    <p:set>
+                                      <p:cBhvr>
+                                        <p:cTn id="8" dur="1" fill="hold">
+                                          <p:stCondLst>
+                                            <p:cond delay="0"/>
+                                          </p:stCondLst>
+                                        </p:cTn>
+                                        <p:tgtEl>
+                                          <p:spTgt spid="5">
+                                            <p:txEl>
+                                              <p:pRg st="8" end="8"/>
+                                            </p:txEl>
+                                          </p:spTgt>
+                                        </p:tgtEl>
+                                        <p:attrNameLst>
+                                          <p:attrName>style.visibility</p:attrName>
+                                        </p:attrNameLst>
+                                      </p:cBhvr>
+                                      <p:to>
+                                        <p:strVal val="visible"/>
+                                      </p:to>
+                                    </p:set>
+                                  </p:childTnLst>
+                                </p:cTn>
+                              </p:par>
+                            </p:childTnLst>
+                          </p:cTn>
+                        </p:par>
+                      </p:childTnLst>
+                    </p:cTn>
+                  </p:par>
+                  <p:par>
+                    <p:cTn id="9" fill="hold">
+                      <p:stCondLst>
+                        <p:cond delay="indefinite"/>
+                      </p:stCondLst>
+                      <p:childTnLst>
+                        <p:par>
+                          <p:cTn id="10" fill="hold">
+                            <p:stCondLst>
+                              <p:cond delay="0"/>
+                            </p:stCondLst>
+                            <p:childTnLst>
+                              <p:par>
+                                <p:cTn id="11" presetID="1" presetClass="entr" presetSubtype="0" fill="hold" nodeType="clickEffect">
+                                  <p:stCondLst>
+                                    <p:cond delay="0"/>
+                                  </p:stCondLst>
+                                  <p:childTnLst>
+                                    <p:set>
+                                      <p:cBhvr>
+                                        <p:cTn id="12" dur="1" fill="hold">
+                                          <p:stCondLst>
+                                            <p:cond delay="0"/>
+                                          </p:stCondLst>
+                                        </p:cTn>
+                                        <p:tgtEl>
+                                          <p:spTgt spid="7"/>
+                                        </p:tgtEl>
+                                        <p:attrNameLst>
+                                          <p:attrName>style.visibility</p:attrName>
+                                        </p:attrNameLst>
+                                      </p:cBhvr>
+                                      <p:to>
+                                        <p:strVal val="visible"/>
+                                      </p:to>
+                                    </p:set>
+                                  </p:childTnLst>
+                                </p:cTn>
+                              </p:par>
+                              <p:par>
+                                <p:cTn id="13" presetID="1" presetClass="entr" presetSubtype="0" fill="hold" grpId="0" nodeType="withEffect">
+                                  <p:stCondLst>
+                                    <p:cond delay="0"/>
+                                  </p:stCondLst>
+                                  <p:childTnLst>
+                                    <p:set>
+                                      <p:cBhvr>
+                                        <p:cTn id="14" dur="1" fill="hold">
+                                          <p:stCondLst>
+                                            <p:cond delay="0"/>
+                                          </p:stCondLst>
+                                        </p:cTn>
+                                        <p:tgtEl>
+                                          <p:spTgt spid="6">
+                                            <p:txEl>
+                                              <p:pRg st="8" end="8"/>
+                                            </p:txEl>
+                                          </p:spTgt>
+                                        </p:tgtEl>
+                                        <p:attrNameLst>
+                                          <p:attrName>style.visibility</p:attrName>
+                                        </p:attrNameLst>
+                                      </p:cBhvr>
+                                      <p:to>
+                                        <p:strVal val="visible"/>
+                                      </p:to>
+                                    </p:set>
+                                  </p:childTnLst>
+                                </p:cTn>
+                              </p:par>
+                            </p:childTnLst>
+                          </p:cTn>
+                        </p:par>
+                      </p:childTnLst>
+                    </p:cTn>
+                  </p:par>
+                </p:childTnLst>
+              </p:cTn>
+              <p:prevCondLst>
+                <p:cond evt="onPrev" delay="0">
+                  <p:tgtEl>
+                    <p:sldTgt/>
+                  </p:tgtEl>
+                </p:cond>
+              </p:prevCondLst>
+              <p:nextCondLst>
+                <p:cond evt="onNext" delay="0">
+                  <p:tgtEl>
+                    <p:sldTgt/>
+                  </p:tgtEl>
+                </p:cond>
+              </p:nextCondLst>
+            </p:seq>
+          </p:childTnLst>
+        </p:cTn>
+      </p:par>
+    </p:tnLst>
+    <p:bldLst>
+      <p:bldP spid="5" grpId="0" build="p"/>
+      <p:bldP spid="6" grpId="0" build="p"/>
+    </p:bldLst>
+  </p:timing>
+</p:sld>
+</file>
+
+<file path=ppt/slides/slide7.xml><?xml version="1.0" encoding="utf-8"?>
 <p:sld xmlns:a="http://schemas.openxmlformats.org/drawingml/2006/main" xmlns:r="http://schemas.openxmlformats.org/officeDocument/2006/relationships" xmlns:p="http://schemas.openxmlformats.org/presentationml/2006/main">
   <p:cSld>
     <p:spTree>
@@ -3448,7 +9516,10 @@
           <a:bodyPr/>
           <a:lstStyle/>
           <a:p>
-            <a:endParaRPr lang="en-GB"/>
+            <a:r>
+              <a:rPr lang="en-GB" dirty="0"/>
+              <a:t>First attempt</a:t>
+            </a:r>
           </a:p>
         </p:txBody>
       </p:sp>
@@ -3494,6 +9565,1819 @@
   <p:clrMapOvr>
     <a:masterClrMapping/>
   </p:clrMapOvr>
+</p:sld>
+</file>
+
+<file path=ppt/slides/slide8.xml><?xml version="1.0" encoding="utf-8"?>
+<p:sld xmlns:a="http://schemas.openxmlformats.org/drawingml/2006/main" xmlns:r="http://schemas.openxmlformats.org/officeDocument/2006/relationships" xmlns:p="http://schemas.openxmlformats.org/presentationml/2006/main">
+  <p:cSld>
+    <p:spTree>
+      <p:nvGrpSpPr>
+        <p:cNvPr id="1" name=""/>
+        <p:cNvGrpSpPr/>
+        <p:nvPr/>
+      </p:nvGrpSpPr>
+      <p:grpSpPr>
+        <a:xfrm>
+          <a:off x="0" y="0"/>
+          <a:ext cx="0" cy="0"/>
+          <a:chOff x="0" y="0"/>
+          <a:chExt cx="0" cy="0"/>
+        </a:xfrm>
+      </p:grpSpPr>
+      <p:sp>
+        <p:nvSpPr>
+          <p:cNvPr id="2" name="Title 1">
+            <a:extLst>
+              <a:ext uri="{FF2B5EF4-FFF2-40B4-BE49-F238E27FC236}">
+                <a16:creationId xmlns:a16="http://schemas.microsoft.com/office/drawing/2014/main" id="{EDF2F3AF-A74F-D4EB-23BA-9199EC29093D}"/>
+              </a:ext>
+            </a:extLst>
+          </p:cNvPr>
+          <p:cNvSpPr>
+            <a:spLocks noGrp="1"/>
+          </p:cNvSpPr>
+          <p:nvPr>
+            <p:ph type="title"/>
+          </p:nvPr>
+        </p:nvSpPr>
+        <p:spPr/>
+        <p:txBody>
+          <a:bodyPr>
+            <a:normAutofit/>
+          </a:bodyPr>
+          <a:lstStyle/>
+          <a:p>
+            <a:r>
+              <a:rPr lang="en-US" dirty="0"/>
+              <a:t>Ansatz</a:t>
+            </a:r>
+            <a:endParaRPr lang="en-GB" dirty="0"/>
+          </a:p>
+        </p:txBody>
+      </p:sp>
+      <mc:AlternateContent xmlns:mc="http://schemas.openxmlformats.org/markup-compatibility/2006" xmlns:a14="http://schemas.microsoft.com/office/drawing/2010/main">
+        <mc:Choice Requires="a14">
+          <p:sp>
+            <p:nvSpPr>
+              <p:cNvPr id="3" name="Content Placeholder 2">
+                <a:extLst>
+                  <a:ext uri="{FF2B5EF4-FFF2-40B4-BE49-F238E27FC236}">
+                    <a16:creationId xmlns:a16="http://schemas.microsoft.com/office/drawing/2014/main" id="{3361E21B-30CA-B983-6E55-068C526966CD}"/>
+                  </a:ext>
+                </a:extLst>
+              </p:cNvPr>
+              <p:cNvSpPr>
+                <a:spLocks noGrp="1"/>
+              </p:cNvSpPr>
+              <p:nvPr>
+                <p:ph idx="1"/>
+              </p:nvPr>
+            </p:nvSpPr>
+            <p:spPr/>
+            <p:txBody>
+              <a:bodyPr>
+                <a:normAutofit lnSpcReduction="10000"/>
+              </a:bodyPr>
+              <a:lstStyle/>
+              <a:p>
+                <a:pPr marL="0" indent="0">
+                  <a:buNone/>
+                </a:pPr>
+                <a14:m>
+                  <m:oMathPara xmlns:m="http://schemas.openxmlformats.org/officeDocument/2006/math">
+                    <m:oMathParaPr>
+                      <m:jc m:val="centerGroup"/>
+                    </m:oMathParaPr>
+                    <m:oMath xmlns:m="http://schemas.openxmlformats.org/officeDocument/2006/math">
+                      <m:sSub>
+                        <m:sSubPr>
+                          <m:ctrlPr>
+                            <a:rPr lang="en-US" i="1">
+                              <a:latin typeface="Cambria Math" panose="02040503050406030204" pitchFamily="18" charset="0"/>
+                            </a:rPr>
+                          </m:ctrlPr>
+                        </m:sSubPr>
+                        <m:e>
+                          <m:r>
+                            <a:rPr lang="en-US" i="1">
+                              <a:latin typeface="Cambria Math" panose="02040503050406030204" pitchFamily="18" charset="0"/>
+                            </a:rPr>
+                            <m:t>𝑢</m:t>
+                          </m:r>
+                        </m:e>
+                        <m:sub>
+                          <m:r>
+                            <a:rPr lang="en-US" i="1">
+                              <a:latin typeface="Cambria Math" panose="02040503050406030204" pitchFamily="18" charset="0"/>
+                            </a:rPr>
+                            <m:t>𝜃</m:t>
+                          </m:r>
+                        </m:sub>
+                      </m:sSub>
+                      <m:d>
+                        <m:dPr>
+                          <m:ctrlPr>
+                            <a:rPr lang="en-US" i="1">
+                              <a:latin typeface="Cambria Math" panose="02040503050406030204" pitchFamily="18" charset="0"/>
+                            </a:rPr>
+                          </m:ctrlPr>
+                        </m:dPr>
+                        <m:e>
+                          <m:r>
+                            <a:rPr lang="en-US" i="1">
+                              <a:latin typeface="Cambria Math" panose="02040503050406030204" pitchFamily="18" charset="0"/>
+                            </a:rPr>
+                            <m:t>𝑥</m:t>
+                          </m:r>
+                        </m:e>
+                      </m:d>
+                      <m:r>
+                        <a:rPr lang="en-US" i="1">
+                          <a:latin typeface="Cambria Math" panose="02040503050406030204" pitchFamily="18" charset="0"/>
+                        </a:rPr>
+                        <m:t>=</m:t>
+                      </m:r>
+                      <m:r>
+                        <a:rPr lang="en-US" i="1">
+                          <a:latin typeface="Cambria Math" panose="02040503050406030204" pitchFamily="18" charset="0"/>
+                        </a:rPr>
+                        <m:t>𝜅</m:t>
+                      </m:r>
+                      <m:sSub>
+                        <m:sSubPr>
+                          <m:ctrlPr>
+                            <a:rPr lang="en-US" i="1">
+                              <a:latin typeface="Cambria Math" panose="02040503050406030204" pitchFamily="18" charset="0"/>
+                            </a:rPr>
+                          </m:ctrlPr>
+                        </m:sSubPr>
+                        <m:e>
+                          <m:r>
+                            <a:rPr lang="en-US" i="1">
+                              <a:latin typeface="Cambria Math" panose="02040503050406030204" pitchFamily="18" charset="0"/>
+                            </a:rPr>
+                            <m:t>𝑢</m:t>
+                          </m:r>
+                        </m:e>
+                        <m:sub>
+                          <m:r>
+                            <a:rPr lang="en-US" i="1">
+                              <a:latin typeface="Cambria Math" panose="02040503050406030204" pitchFamily="18" charset="0"/>
+                            </a:rPr>
+                            <m:t>𝑔</m:t>
+                          </m:r>
+                        </m:sub>
+                      </m:sSub>
+                      <m:d>
+                        <m:dPr>
+                          <m:ctrlPr>
+                            <a:rPr lang="en-US" i="1">
+                              <a:latin typeface="Cambria Math" panose="02040503050406030204" pitchFamily="18" charset="0"/>
+                            </a:rPr>
+                          </m:ctrlPr>
+                        </m:dPr>
+                        <m:e>
+                          <m:r>
+                            <a:rPr lang="en-US" i="1">
+                              <a:latin typeface="Cambria Math" panose="02040503050406030204" pitchFamily="18" charset="0"/>
+                            </a:rPr>
+                            <m:t>𝑥</m:t>
+                          </m:r>
+                        </m:e>
+                      </m:d>
+                      <m:d>
+                        <m:dPr>
+                          <m:begChr m:val="["/>
+                          <m:endChr m:val="]"/>
+                          <m:ctrlPr>
+                            <a:rPr lang="en-US" i="1">
+                              <a:latin typeface="Cambria Math" panose="02040503050406030204" pitchFamily="18" charset="0"/>
+                            </a:rPr>
+                          </m:ctrlPr>
+                        </m:dPr>
+                        <m:e>
+                          <m:r>
+                            <a:rPr lang="en-US" i="1">
+                              <a:latin typeface="Cambria Math" panose="02040503050406030204" pitchFamily="18" charset="0"/>
+                            </a:rPr>
+                            <m:t>1+</m:t>
+                          </m:r>
+                          <m:r>
+                            <a:rPr lang="en-US" i="1">
+                              <a:latin typeface="Cambria Math" panose="02040503050406030204" pitchFamily="18" charset="0"/>
+                            </a:rPr>
+                            <m:t>𝑐𝑊</m:t>
+                          </m:r>
+                          <m:d>
+                            <m:dPr>
+                              <m:ctrlPr>
+                                <a:rPr lang="en-US" i="1">
+                                  <a:latin typeface="Cambria Math" panose="02040503050406030204" pitchFamily="18" charset="0"/>
+                                </a:rPr>
+                              </m:ctrlPr>
+                            </m:dPr>
+                            <m:e>
+                              <m:r>
+                                <a:rPr lang="en-US" i="1">
+                                  <a:latin typeface="Cambria Math" panose="02040503050406030204" pitchFamily="18" charset="0"/>
+                                </a:rPr>
+                                <m:t>𝑥</m:t>
+                              </m:r>
+                            </m:e>
+                          </m:d>
+                          <m:func>
+                            <m:funcPr>
+                              <m:ctrlPr>
+                                <a:rPr lang="en-US" i="1">
+                                  <a:latin typeface="Cambria Math" panose="02040503050406030204" pitchFamily="18" charset="0"/>
+                                </a:rPr>
+                              </m:ctrlPr>
+                            </m:funcPr>
+                            <m:fName>
+                              <m:r>
+                                <m:rPr>
+                                  <m:sty m:val="p"/>
+                                </m:rPr>
+                                <a:rPr lang="en-US" i="1">
+                                  <a:latin typeface="Cambria Math" panose="02040503050406030204" pitchFamily="18" charset="0"/>
+                                </a:rPr>
+                                <m:t>tanh</m:t>
+                              </m:r>
+                            </m:fName>
+                            <m:e>
+                              <m:d>
+                                <m:dPr>
+                                  <m:ctrlPr>
+                                    <a:rPr lang="en-US" i="1">
+                                      <a:latin typeface="Cambria Math" panose="02040503050406030204" pitchFamily="18" charset="0"/>
+                                    </a:rPr>
+                                  </m:ctrlPr>
+                                </m:dPr>
+                                <m:e>
+                                  <m:sSub>
+                                    <m:sSubPr>
+                                      <m:ctrlPr>
+                                        <a:rPr lang="en-US" i="1">
+                                          <a:latin typeface="Cambria Math" panose="02040503050406030204" pitchFamily="18" charset="0"/>
+                                        </a:rPr>
+                                      </m:ctrlPr>
+                                    </m:sSubPr>
+                                    <m:e>
+                                      <m:r>
+                                        <a:rPr lang="en-US" i="1">
+                                          <a:latin typeface="Cambria Math" panose="02040503050406030204" pitchFamily="18" charset="0"/>
+                                        </a:rPr>
+                                        <m:t>h</m:t>
+                                      </m:r>
+                                    </m:e>
+                                    <m:sub>
+                                      <m:r>
+                                        <a:rPr lang="en-US" i="1">
+                                          <a:latin typeface="Cambria Math" panose="02040503050406030204" pitchFamily="18" charset="0"/>
+                                        </a:rPr>
+                                        <m:t>𝜃</m:t>
+                                      </m:r>
+                                    </m:sub>
+                                  </m:sSub>
+                                  <m:d>
+                                    <m:dPr>
+                                      <m:ctrlPr>
+                                        <a:rPr lang="en-US" i="1">
+                                          <a:latin typeface="Cambria Math" panose="02040503050406030204" pitchFamily="18" charset="0"/>
+                                        </a:rPr>
+                                      </m:ctrlPr>
+                                    </m:dPr>
+                                    <m:e>
+                                      <m:r>
+                                        <a:rPr lang="en-US" i="1">
+                                          <a:latin typeface="Cambria Math" panose="02040503050406030204" pitchFamily="18" charset="0"/>
+                                        </a:rPr>
+                                        <m:t>𝑥</m:t>
+                                      </m:r>
+                                    </m:e>
+                                  </m:d>
+                                </m:e>
+                              </m:d>
+                            </m:e>
+                          </m:func>
+                        </m:e>
+                      </m:d>
+                    </m:oMath>
+                  </m:oMathPara>
+                </a14:m>
+                <a:endParaRPr lang="en-GB" dirty="0"/>
+              </a:p>
+              <a:p>
+                <a:pPr marL="0" indent="0">
+                  <a:buNone/>
+                </a:pPr>
+                <a:endParaRPr lang="en-GB" dirty="0"/>
+              </a:p>
+              <a:p>
+                <a:pPr marL="0" indent="0">
+                  <a:buNone/>
+                </a:pPr>
+                <a14:m>
+                  <m:oMathPara xmlns:m="http://schemas.openxmlformats.org/officeDocument/2006/math">
+                    <m:oMathParaPr>
+                      <m:jc m:val="centerGroup"/>
+                    </m:oMathParaPr>
+                    <m:oMath xmlns:m="http://schemas.openxmlformats.org/officeDocument/2006/math">
+                      <m:sSub>
+                        <m:sSubPr>
+                          <m:ctrlPr>
+                            <a:rPr lang="en-US" b="0" i="1" smtClean="0">
+                              <a:latin typeface="Cambria Math" panose="02040503050406030204" pitchFamily="18" charset="0"/>
+                            </a:rPr>
+                          </m:ctrlPr>
+                        </m:sSubPr>
+                        <m:e>
+                          <m:r>
+                            <a:rPr lang="en-US" b="0" i="1" smtClean="0">
+                              <a:latin typeface="Cambria Math" panose="02040503050406030204" pitchFamily="18" charset="0"/>
+                            </a:rPr>
+                            <m:t>𝑢</m:t>
+                          </m:r>
+                        </m:e>
+                        <m:sub>
+                          <m:r>
+                            <a:rPr lang="en-US" b="0" i="1" smtClean="0">
+                              <a:latin typeface="Cambria Math" panose="02040503050406030204" pitchFamily="18" charset="0"/>
+                            </a:rPr>
+                            <m:t>2</m:t>
+                          </m:r>
+                        </m:sub>
+                      </m:sSub>
+                      <m:r>
+                        <a:rPr lang="en-US" b="0" i="1" smtClean="0">
+                          <a:latin typeface="Cambria Math" panose="02040503050406030204" pitchFamily="18" charset="0"/>
+                        </a:rPr>
+                        <m:t>=</m:t>
+                      </m:r>
+                      <m:f>
+                        <m:fPr>
+                          <m:ctrlPr>
+                            <a:rPr lang="en-US" b="0" i="1" smtClean="0">
+                              <a:latin typeface="Cambria Math" panose="02040503050406030204" pitchFamily="18" charset="0"/>
+                            </a:rPr>
+                          </m:ctrlPr>
+                        </m:fPr>
+                        <m:num>
+                          <m:r>
+                            <a:rPr lang="en-US" b="0" i="1" smtClean="0">
+                              <a:latin typeface="Cambria Math" panose="02040503050406030204" pitchFamily="18" charset="0"/>
+                            </a:rPr>
+                            <m:t>15</m:t>
+                          </m:r>
+                          <m:r>
+                            <a:rPr lang="en-US" b="0" i="1" smtClean="0">
+                              <a:latin typeface="Cambria Math" panose="02040503050406030204" pitchFamily="18" charset="0"/>
+                            </a:rPr>
+                            <m:t>𝑙</m:t>
+                          </m:r>
+                          <m:r>
+                            <a:rPr lang="en-US" b="0" i="1" smtClean="0">
+                              <a:latin typeface="Cambria Math" panose="02040503050406030204" pitchFamily="18" charset="0"/>
+                            </a:rPr>
+                            <m:t>+132</m:t>
+                          </m:r>
+                          <m:sSup>
+                            <m:sSupPr>
+                              <m:ctrlPr>
+                                <a:rPr lang="en-US" b="0" i="1" smtClean="0">
+                                  <a:latin typeface="Cambria Math" panose="02040503050406030204" pitchFamily="18" charset="0"/>
+                                </a:rPr>
+                              </m:ctrlPr>
+                            </m:sSupPr>
+                            <m:e>
+                              <m:r>
+                                <a:rPr lang="en-US" b="0" i="1" smtClean="0">
+                                  <a:latin typeface="Cambria Math" panose="02040503050406030204" pitchFamily="18" charset="0"/>
+                                </a:rPr>
+                                <m:t>𝑙</m:t>
+                              </m:r>
+                            </m:e>
+                            <m:sup>
+                              <m:r>
+                                <a:rPr lang="en-US" b="0" i="1" smtClean="0">
+                                  <a:latin typeface="Cambria Math" panose="02040503050406030204" pitchFamily="18" charset="0"/>
+                                </a:rPr>
+                                <m:t>2</m:t>
+                              </m:r>
+                            </m:sup>
+                          </m:sSup>
+                          <m:r>
+                            <a:rPr lang="en-US" b="0" i="1" smtClean="0">
+                              <a:latin typeface="Cambria Math" panose="02040503050406030204" pitchFamily="18" charset="0"/>
+                            </a:rPr>
+                            <m:t>+53</m:t>
+                          </m:r>
+                          <m:sSup>
+                            <m:sSupPr>
+                              <m:ctrlPr>
+                                <a:rPr lang="en-US" b="0" i="1" smtClean="0">
+                                  <a:latin typeface="Cambria Math" panose="02040503050406030204" pitchFamily="18" charset="0"/>
+                                </a:rPr>
+                              </m:ctrlPr>
+                            </m:sSupPr>
+                            <m:e>
+                              <m:r>
+                                <a:rPr lang="en-US" b="0" i="1" smtClean="0">
+                                  <a:latin typeface="Cambria Math" panose="02040503050406030204" pitchFamily="18" charset="0"/>
+                                </a:rPr>
+                                <m:t>𝑙</m:t>
+                              </m:r>
+                            </m:e>
+                            <m:sup>
+                              <m:r>
+                                <a:rPr lang="en-US" b="0" i="1" smtClean="0">
+                                  <a:latin typeface="Cambria Math" panose="02040503050406030204" pitchFamily="18" charset="0"/>
+                                </a:rPr>
+                                <m:t>3</m:t>
+                              </m:r>
+                            </m:sup>
+                          </m:sSup>
+                          <m:r>
+                            <a:rPr lang="en-US" b="0" i="1" smtClean="0">
+                              <a:latin typeface="Cambria Math" panose="02040503050406030204" pitchFamily="18" charset="0"/>
+                            </a:rPr>
+                            <m:t>+96</m:t>
+                          </m:r>
+                          <m:sSup>
+                            <m:sSupPr>
+                              <m:ctrlPr>
+                                <a:rPr lang="en-US" b="0" i="1" smtClean="0">
+                                  <a:latin typeface="Cambria Math" panose="02040503050406030204" pitchFamily="18" charset="0"/>
+                                </a:rPr>
+                              </m:ctrlPr>
+                            </m:sSupPr>
+                            <m:e>
+                              <m:r>
+                                <a:rPr lang="en-US" b="0" i="1" smtClean="0">
+                                  <a:latin typeface="Cambria Math" panose="02040503050406030204" pitchFamily="18" charset="0"/>
+                                </a:rPr>
+                                <m:t>𝑙</m:t>
+                              </m:r>
+                            </m:e>
+                            <m:sup>
+                              <m:r>
+                                <a:rPr lang="en-US" b="0" i="1" smtClean="0">
+                                  <a:latin typeface="Cambria Math" panose="02040503050406030204" pitchFamily="18" charset="0"/>
+                                </a:rPr>
+                                <m:t>4</m:t>
+                              </m:r>
+                            </m:sup>
+                          </m:sSup>
+                          <m:r>
+                            <a:rPr lang="en-US" b="0" i="1" smtClean="0">
+                              <a:latin typeface="Cambria Math" panose="02040503050406030204" pitchFamily="18" charset="0"/>
+                            </a:rPr>
+                            <m:t>+82</m:t>
+                          </m:r>
+                          <m:sSup>
+                            <m:sSupPr>
+                              <m:ctrlPr>
+                                <a:rPr lang="en-US" b="0" i="1" smtClean="0">
+                                  <a:latin typeface="Cambria Math" panose="02040503050406030204" pitchFamily="18" charset="0"/>
+                                </a:rPr>
+                              </m:ctrlPr>
+                            </m:sSupPr>
+                            <m:e>
+                              <m:r>
+                                <a:rPr lang="en-US" b="0" i="1" smtClean="0">
+                                  <a:latin typeface="Cambria Math" panose="02040503050406030204" pitchFamily="18" charset="0"/>
+                                </a:rPr>
+                                <m:t>𝑙</m:t>
+                              </m:r>
+                            </m:e>
+                            <m:sup>
+                              <m:r>
+                                <a:rPr lang="en-US" b="0" i="1" smtClean="0">
+                                  <a:latin typeface="Cambria Math" panose="02040503050406030204" pitchFamily="18" charset="0"/>
+                                </a:rPr>
+                                <m:t>5</m:t>
+                              </m:r>
+                            </m:sup>
+                          </m:sSup>
+                          <m:r>
+                            <a:rPr lang="en-US" b="0" i="1" smtClean="0">
+                              <a:latin typeface="Cambria Math" panose="02040503050406030204" pitchFamily="18" charset="0"/>
+                            </a:rPr>
+                            <m:t>+</m:t>
+                          </m:r>
+                          <m:f>
+                            <m:fPr>
+                              <m:ctrlPr>
+                                <a:rPr lang="en-US" b="0" i="1" smtClean="0">
+                                  <a:latin typeface="Cambria Math" panose="02040503050406030204" pitchFamily="18" charset="0"/>
+                                </a:rPr>
+                              </m:ctrlPr>
+                            </m:fPr>
+                            <m:num>
+                              <m:r>
+                                <a:rPr lang="en-US" b="0" i="1" smtClean="0">
+                                  <a:latin typeface="Cambria Math" panose="02040503050406030204" pitchFamily="18" charset="0"/>
+                                </a:rPr>
+                                <m:t>84</m:t>
+                              </m:r>
+                              <m:sSup>
+                                <m:sSupPr>
+                                  <m:ctrlPr>
+                                    <a:rPr lang="en-US" b="0" i="1" smtClean="0">
+                                      <a:latin typeface="Cambria Math" panose="02040503050406030204" pitchFamily="18" charset="0"/>
+                                    </a:rPr>
+                                  </m:ctrlPr>
+                                </m:sSupPr>
+                                <m:e>
+                                  <m:r>
+                                    <a:rPr lang="en-US" b="0" i="1" smtClean="0">
+                                      <a:latin typeface="Cambria Math" panose="02040503050406030204" pitchFamily="18" charset="0"/>
+                                    </a:rPr>
+                                    <m:t>𝑙</m:t>
+                                  </m:r>
+                                </m:e>
+                                <m:sup>
+                                  <m:r>
+                                    <a:rPr lang="en-US" b="0" i="1" smtClean="0">
+                                      <a:latin typeface="Cambria Math" panose="02040503050406030204" pitchFamily="18" charset="0"/>
+                                    </a:rPr>
+                                    <m:t>5</m:t>
+                                  </m:r>
+                                </m:sup>
+                              </m:sSup>
+                            </m:num>
+                            <m:den>
+                              <m:r>
+                                <a:rPr lang="en-US" b="0" i="1" smtClean="0">
+                                  <a:latin typeface="Cambria Math" panose="02040503050406030204" pitchFamily="18" charset="0"/>
+                                </a:rPr>
+                                <m:t>ℛ</m:t>
+                              </m:r>
+                            </m:den>
+                          </m:f>
+                          <m:r>
+                            <a:rPr lang="en-US" b="0" i="1" smtClean="0">
+                              <a:latin typeface="Cambria Math" panose="02040503050406030204" pitchFamily="18" charset="0"/>
+                            </a:rPr>
+                            <m:t>+</m:t>
+                          </m:r>
+                          <m:f>
+                            <m:fPr>
+                              <m:ctrlPr>
+                                <a:rPr lang="en-US" b="0" i="1" smtClean="0">
+                                  <a:latin typeface="Cambria Math" panose="02040503050406030204" pitchFamily="18" charset="0"/>
+                                </a:rPr>
+                              </m:ctrlPr>
+                            </m:fPr>
+                            <m:num>
+                              <m:r>
+                                <a:rPr lang="en-US" b="0" i="1" smtClean="0">
+                                  <a:latin typeface="Cambria Math" panose="02040503050406030204" pitchFamily="18" charset="0"/>
+                                </a:rPr>
+                                <m:t>85</m:t>
+                              </m:r>
+                              <m:func>
+                                <m:funcPr>
+                                  <m:ctrlPr>
+                                    <a:rPr lang="en-US" b="0" i="1" smtClean="0">
+                                      <a:latin typeface="Cambria Math" panose="02040503050406030204" pitchFamily="18" charset="0"/>
+                                    </a:rPr>
+                                  </m:ctrlPr>
+                                </m:funcPr>
+                                <m:fName>
+                                  <m:r>
+                                    <m:rPr>
+                                      <m:sty m:val="p"/>
+                                    </m:rPr>
+                                    <a:rPr lang="en-US" b="0" i="1" smtClean="0">
+                                      <a:latin typeface="Cambria Math" panose="02040503050406030204" pitchFamily="18" charset="0"/>
+                                    </a:rPr>
+                                    <m:t>ln</m:t>
+                                  </m:r>
+                                </m:fName>
+                                <m:e>
+                                  <m:r>
+                                    <a:rPr lang="en-US" b="0" i="1" smtClean="0">
+                                      <a:latin typeface="Cambria Math" panose="02040503050406030204" pitchFamily="18" charset="0"/>
+                                    </a:rPr>
+                                    <m:t>𝑙</m:t>
+                                  </m:r>
+                                </m:e>
+                              </m:func>
+                            </m:num>
+                            <m:den>
+                              <m:sSup>
+                                <m:sSupPr>
+                                  <m:ctrlPr>
+                                    <a:rPr lang="en-US" b="0" i="1" smtClean="0">
+                                      <a:latin typeface="Cambria Math" panose="02040503050406030204" pitchFamily="18" charset="0"/>
+                                    </a:rPr>
+                                  </m:ctrlPr>
+                                </m:sSupPr>
+                                <m:e>
+                                  <m:r>
+                                    <a:rPr lang="en-US" b="0" i="1" smtClean="0">
+                                      <a:latin typeface="Cambria Math" panose="02040503050406030204" pitchFamily="18" charset="0"/>
+                                    </a:rPr>
+                                    <m:t>ℛ</m:t>
+                                  </m:r>
+                                </m:e>
+                                <m:sup>
+                                  <m:r>
+                                    <a:rPr lang="en-US" b="0" i="1" smtClean="0">
+                                      <a:latin typeface="Cambria Math" panose="02040503050406030204" pitchFamily="18" charset="0"/>
+                                    </a:rPr>
+                                    <m:t>2</m:t>
+                                  </m:r>
+                                </m:sup>
+                              </m:sSup>
+                            </m:den>
+                          </m:f>
+                        </m:num>
+                        <m:den>
+                          <m:r>
+                            <a:rPr lang="en-US" b="0" i="1" smtClean="0">
+                              <a:latin typeface="Cambria Math" panose="02040503050406030204" pitchFamily="18" charset="0"/>
+                            </a:rPr>
+                            <m:t>80</m:t>
+                          </m:r>
+                          <m:r>
+                            <a:rPr lang="en-US" b="0" i="1" smtClean="0">
+                              <a:latin typeface="Cambria Math" panose="02040503050406030204" pitchFamily="18" charset="0"/>
+                            </a:rPr>
+                            <m:t>ℛ</m:t>
+                          </m:r>
+                        </m:den>
+                      </m:f>
+                    </m:oMath>
+                  </m:oMathPara>
+                </a14:m>
+                <a:br>
+                  <a:rPr lang="en-GB" dirty="0"/>
+                </a:br>
+                <a:endParaRPr lang="en-GB" dirty="0"/>
+              </a:p>
+              <a:p>
+                <a:pPr marL="0" indent="0">
+                  <a:buNone/>
+                </a:pPr>
+                <a:endParaRPr lang="en-GB" dirty="0"/>
+              </a:p>
+              <a:p>
+                <a:pPr marL="0" indent="0">
+                  <a:buNone/>
+                </a:pPr>
+                <a14:m>
+                  <m:oMathPara xmlns:m="http://schemas.openxmlformats.org/officeDocument/2006/math">
+                    <m:oMathParaPr>
+                      <m:jc m:val="centerGroup"/>
+                    </m:oMathParaPr>
+                    <m:oMath xmlns:m="http://schemas.openxmlformats.org/officeDocument/2006/math">
+                      <m:r>
+                        <a:rPr lang="en-US" b="0" i="1" smtClean="0">
+                          <a:latin typeface="Cambria Math" panose="02040503050406030204" pitchFamily="18" charset="0"/>
+                        </a:rPr>
+                        <m:t>ℛ</m:t>
+                      </m:r>
+                      <m:r>
+                        <a:rPr lang="en-US" b="0" i="1" smtClean="0">
+                          <a:latin typeface="Cambria Math" panose="02040503050406030204" pitchFamily="18" charset="0"/>
+                        </a:rPr>
+                        <m:t>=</m:t>
+                      </m:r>
+                      <m:f>
+                        <m:fPr>
+                          <m:ctrlPr>
+                            <a:rPr lang="en-US" b="0" i="1" smtClean="0">
+                              <a:latin typeface="Cambria Math" panose="02040503050406030204" pitchFamily="18" charset="0"/>
+                            </a:rPr>
+                          </m:ctrlPr>
+                        </m:fPr>
+                        <m:num>
+                          <m:r>
+                            <a:rPr lang="en-US" b="0" i="1" smtClean="0">
+                              <a:latin typeface="Cambria Math" panose="02040503050406030204" pitchFamily="18" charset="0"/>
+                            </a:rPr>
+                            <m:t>2</m:t>
+                          </m:r>
+                          <m:sSub>
+                            <m:sSubPr>
+                              <m:ctrlPr>
+                                <a:rPr lang="en-US" b="0" i="1" smtClean="0">
+                                  <a:latin typeface="Cambria Math" panose="02040503050406030204" pitchFamily="18" charset="0"/>
+                                </a:rPr>
+                              </m:ctrlPr>
+                            </m:sSubPr>
+                            <m:e>
+                              <m:r>
+                                <a:rPr lang="en-US" b="0" i="1" smtClean="0">
+                                  <a:latin typeface="Cambria Math" panose="02040503050406030204" pitchFamily="18" charset="0"/>
+                                </a:rPr>
+                                <m:t>𝑟</m:t>
+                              </m:r>
+                            </m:e>
+                            <m:sub>
+                              <m:r>
+                                <a:rPr lang="en-US" b="0" i="1" smtClean="0">
+                                  <a:latin typeface="Cambria Math" panose="02040503050406030204" pitchFamily="18" charset="0"/>
+                                </a:rPr>
+                                <m:t>𝑛</m:t>
+                              </m:r>
+                            </m:sub>
+                          </m:sSub>
+                        </m:num>
+                        <m:den>
+                          <m:r>
+                            <a:rPr lang="en-US" b="0" i="1" smtClean="0">
+                              <a:latin typeface="Cambria Math" panose="02040503050406030204" pitchFamily="18" charset="0"/>
+                            </a:rPr>
+                            <m:t>𝑚</m:t>
+                          </m:r>
+                        </m:den>
+                      </m:f>
+                      <m:r>
+                        <a:rPr lang="en-US" b="0" i="1" smtClean="0">
+                          <a:latin typeface="Cambria Math" panose="02040503050406030204" pitchFamily="18" charset="0"/>
+                        </a:rPr>
+                        <m:t>,</m:t>
+                      </m:r>
+                      <m:r>
+                        <a:rPr lang="en-US" b="0" i="1" smtClean="0">
+                          <a:latin typeface="Cambria Math" panose="02040503050406030204" pitchFamily="18" charset="0"/>
+                        </a:rPr>
+                        <m:t>𝑙</m:t>
+                      </m:r>
+                      <m:r>
+                        <a:rPr lang="en-US" b="0" i="1" smtClean="0">
+                          <a:latin typeface="Cambria Math" panose="02040503050406030204" pitchFamily="18" charset="0"/>
+                        </a:rPr>
+                        <m:t>=</m:t>
+                      </m:r>
+                      <m:f>
+                        <m:fPr>
+                          <m:ctrlPr>
+                            <a:rPr lang="en-US" b="0" i="1" smtClean="0">
+                              <a:latin typeface="Cambria Math" panose="02040503050406030204" pitchFamily="18" charset="0"/>
+                            </a:rPr>
+                          </m:ctrlPr>
+                        </m:fPr>
+                        <m:num>
+                          <m:r>
+                            <a:rPr lang="en-US" b="0" i="1" smtClean="0">
+                              <a:latin typeface="Cambria Math" panose="02040503050406030204" pitchFamily="18" charset="0"/>
+                            </a:rPr>
+                            <m:t>1</m:t>
+                          </m:r>
+                        </m:num>
+                        <m:den>
+                          <m:r>
+                            <a:rPr lang="en-US" b="0" i="1" smtClean="0">
+                              <a:latin typeface="Cambria Math" panose="02040503050406030204" pitchFamily="18" charset="0"/>
+                            </a:rPr>
+                            <m:t>1+</m:t>
+                          </m:r>
+                          <m:r>
+                            <a:rPr lang="en-US" b="0" i="1" smtClean="0">
+                              <a:latin typeface="Cambria Math" panose="02040503050406030204" pitchFamily="18" charset="0"/>
+                            </a:rPr>
+                            <m:t>ℛ</m:t>
+                          </m:r>
+                        </m:den>
+                      </m:f>
+                    </m:oMath>
+                  </m:oMathPara>
+                </a14:m>
+                <a:endParaRPr lang="en-GB" dirty="0"/>
+              </a:p>
+              <a:p>
+                <a:pPr marL="0" indent="0">
+                  <a:buNone/>
+                </a:pPr>
+                <a:endParaRPr lang="en-GB" dirty="0"/>
+              </a:p>
+              <a:p>
+                <a:pPr marL="0" indent="0">
+                  <a:buNone/>
+                </a:pPr>
+                <a:r>
+                  <a:rPr lang="en-GB" dirty="0"/>
+                  <a:t>Taylor expand to </a:t>
+                </a:r>
+                <a14:m>
+                  <m:oMath xmlns:m="http://schemas.openxmlformats.org/officeDocument/2006/math">
+                    <m:r>
+                      <a:rPr lang="en-US" b="0" i="1" smtClean="0">
+                        <a:latin typeface="Cambria Math" panose="02040503050406030204" pitchFamily="18" charset="0"/>
+                      </a:rPr>
+                      <m:t>𝒪</m:t>
+                    </m:r>
+                    <m:d>
+                      <m:dPr>
+                        <m:ctrlPr>
+                          <a:rPr lang="en-US" b="0" i="1" smtClean="0">
+                            <a:latin typeface="Cambria Math" panose="02040503050406030204" pitchFamily="18" charset="0"/>
+                          </a:rPr>
+                        </m:ctrlPr>
+                      </m:dPr>
+                      <m:e>
+                        <m:sSup>
+                          <m:sSupPr>
+                            <m:ctrlPr>
+                              <a:rPr lang="en-US" b="0" i="1" smtClean="0">
+                                <a:latin typeface="Cambria Math" panose="02040503050406030204" pitchFamily="18" charset="0"/>
+                              </a:rPr>
+                            </m:ctrlPr>
+                          </m:sSupPr>
+                          <m:e>
+                            <m:r>
+                              <a:rPr lang="en-US" b="0" i="1" smtClean="0">
+                                <a:latin typeface="Cambria Math" panose="02040503050406030204" pitchFamily="18" charset="0"/>
+                              </a:rPr>
+                              <m:t>10</m:t>
+                            </m:r>
+                          </m:e>
+                          <m:sup>
+                            <m:r>
+                              <a:rPr lang="en-US" b="0" i="1" smtClean="0">
+                                <a:latin typeface="Cambria Math" panose="02040503050406030204" pitchFamily="18" charset="0"/>
+                              </a:rPr>
+                              <m:t>−14</m:t>
+                            </m:r>
+                          </m:sup>
+                        </m:sSup>
+                      </m:e>
+                    </m:d>
+                  </m:oMath>
+                </a14:m>
+                <a:r>
+                  <a:rPr lang="en-US" b="0" dirty="0"/>
+                  <a:t> for </a:t>
+                </a:r>
+                <a14:m>
+                  <m:oMath xmlns:m="http://schemas.openxmlformats.org/officeDocument/2006/math">
+                    <m:sSub>
+                      <m:sSubPr>
+                        <m:ctrlPr>
+                          <a:rPr lang="en-US" b="0" i="1" smtClean="0">
+                            <a:latin typeface="Cambria Math" panose="02040503050406030204" pitchFamily="18" charset="0"/>
+                          </a:rPr>
+                        </m:ctrlPr>
+                      </m:sSubPr>
+                      <m:e>
+                        <m:r>
+                          <a:rPr lang="en-US" b="0" i="1" smtClean="0">
+                            <a:latin typeface="Cambria Math" panose="02040503050406030204" pitchFamily="18" charset="0"/>
+                          </a:rPr>
+                          <m:t>𝑟</m:t>
+                        </m:r>
+                      </m:e>
+                      <m:sub>
+                        <m:r>
+                          <a:rPr lang="en-US" b="0" i="1" smtClean="0">
+                            <a:latin typeface="Cambria Math" panose="02040503050406030204" pitchFamily="18" charset="0"/>
+                          </a:rPr>
+                          <m:t>𝑛</m:t>
+                        </m:r>
+                      </m:sub>
+                    </m:sSub>
+                    <m:r>
+                      <a:rPr lang="en-US" b="0" i="1" smtClean="0">
+                        <a:latin typeface="Cambria Math" panose="02040503050406030204" pitchFamily="18" charset="0"/>
+                      </a:rPr>
+                      <m:t>&lt;0.1</m:t>
+                    </m:r>
+                  </m:oMath>
+                </a14:m>
+                <a:r>
+                  <a:rPr lang="en-US" b="0" dirty="0"/>
+                  <a:t> to sidestep zero-error</a:t>
+                </a:r>
+              </a:p>
+              <a:p>
+                <a:pPr marL="0" indent="0">
+                  <a:buNone/>
+                </a:pPr>
+                <a:endParaRPr lang="en-GB" dirty="0"/>
+              </a:p>
+            </p:txBody>
+          </p:sp>
+        </mc:Choice>
+        <mc:Fallback xmlns="">
+          <p:sp>
+            <p:nvSpPr>
+              <p:cNvPr id="3" name="Content Placeholder 2">
+                <a:extLst>
+                  <a:ext uri="{FF2B5EF4-FFF2-40B4-BE49-F238E27FC236}">
+                    <a16:creationId xmlns:a16="http://schemas.microsoft.com/office/drawing/2014/main" id="{3361E21B-30CA-B983-6E55-068C526966CD}"/>
+                  </a:ext>
+                </a:extLst>
+              </p:cNvPr>
+              <p:cNvSpPr>
+                <a:spLocks noGrp="1" noRot="1" noChangeAspect="1" noMove="1" noResize="1" noEditPoints="1" noAdjustHandles="1" noChangeArrowheads="1" noChangeShapeType="1" noTextEdit="1"/>
+              </p:cNvSpPr>
+              <p:nvPr>
+                <p:ph idx="1"/>
+              </p:nvPr>
+            </p:nvSpPr>
+            <p:spPr>
+              <a:blipFill>
+                <a:blip r:embed="rId2"/>
+                <a:stretch>
+                  <a:fillRect l="-1217" b="-140"/>
+                </a:stretch>
+              </a:blipFill>
+            </p:spPr>
+            <p:txBody>
+              <a:bodyPr/>
+              <a:lstStyle/>
+              <a:p>
+                <a:r>
+                  <a:rPr lang="en-GB">
+                    <a:noFill/>
+                  </a:rPr>
+                  <a:t> </a:t>
+                </a:r>
+              </a:p>
+            </p:txBody>
+          </p:sp>
+        </mc:Fallback>
+      </mc:AlternateContent>
+    </p:spTree>
+    <p:extLst>
+      <p:ext uri="{BB962C8B-B14F-4D97-AF65-F5344CB8AC3E}">
+        <p14:creationId xmlns:p14="http://schemas.microsoft.com/office/powerpoint/2010/main" val="2166975074"/>
+      </p:ext>
+    </p:extLst>
+  </p:cSld>
+  <p:clrMapOvr>
+    <a:masterClrMapping/>
+  </p:clrMapOvr>
+  <p:timing>
+    <p:tnLst>
+      <p:par>
+        <p:cTn id="1" dur="indefinite" restart="never" nodeType="tmRoot">
+          <p:childTnLst>
+            <p:seq concurrent="1" nextAc="seek">
+              <p:cTn id="2" dur="indefinite" nodeType="mainSeq">
+                <p:childTnLst>
+                  <p:par>
+                    <p:cTn id="3" fill="hold">
+                      <p:stCondLst>
+                        <p:cond delay="indefinite"/>
+                      </p:stCondLst>
+                      <p:childTnLst>
+                        <p:par>
+                          <p:cTn id="4" fill="hold">
+                            <p:stCondLst>
+                              <p:cond delay="0"/>
+                            </p:stCondLst>
+                            <p:childTnLst>
+                              <p:par>
+                                <p:cTn id="5" presetID="1" presetClass="entr" presetSubtype="0" fill="hold" grpId="0" nodeType="clickEffect">
+                                  <p:stCondLst>
+                                    <p:cond delay="0"/>
+                                  </p:stCondLst>
+                                  <p:childTnLst>
+                                    <p:set>
+                                      <p:cBhvr>
+                                        <p:cTn id="6" dur="1" fill="hold">
+                                          <p:stCondLst>
+                                            <p:cond delay="0"/>
+                                          </p:stCondLst>
+                                        </p:cTn>
+                                        <p:tgtEl>
+                                          <p:spTgt spid="3">
+                                            <p:txEl>
+                                              <p:pRg st="0" end="0"/>
+                                            </p:txEl>
+                                          </p:spTgt>
+                                        </p:tgtEl>
+                                        <p:attrNameLst>
+                                          <p:attrName>style.visibility</p:attrName>
+                                        </p:attrNameLst>
+                                      </p:cBhvr>
+                                      <p:to>
+                                        <p:strVal val="visible"/>
+                                      </p:to>
+                                    </p:set>
+                                  </p:childTnLst>
+                                </p:cTn>
+                              </p:par>
+                            </p:childTnLst>
+                          </p:cTn>
+                        </p:par>
+                      </p:childTnLst>
+                    </p:cTn>
+                  </p:par>
+                  <p:par>
+                    <p:cTn id="7" fill="hold">
+                      <p:stCondLst>
+                        <p:cond delay="indefinite"/>
+                      </p:stCondLst>
+                      <p:childTnLst>
+                        <p:par>
+                          <p:cTn id="8" fill="hold">
+                            <p:stCondLst>
+                              <p:cond delay="0"/>
+                            </p:stCondLst>
+                            <p:childTnLst>
+                              <p:par>
+                                <p:cTn id="9" presetID="1" presetClass="entr" presetSubtype="0" fill="hold" grpId="0" nodeType="clickEffect">
+                                  <p:stCondLst>
+                                    <p:cond delay="0"/>
+                                  </p:stCondLst>
+                                  <p:childTnLst>
+                                    <p:set>
+                                      <p:cBhvr>
+                                        <p:cTn id="10" dur="1" fill="hold">
+                                          <p:stCondLst>
+                                            <p:cond delay="0"/>
+                                          </p:stCondLst>
+                                        </p:cTn>
+                                        <p:tgtEl>
+                                          <p:spTgt spid="3">
+                                            <p:txEl>
+                                              <p:pRg st="2" end="2"/>
+                                            </p:txEl>
+                                          </p:spTgt>
+                                        </p:tgtEl>
+                                        <p:attrNameLst>
+                                          <p:attrName>style.visibility</p:attrName>
+                                        </p:attrNameLst>
+                                      </p:cBhvr>
+                                      <p:to>
+                                        <p:strVal val="visible"/>
+                                      </p:to>
+                                    </p:set>
+                                  </p:childTnLst>
+                                </p:cTn>
+                              </p:par>
+                              <p:par>
+                                <p:cTn id="11" presetID="1" presetClass="entr" presetSubtype="0" fill="hold" grpId="0" nodeType="withEffect">
+                                  <p:stCondLst>
+                                    <p:cond delay="0"/>
+                                  </p:stCondLst>
+                                  <p:childTnLst>
+                                    <p:set>
+                                      <p:cBhvr>
+                                        <p:cTn id="12" dur="1" fill="hold">
+                                          <p:stCondLst>
+                                            <p:cond delay="0"/>
+                                          </p:stCondLst>
+                                        </p:cTn>
+                                        <p:tgtEl>
+                                          <p:spTgt spid="3">
+                                            <p:txEl>
+                                              <p:pRg st="4" end="4"/>
+                                            </p:txEl>
+                                          </p:spTgt>
+                                        </p:tgtEl>
+                                        <p:attrNameLst>
+                                          <p:attrName>style.visibility</p:attrName>
+                                        </p:attrNameLst>
+                                      </p:cBhvr>
+                                      <p:to>
+                                        <p:strVal val="visible"/>
+                                      </p:to>
+                                    </p:set>
+                                  </p:childTnLst>
+                                </p:cTn>
+                              </p:par>
+                            </p:childTnLst>
+                          </p:cTn>
+                        </p:par>
+                      </p:childTnLst>
+                    </p:cTn>
+                  </p:par>
+                  <p:par>
+                    <p:cTn id="13" fill="hold">
+                      <p:stCondLst>
+                        <p:cond delay="indefinite"/>
+                      </p:stCondLst>
+                      <p:childTnLst>
+                        <p:par>
+                          <p:cTn id="14" fill="hold">
+                            <p:stCondLst>
+                              <p:cond delay="0"/>
+                            </p:stCondLst>
+                            <p:childTnLst>
+                              <p:par>
+                                <p:cTn id="15" presetID="1" presetClass="entr" presetSubtype="0" fill="hold" grpId="0" nodeType="clickEffect">
+                                  <p:stCondLst>
+                                    <p:cond delay="0"/>
+                                  </p:stCondLst>
+                                  <p:childTnLst>
+                                    <p:set>
+                                      <p:cBhvr>
+                                        <p:cTn id="16" dur="1" fill="hold">
+                                          <p:stCondLst>
+                                            <p:cond delay="0"/>
+                                          </p:stCondLst>
+                                        </p:cTn>
+                                        <p:tgtEl>
+                                          <p:spTgt spid="3">
+                                            <p:txEl>
+                                              <p:pRg st="6" end="6"/>
+                                            </p:txEl>
+                                          </p:spTgt>
+                                        </p:tgtEl>
+                                        <p:attrNameLst>
+                                          <p:attrName>style.visibility</p:attrName>
+                                        </p:attrNameLst>
+                                      </p:cBhvr>
+                                      <p:to>
+                                        <p:strVal val="visible"/>
+                                      </p:to>
+                                    </p:set>
+                                  </p:childTnLst>
+                                </p:cTn>
+                              </p:par>
+                            </p:childTnLst>
+                          </p:cTn>
+                        </p:par>
+                      </p:childTnLst>
+                    </p:cTn>
+                  </p:par>
+                </p:childTnLst>
+              </p:cTn>
+              <p:prevCondLst>
+                <p:cond evt="onPrev" delay="0">
+                  <p:tgtEl>
+                    <p:sldTgt/>
+                  </p:tgtEl>
+                </p:cond>
+              </p:prevCondLst>
+              <p:nextCondLst>
+                <p:cond evt="onNext" delay="0">
+                  <p:tgtEl>
+                    <p:sldTgt/>
+                  </p:tgtEl>
+                </p:cond>
+              </p:nextCondLst>
+            </p:seq>
+          </p:childTnLst>
+        </p:cTn>
+      </p:par>
+    </p:tnLst>
+    <p:bldLst>
+      <p:bldP spid="3" grpId="0" uiExpand="1" build="p"/>
+    </p:bldLst>
+  </p:timing>
+</p:sld>
+</file>
+
+<file path=ppt/slides/slide9.xml><?xml version="1.0" encoding="utf-8"?>
+<p:sld xmlns:a="http://schemas.openxmlformats.org/drawingml/2006/main" xmlns:r="http://schemas.openxmlformats.org/officeDocument/2006/relationships" xmlns:p="http://schemas.openxmlformats.org/presentationml/2006/main">
+  <p:cSld>
+    <p:spTree>
+      <p:nvGrpSpPr>
+        <p:cNvPr id="1" name=""/>
+        <p:cNvGrpSpPr/>
+        <p:nvPr/>
+      </p:nvGrpSpPr>
+      <p:grpSpPr>
+        <a:xfrm>
+          <a:off x="0" y="0"/>
+          <a:ext cx="0" cy="0"/>
+          <a:chOff x="0" y="0"/>
+          <a:chExt cx="0" cy="0"/>
+        </a:xfrm>
+      </p:grpSpPr>
+      <p:sp>
+        <p:nvSpPr>
+          <p:cNvPr id="2" name="Title 1">
+            <a:extLst>
+              <a:ext uri="{FF2B5EF4-FFF2-40B4-BE49-F238E27FC236}">
+                <a16:creationId xmlns:a16="http://schemas.microsoft.com/office/drawing/2014/main" id="{45D0E983-A2AD-ED4F-EF4F-8FB6E5673AAA}"/>
+              </a:ext>
+            </a:extLst>
+          </p:cNvPr>
+          <p:cNvSpPr>
+            <a:spLocks noGrp="1"/>
+          </p:cNvSpPr>
+          <p:nvPr>
+            <p:ph type="title"/>
+          </p:nvPr>
+        </p:nvSpPr>
+        <p:spPr/>
+        <p:txBody>
+          <a:bodyPr/>
+          <a:lstStyle/>
+          <a:p>
+            <a:r>
+              <a:rPr lang="en-GB" dirty="0"/>
+              <a:t>Second attempt</a:t>
+            </a:r>
+          </a:p>
+        </p:txBody>
+      </p:sp>
+      <mc:AlternateContent xmlns:mc="http://schemas.openxmlformats.org/markup-compatibility/2006" xmlns:a14="http://schemas.microsoft.com/office/drawing/2010/main">
+        <mc:Choice Requires="a14">
+          <p:sp>
+            <p:nvSpPr>
+              <p:cNvPr id="3" name="Content Placeholder 2">
+                <a:extLst>
+                  <a:ext uri="{FF2B5EF4-FFF2-40B4-BE49-F238E27FC236}">
+                    <a16:creationId xmlns:a16="http://schemas.microsoft.com/office/drawing/2014/main" id="{62D035E2-703B-7A5A-3AD6-EC0AAB797A1B}"/>
+                  </a:ext>
+                </a:extLst>
+              </p:cNvPr>
+              <p:cNvSpPr>
+                <a:spLocks noGrp="1"/>
+              </p:cNvSpPr>
+              <p:nvPr>
+                <p:ph sz="half" idx="1"/>
+              </p:nvPr>
+            </p:nvSpPr>
+            <p:spPr/>
+            <p:txBody>
+              <a:bodyPr>
+                <a:normAutofit fontScale="92500" lnSpcReduction="10000"/>
+              </a:bodyPr>
+              <a:lstStyle/>
+              <a:p>
+                <a:pPr marL="0" indent="0">
+                  <a:buNone/>
+                </a:pPr>
+                <a:endParaRPr lang="en-US" b="0" i="1" dirty="0">
+                  <a:latin typeface="Cambria Math" panose="02040503050406030204" pitchFamily="18" charset="0"/>
+                </a:endParaRPr>
+              </a:p>
+              <a:p>
+                <a:pPr marL="0" indent="0">
+                  <a:buNone/>
+                </a:pPr>
+                <a:endParaRPr lang="en-US" i="1" dirty="0">
+                  <a:latin typeface="Cambria Math" panose="02040503050406030204" pitchFamily="18" charset="0"/>
+                </a:endParaRPr>
+              </a:p>
+              <a:p>
+                <a:pPr marL="0" indent="0">
+                  <a:buNone/>
+                </a:pPr>
+                <a:endParaRPr lang="en-US" b="0" i="1" dirty="0">
+                  <a:latin typeface="Cambria Math" panose="02040503050406030204" pitchFamily="18" charset="0"/>
+                </a:endParaRPr>
+              </a:p>
+              <a:p>
+                <a:pPr marL="0" indent="0">
+                  <a:buNone/>
+                </a:pPr>
+                <a:endParaRPr lang="en-US" i="1" dirty="0">
+                  <a:latin typeface="Cambria Math" panose="02040503050406030204" pitchFamily="18" charset="0"/>
+                </a:endParaRPr>
+              </a:p>
+              <a:p>
+                <a:pPr marL="0" indent="0">
+                  <a:buNone/>
+                </a:pPr>
+                <a:endParaRPr lang="en-US" b="0" i="1" dirty="0">
+                  <a:latin typeface="Cambria Math" panose="02040503050406030204" pitchFamily="18" charset="0"/>
+                </a:endParaRPr>
+              </a:p>
+              <a:p>
+                <a:pPr marL="0" indent="0">
+                  <a:buNone/>
+                </a:pPr>
+                <a:endParaRPr lang="en-US" i="1" dirty="0">
+                  <a:latin typeface="Cambria Math" panose="02040503050406030204" pitchFamily="18" charset="0"/>
+                </a:endParaRPr>
+              </a:p>
+              <a:p>
+                <a:pPr marL="0" indent="0">
+                  <a:buNone/>
+                </a:pPr>
+                <a:endParaRPr lang="en-US" b="0" i="1" dirty="0">
+                  <a:latin typeface="Cambria Math" panose="02040503050406030204" pitchFamily="18" charset="0"/>
+                </a:endParaRPr>
+              </a:p>
+              <a:p>
+                <a:pPr marL="0" indent="0">
+                  <a:buNone/>
+                </a:pPr>
+                <a:endParaRPr lang="en-US" b="0" i="1" dirty="0">
+                  <a:latin typeface="Cambria Math" panose="02040503050406030204" pitchFamily="18" charset="0"/>
+                </a:endParaRPr>
+              </a:p>
+              <a:p>
+                <a:pPr marL="0" indent="0">
+                  <a:buNone/>
+                </a:pPr>
+                <a:endParaRPr lang="en-US" b="0" i="1" dirty="0">
+                  <a:latin typeface="Cambria Math" panose="02040503050406030204" pitchFamily="18" charset="0"/>
+                </a:endParaRPr>
+              </a:p>
+              <a:p>
+                <a:pPr marL="0" indent="0">
+                  <a:buNone/>
+                </a:pPr>
+                <a14:m>
+                  <m:oMathPara xmlns:m="http://schemas.openxmlformats.org/officeDocument/2006/math">
+                    <m:oMathParaPr>
+                      <m:jc m:val="centerGroup"/>
+                    </m:oMathParaPr>
+                    <m:oMath xmlns:m="http://schemas.openxmlformats.org/officeDocument/2006/math">
+                      <m:r>
+                        <a:rPr lang="en-US" b="0" i="1" smtClean="0">
+                          <a:latin typeface="Cambria Math" panose="02040503050406030204" pitchFamily="18" charset="0"/>
+                        </a:rPr>
+                        <m:t>𝐿</m:t>
+                      </m:r>
+                      <m:r>
+                        <a:rPr lang="en-US" b="0" i="1" smtClean="0">
+                          <a:latin typeface="Cambria Math" panose="02040503050406030204" pitchFamily="18" charset="0"/>
+                        </a:rPr>
+                        <m:t>2</m:t>
+                      </m:r>
+                      <m:r>
+                        <a:rPr lang="en-US" b="0" i="1" smtClean="0">
+                          <a:latin typeface="Cambria Math" panose="02040503050406030204" pitchFamily="18" charset="0"/>
+                        </a:rPr>
+                        <m:t>𝑅𝐸</m:t>
+                      </m:r>
+                      <m:r>
+                        <a:rPr lang="en-US" b="0" i="1" smtClean="0">
+                          <a:latin typeface="Cambria Math" panose="02040503050406030204" pitchFamily="18" charset="0"/>
+                        </a:rPr>
+                        <m:t>=0.028</m:t>
+                      </m:r>
+                    </m:oMath>
+                  </m:oMathPara>
+                </a14:m>
+                <a:endParaRPr lang="en-US" b="0" dirty="0"/>
+              </a:p>
+              <a:p>
+                <a:pPr marL="0" indent="0">
+                  <a:buNone/>
+                </a:pPr>
+                <a:endParaRPr lang="en-GB" dirty="0"/>
+              </a:p>
+            </p:txBody>
+          </p:sp>
+        </mc:Choice>
+        <mc:Fallback xmlns="">
+          <p:sp>
+            <p:nvSpPr>
+              <p:cNvPr id="3" name="Content Placeholder 2">
+                <a:extLst>
+                  <a:ext uri="{FF2B5EF4-FFF2-40B4-BE49-F238E27FC236}">
+                    <a16:creationId xmlns:a16="http://schemas.microsoft.com/office/drawing/2014/main" id="{62D035E2-703B-7A5A-3AD6-EC0AAB797A1B}"/>
+                  </a:ext>
+                </a:extLst>
+              </p:cNvPr>
+              <p:cNvSpPr>
+                <a:spLocks noGrp="1" noRot="1" noChangeAspect="1" noMove="1" noResize="1" noEditPoints="1" noAdjustHandles="1" noChangeArrowheads="1" noChangeShapeType="1" noTextEdit="1"/>
+              </p:cNvSpPr>
+              <p:nvPr>
+                <p:ph sz="half" idx="1"/>
+              </p:nvPr>
+            </p:nvSpPr>
+            <p:spPr>
+              <a:blipFill>
+                <a:blip r:embed="rId2"/>
+                <a:stretch>
+                  <a:fillRect/>
+                </a:stretch>
+              </a:blipFill>
+            </p:spPr>
+            <p:txBody>
+              <a:bodyPr/>
+              <a:lstStyle/>
+              <a:p>
+                <a:r>
+                  <a:rPr lang="en-GB">
+                    <a:noFill/>
+                  </a:rPr>
+                  <a:t> </a:t>
+                </a:r>
+              </a:p>
+            </p:txBody>
+          </p:sp>
+        </mc:Fallback>
+      </mc:AlternateContent>
+      <mc:AlternateContent xmlns:mc="http://schemas.openxmlformats.org/markup-compatibility/2006" xmlns:a14="http://schemas.microsoft.com/office/drawing/2010/main">
+        <mc:Choice Requires="a14">
+          <p:sp>
+            <p:nvSpPr>
+              <p:cNvPr id="4" name="Content Placeholder 3">
+                <a:extLst>
+                  <a:ext uri="{FF2B5EF4-FFF2-40B4-BE49-F238E27FC236}">
+                    <a16:creationId xmlns:a16="http://schemas.microsoft.com/office/drawing/2014/main" id="{2D7EA526-0397-931F-4037-D46B3DE9B987}"/>
+                  </a:ext>
+                </a:extLst>
+              </p:cNvPr>
+              <p:cNvSpPr>
+                <a:spLocks noGrp="1"/>
+              </p:cNvSpPr>
+              <p:nvPr>
+                <p:ph sz="half" idx="2"/>
+              </p:nvPr>
+            </p:nvSpPr>
+            <p:spPr/>
+            <p:txBody>
+              <a:bodyPr>
+                <a:normAutofit fontScale="92500" lnSpcReduction="10000"/>
+              </a:bodyPr>
+              <a:lstStyle/>
+              <a:p>
+                <a:pPr marL="0" indent="0">
+                  <a:buNone/>
+                </a:pPr>
+                <a:endParaRPr lang="en-GB" dirty="0"/>
+              </a:p>
+              <a:p>
+                <a:pPr marL="0" indent="0">
+                  <a:buNone/>
+                </a:pPr>
+                <a:endParaRPr lang="en-GB" dirty="0"/>
+              </a:p>
+              <a:p>
+                <a:pPr marL="0" indent="0">
+                  <a:buNone/>
+                </a:pPr>
+                <a:endParaRPr lang="en-GB" dirty="0"/>
+              </a:p>
+              <a:p>
+                <a:pPr marL="0" indent="0">
+                  <a:buNone/>
+                </a:pPr>
+                <a:endParaRPr lang="en-GB" dirty="0"/>
+              </a:p>
+              <a:p>
+                <a:pPr marL="0" indent="0">
+                  <a:buNone/>
+                </a:pPr>
+                <a:endParaRPr lang="en-GB" dirty="0"/>
+              </a:p>
+              <a:p>
+                <a:pPr marL="0" indent="0">
+                  <a:buNone/>
+                </a:pPr>
+                <a:endParaRPr lang="en-GB" dirty="0"/>
+              </a:p>
+              <a:p>
+                <a:pPr marL="0" indent="0">
+                  <a:buNone/>
+                </a:pPr>
+                <a:endParaRPr lang="en-GB" dirty="0"/>
+              </a:p>
+              <a:p>
+                <a:pPr marL="0" indent="0">
+                  <a:buNone/>
+                </a:pPr>
+                <a:endParaRPr lang="en-GB" dirty="0"/>
+              </a:p>
+              <a:p>
+                <a:pPr marL="0" indent="0">
+                  <a:buNone/>
+                </a:pPr>
+                <a:endParaRPr lang="en-GB" dirty="0"/>
+              </a:p>
+              <a:p>
+                <a:pPr marL="0" indent="0">
+                  <a:buNone/>
+                </a:pPr>
+                <a14:m>
+                  <m:oMathPara xmlns:m="http://schemas.openxmlformats.org/officeDocument/2006/math">
+                    <m:oMathParaPr>
+                      <m:jc m:val="centerGroup"/>
+                    </m:oMathParaPr>
+                    <m:oMath xmlns:m="http://schemas.openxmlformats.org/officeDocument/2006/math">
+                      <m:r>
+                        <a:rPr lang="en-US" b="0" i="1" smtClean="0">
+                          <a:latin typeface="Cambria Math" panose="02040503050406030204" pitchFamily="18" charset="0"/>
+                        </a:rPr>
+                        <m:t>𝐿</m:t>
+                      </m:r>
+                      <m:r>
+                        <a:rPr lang="en-US" b="0" i="1" smtClean="0">
+                          <a:latin typeface="Cambria Math" panose="02040503050406030204" pitchFamily="18" charset="0"/>
+                        </a:rPr>
+                        <m:t>2</m:t>
+                      </m:r>
+                      <m:r>
+                        <a:rPr lang="en-US" b="0" i="1" smtClean="0">
+                          <a:latin typeface="Cambria Math" panose="02040503050406030204" pitchFamily="18" charset="0"/>
+                        </a:rPr>
+                        <m:t>𝑅𝐸</m:t>
+                      </m:r>
+                      <m:r>
+                        <a:rPr lang="en-US" b="0" i="1" smtClean="0">
+                          <a:latin typeface="Cambria Math" panose="02040503050406030204" pitchFamily="18" charset="0"/>
+                        </a:rPr>
+                        <m:t>=0.048</m:t>
+                      </m:r>
+                    </m:oMath>
+                  </m:oMathPara>
+                </a14:m>
+                <a:endParaRPr lang="en-US" b="0" dirty="0"/>
+              </a:p>
+              <a:p>
+                <a:pPr marL="0" indent="0">
+                  <a:buNone/>
+                </a:pPr>
+                <a:endParaRPr lang="en-GB" dirty="0"/>
+              </a:p>
+            </p:txBody>
+          </p:sp>
+        </mc:Choice>
+        <mc:Fallback xmlns="">
+          <p:sp>
+            <p:nvSpPr>
+              <p:cNvPr id="4" name="Content Placeholder 3">
+                <a:extLst>
+                  <a:ext uri="{FF2B5EF4-FFF2-40B4-BE49-F238E27FC236}">
+                    <a16:creationId xmlns:a16="http://schemas.microsoft.com/office/drawing/2014/main" id="{2D7EA526-0397-931F-4037-D46B3DE9B987}"/>
+                  </a:ext>
+                </a:extLst>
+              </p:cNvPr>
+              <p:cNvSpPr>
+                <a:spLocks noGrp="1" noRot="1" noChangeAspect="1" noMove="1" noResize="1" noEditPoints="1" noAdjustHandles="1" noChangeArrowheads="1" noChangeShapeType="1" noTextEdit="1"/>
+              </p:cNvSpPr>
+              <p:nvPr>
+                <p:ph sz="half" idx="2"/>
+              </p:nvPr>
+            </p:nvSpPr>
+            <p:spPr>
+              <a:blipFill>
+                <a:blip r:embed="rId3"/>
+                <a:stretch>
+                  <a:fillRect/>
+                </a:stretch>
+              </a:blipFill>
+            </p:spPr>
+            <p:txBody>
+              <a:bodyPr/>
+              <a:lstStyle/>
+              <a:p>
+                <a:r>
+                  <a:rPr lang="en-GB">
+                    <a:noFill/>
+                  </a:rPr>
+                  <a:t> </a:t>
+                </a:r>
+              </a:p>
+            </p:txBody>
+          </p:sp>
+        </mc:Fallback>
+      </mc:AlternateContent>
+      <p:pic>
+        <p:nvPicPr>
+          <p:cNvPr id="8" name="Picture 7">
+            <a:extLst>
+              <a:ext uri="{FF2B5EF4-FFF2-40B4-BE49-F238E27FC236}">
+                <a16:creationId xmlns:a16="http://schemas.microsoft.com/office/drawing/2014/main" id="{911265F9-5214-659F-A69F-D2D2B139E4C8}"/>
+              </a:ext>
+            </a:extLst>
+          </p:cNvPr>
+          <p:cNvPicPr>
+            <a:picLocks noChangeAspect="1"/>
+          </p:cNvPicPr>
+          <p:nvPr/>
+        </p:nvPicPr>
+        <p:blipFill>
+          <a:blip r:embed="rId4"/>
+          <a:stretch>
+            <a:fillRect/>
+          </a:stretch>
+        </p:blipFill>
+        <p:spPr>
+          <a:xfrm>
+            <a:off x="450987" y="1690688"/>
+            <a:ext cx="5568813" cy="3681079"/>
+          </a:xfrm>
+          <a:prstGeom prst="rect">
+            <a:avLst/>
+          </a:prstGeom>
+        </p:spPr>
+      </p:pic>
+      <p:pic>
+        <p:nvPicPr>
+          <p:cNvPr id="10" name="Picture 9">
+            <a:extLst>
+              <a:ext uri="{FF2B5EF4-FFF2-40B4-BE49-F238E27FC236}">
+                <a16:creationId xmlns:a16="http://schemas.microsoft.com/office/drawing/2014/main" id="{732F58F1-5A2E-3A0C-AA21-63BE67AAF111}"/>
+              </a:ext>
+            </a:extLst>
+          </p:cNvPr>
+          <p:cNvPicPr>
+            <a:picLocks noChangeAspect="1"/>
+          </p:cNvPicPr>
+          <p:nvPr/>
+        </p:nvPicPr>
+        <p:blipFill>
+          <a:blip r:embed="rId5"/>
+          <a:stretch>
+            <a:fillRect/>
+          </a:stretch>
+        </p:blipFill>
+        <p:spPr>
+          <a:xfrm>
+            <a:off x="6172199" y="1690687"/>
+            <a:ext cx="5568813" cy="3681079"/>
+          </a:xfrm>
+          <a:prstGeom prst="rect">
+            <a:avLst/>
+          </a:prstGeom>
+        </p:spPr>
+      </p:pic>
+    </p:spTree>
+    <p:extLst>
+      <p:ext uri="{BB962C8B-B14F-4D97-AF65-F5344CB8AC3E}">
+        <p14:creationId xmlns:p14="http://schemas.microsoft.com/office/powerpoint/2010/main" val="3688761567"/>
+      </p:ext>
+    </p:extLst>
+  </p:cSld>
+  <p:clrMapOvr>
+    <a:masterClrMapping/>
+  </p:clrMapOvr>
+  <p:timing>
+    <p:tnLst>
+      <p:par>
+        <p:cTn id="1" dur="indefinite" restart="never" nodeType="tmRoot">
+          <p:childTnLst>
+            <p:seq concurrent="1" nextAc="seek">
+              <p:cTn id="2" dur="indefinite" nodeType="mainSeq">
+                <p:childTnLst>
+                  <p:par>
+                    <p:cTn id="3" fill="hold">
+                      <p:stCondLst>
+                        <p:cond delay="indefinite"/>
+                      </p:stCondLst>
+                      <p:childTnLst>
+                        <p:par>
+                          <p:cTn id="4" fill="hold">
+                            <p:stCondLst>
+                              <p:cond delay="0"/>
+                            </p:stCondLst>
+                            <p:childTnLst>
+                              <p:par>
+                                <p:cTn id="5" presetID="1" presetClass="entr" presetSubtype="0" fill="hold" nodeType="clickEffect">
+                                  <p:stCondLst>
+                                    <p:cond delay="0"/>
+                                  </p:stCondLst>
+                                  <p:childTnLst>
+                                    <p:set>
+                                      <p:cBhvr>
+                                        <p:cTn id="6" dur="1" fill="hold">
+                                          <p:stCondLst>
+                                            <p:cond delay="0"/>
+                                          </p:stCondLst>
+                                        </p:cTn>
+                                        <p:tgtEl>
+                                          <p:spTgt spid="8"/>
+                                        </p:tgtEl>
+                                        <p:attrNameLst>
+                                          <p:attrName>style.visibility</p:attrName>
+                                        </p:attrNameLst>
+                                      </p:cBhvr>
+                                      <p:to>
+                                        <p:strVal val="visible"/>
+                                      </p:to>
+                                    </p:set>
+                                  </p:childTnLst>
+                                </p:cTn>
+                              </p:par>
+                              <p:par>
+                                <p:cTn id="7" presetID="1" presetClass="entr" presetSubtype="0" fill="hold" grpId="0" nodeType="withEffect">
+                                  <p:stCondLst>
+                                    <p:cond delay="0"/>
+                                  </p:stCondLst>
+                                  <p:childTnLst>
+                                    <p:set>
+                                      <p:cBhvr>
+                                        <p:cTn id="8" dur="1" fill="hold">
+                                          <p:stCondLst>
+                                            <p:cond delay="0"/>
+                                          </p:stCondLst>
+                                        </p:cTn>
+                                        <p:tgtEl>
+                                          <p:spTgt spid="3">
+                                            <p:txEl>
+                                              <p:pRg st="9" end="9"/>
+                                            </p:txEl>
+                                          </p:spTgt>
+                                        </p:tgtEl>
+                                        <p:attrNameLst>
+                                          <p:attrName>style.visibility</p:attrName>
+                                        </p:attrNameLst>
+                                      </p:cBhvr>
+                                      <p:to>
+                                        <p:strVal val="visible"/>
+                                      </p:to>
+                                    </p:set>
+                                  </p:childTnLst>
+                                </p:cTn>
+                              </p:par>
+                            </p:childTnLst>
+                          </p:cTn>
+                        </p:par>
+                      </p:childTnLst>
+                    </p:cTn>
+                  </p:par>
+                  <p:par>
+                    <p:cTn id="9" fill="hold">
+                      <p:stCondLst>
+                        <p:cond delay="indefinite"/>
+                      </p:stCondLst>
+                      <p:childTnLst>
+                        <p:par>
+                          <p:cTn id="10" fill="hold">
+                            <p:stCondLst>
+                              <p:cond delay="0"/>
+                            </p:stCondLst>
+                            <p:childTnLst>
+                              <p:par>
+                                <p:cTn id="11" presetID="1" presetClass="entr" presetSubtype="0" fill="hold" nodeType="clickEffect">
+                                  <p:stCondLst>
+                                    <p:cond delay="0"/>
+                                  </p:stCondLst>
+                                  <p:childTnLst>
+                                    <p:set>
+                                      <p:cBhvr>
+                                        <p:cTn id="12" dur="1" fill="hold">
+                                          <p:stCondLst>
+                                            <p:cond delay="0"/>
+                                          </p:stCondLst>
+                                        </p:cTn>
+                                        <p:tgtEl>
+                                          <p:spTgt spid="10"/>
+                                        </p:tgtEl>
+                                        <p:attrNameLst>
+                                          <p:attrName>style.visibility</p:attrName>
+                                        </p:attrNameLst>
+                                      </p:cBhvr>
+                                      <p:to>
+                                        <p:strVal val="visible"/>
+                                      </p:to>
+                                    </p:set>
+                                  </p:childTnLst>
+                                </p:cTn>
+                              </p:par>
+                              <p:par>
+                                <p:cTn id="13" presetID="1" presetClass="entr" presetSubtype="0" fill="hold" grpId="0" nodeType="withEffect">
+                                  <p:stCondLst>
+                                    <p:cond delay="0"/>
+                                  </p:stCondLst>
+                                  <p:childTnLst>
+                                    <p:set>
+                                      <p:cBhvr>
+                                        <p:cTn id="14" dur="1" fill="hold">
+                                          <p:stCondLst>
+                                            <p:cond delay="0"/>
+                                          </p:stCondLst>
+                                        </p:cTn>
+                                        <p:tgtEl>
+                                          <p:spTgt spid="4">
+                                            <p:txEl>
+                                              <p:pRg st="9" end="9"/>
+                                            </p:txEl>
+                                          </p:spTgt>
+                                        </p:tgtEl>
+                                        <p:attrNameLst>
+                                          <p:attrName>style.visibility</p:attrName>
+                                        </p:attrNameLst>
+                                      </p:cBhvr>
+                                      <p:to>
+                                        <p:strVal val="visible"/>
+                                      </p:to>
+                                    </p:set>
+                                  </p:childTnLst>
+                                </p:cTn>
+                              </p:par>
+                            </p:childTnLst>
+                          </p:cTn>
+                        </p:par>
+                      </p:childTnLst>
+                    </p:cTn>
+                  </p:par>
+                </p:childTnLst>
+              </p:cTn>
+              <p:prevCondLst>
+                <p:cond evt="onPrev" delay="0">
+                  <p:tgtEl>
+                    <p:sldTgt/>
+                  </p:tgtEl>
+                </p:cond>
+              </p:prevCondLst>
+              <p:nextCondLst>
+                <p:cond evt="onNext" delay="0">
+                  <p:tgtEl>
+                    <p:sldTgt/>
+                  </p:tgtEl>
+                </p:cond>
+              </p:nextCondLst>
+            </p:seq>
+          </p:childTnLst>
+        </p:cTn>
+      </p:par>
+    </p:tnLst>
+    <p:bldLst>
+      <p:bldP spid="3" grpId="0" build="p"/>
+      <p:bldP spid="4" grpId="0" build="p"/>
+    </p:bldLst>
+  </p:timing>
 </p:sld>
 </file>
 
